--- a/poster/final-poster.pptx
+++ b/poster/final-poster.pptx
@@ -4010,7 +4010,7 @@
           <a:p xmlns:a="http://schemas.openxmlformats.org/drawingml/2006/main">
             <a:r>
               <a:rPr sz="900" b="1"/>
-              <a:t>Commit [FINAL-COMMIT]  ·  MIT licence</a:t>
+              <a:t>Commit a38a684  ·  MIT licence</a:t>
             </a:r>
           </a:p>
         </p:txBody>

--- a/poster/final-poster.pptx
+++ b/poster/final-poster.pptx
@@ -1,26 +1,121 @@
 
 <file path=ppt/presentation.xml><?xml version="1.0" encoding="utf-8"?>
-<p:presentation xmlns:p="http://schemas.openxmlformats.org/presentationml/2006/main">
+<p:presentation xmlns:a="http://schemas.openxmlformats.org/drawingml/2006/main" xmlns:r="http://schemas.openxmlformats.org/officeDocument/2006/relationships" xmlns:p="http://schemas.openxmlformats.org/presentationml/2006/main">
   <p:sldMasterIdLst>
-    <p:sldMasterId xmlns:r="http://schemas.openxmlformats.org/officeDocument/2006/relationships" id="2147483648" r:id="R290f120eac894cd0"/>
+    <p:sldMasterId id="2147483648" r:id="rId1"/>
   </p:sldMasterIdLst>
   <p:notesMasterIdLst>
-    <p:notesMasterId xmlns:r="http://schemas.openxmlformats.org/officeDocument/2006/relationships" r:id="R27e337629b6841b0"/>
+    <p:notesMasterId r:id="rId3"/>
   </p:notesMasterIdLst>
   <p:sldIdLst>
-    <p:sldId xmlns:r="http://schemas.openxmlformats.org/officeDocument/2006/relationships" id="256" r:id="Rad379daf77304c3b"/>
+    <p:sldId id="256" r:id="rId2"/>
   </p:sldIdLst>
-  <p:sldSz cx="42804000" cy="30276000"/>
+  <p:sldSz cx="42803763" cy="30275213"/>
   <p:notesSz cx="6858000" cy="9144000"/>
+  <p:defaultTextStyle>
+    <a:defPPr>
+      <a:defRPr lang="zh-CN"/>
+    </a:defPPr>
+    <a:lvl1pPr marL="0" algn="l" defTabSz="914400" rtl="0" eaLnBrk="1" latinLnBrk="0" hangingPunct="1">
+      <a:defRPr sz="1800" kern="1200">
+        <a:solidFill>
+          <a:schemeClr val="tx1"/>
+        </a:solidFill>
+        <a:latin typeface="+mn-lt"/>
+        <a:ea typeface="+mn-ea"/>
+        <a:cs typeface="+mn-cs"/>
+      </a:defRPr>
+    </a:lvl1pPr>
+    <a:lvl2pPr marL="457200" algn="l" defTabSz="914400" rtl="0" eaLnBrk="1" latinLnBrk="0" hangingPunct="1">
+      <a:defRPr sz="1800" kern="1200">
+        <a:solidFill>
+          <a:schemeClr val="tx1"/>
+        </a:solidFill>
+        <a:latin typeface="+mn-lt"/>
+        <a:ea typeface="+mn-ea"/>
+        <a:cs typeface="+mn-cs"/>
+      </a:defRPr>
+    </a:lvl2pPr>
+    <a:lvl3pPr marL="914400" algn="l" defTabSz="914400" rtl="0" eaLnBrk="1" latinLnBrk="0" hangingPunct="1">
+      <a:defRPr sz="1800" kern="1200">
+        <a:solidFill>
+          <a:schemeClr val="tx1"/>
+        </a:solidFill>
+        <a:latin typeface="+mn-lt"/>
+        <a:ea typeface="+mn-ea"/>
+        <a:cs typeface="+mn-cs"/>
+      </a:defRPr>
+    </a:lvl3pPr>
+    <a:lvl4pPr marL="1371600" algn="l" defTabSz="914400" rtl="0" eaLnBrk="1" latinLnBrk="0" hangingPunct="1">
+      <a:defRPr sz="1800" kern="1200">
+        <a:solidFill>
+          <a:schemeClr val="tx1"/>
+        </a:solidFill>
+        <a:latin typeface="+mn-lt"/>
+        <a:ea typeface="+mn-ea"/>
+        <a:cs typeface="+mn-cs"/>
+      </a:defRPr>
+    </a:lvl4pPr>
+    <a:lvl5pPr marL="1828800" algn="l" defTabSz="914400" rtl="0" eaLnBrk="1" latinLnBrk="0" hangingPunct="1">
+      <a:defRPr sz="1800" kern="1200">
+        <a:solidFill>
+          <a:schemeClr val="tx1"/>
+        </a:solidFill>
+        <a:latin typeface="+mn-lt"/>
+        <a:ea typeface="+mn-ea"/>
+        <a:cs typeface="+mn-cs"/>
+      </a:defRPr>
+    </a:lvl5pPr>
+    <a:lvl6pPr marL="2286000" algn="l" defTabSz="914400" rtl="0" eaLnBrk="1" latinLnBrk="0" hangingPunct="1">
+      <a:defRPr sz="1800" kern="1200">
+        <a:solidFill>
+          <a:schemeClr val="tx1"/>
+        </a:solidFill>
+        <a:latin typeface="+mn-lt"/>
+        <a:ea typeface="+mn-ea"/>
+        <a:cs typeface="+mn-cs"/>
+      </a:defRPr>
+    </a:lvl6pPr>
+    <a:lvl7pPr marL="2743200" algn="l" defTabSz="914400" rtl="0" eaLnBrk="1" latinLnBrk="0" hangingPunct="1">
+      <a:defRPr sz="1800" kern="1200">
+        <a:solidFill>
+          <a:schemeClr val="tx1"/>
+        </a:solidFill>
+        <a:latin typeface="+mn-lt"/>
+        <a:ea typeface="+mn-ea"/>
+        <a:cs typeface="+mn-cs"/>
+      </a:defRPr>
+    </a:lvl7pPr>
+    <a:lvl8pPr marL="3200400" algn="l" defTabSz="914400" rtl="0" eaLnBrk="1" latinLnBrk="0" hangingPunct="1">
+      <a:defRPr sz="1800" kern="1200">
+        <a:solidFill>
+          <a:schemeClr val="tx1"/>
+        </a:solidFill>
+        <a:latin typeface="+mn-lt"/>
+        <a:ea typeface="+mn-ea"/>
+        <a:cs typeface="+mn-cs"/>
+      </a:defRPr>
+    </a:lvl8pPr>
+    <a:lvl9pPr marL="3657600" algn="l" defTabSz="914400" rtl="0" eaLnBrk="1" latinLnBrk="0" hangingPunct="1">
+      <a:defRPr sz="1800" kern="1200">
+        <a:solidFill>
+          <a:schemeClr val="tx1"/>
+        </a:solidFill>
+        <a:latin typeface="+mn-lt"/>
+        <a:ea typeface="+mn-ea"/>
+        <a:cs typeface="+mn-cs"/>
+      </a:defRPr>
+    </a:lvl9pPr>
+  </p:defaultTextStyle>
 </p:presentation>
 </file>
 
 <file path=ppt/notesMasters/notesMaster1.xml><?xml version="1.0" encoding="utf-8"?>
-<p:notesMaster xmlns:p="http://schemas.openxmlformats.org/presentationml/2006/main">
+<p:notesMaster xmlns:a="http://schemas.openxmlformats.org/drawingml/2006/main" xmlns:r="http://schemas.openxmlformats.org/officeDocument/2006/relationships" xmlns:p="http://schemas.openxmlformats.org/presentationml/2006/main">
   <p:cSld>
     <p:bg>
       <p:bgRef idx="1001">
-        <a:schemeClr xmlns:a="http://schemas.openxmlformats.org/drawingml/2006/main" val="bg1"/>
+        <a:schemeClr val="bg1"/>
       </p:bgRef>
     </p:bg>
     <p:spTree>
@@ -30,380 +125,164 @@
         <p:nvPr/>
       </p:nvGrpSpPr>
       <p:grpSpPr>
-        <a:xfrm xmlns:a="http://schemas.openxmlformats.org/drawingml/2006/main"/>
+        <a:xfrm>
+          <a:off x="0" y="0"/>
+          <a:ext cx="0" cy="0"/>
+          <a:chOff x="0" y="0"/>
+          <a:chExt cx="0" cy="0"/>
+        </a:xfrm>
       </p:grpSpPr>
       <p:sp>
         <p:nvSpPr>
           <p:cNvPr id="2" name="Header Placeholder"/>
-          <p:cNvSpPr/>
+          <p:cNvSpPr>
+            <a:spLocks noGrp="1"/>
+          </p:cNvSpPr>
           <p:nvPr>
             <p:ph type="hdr" sz="quarter"/>
           </p:nvPr>
         </p:nvSpPr>
         <p:spPr>
-          <a:prstGeom xmlns:a="http://schemas.openxmlformats.org/drawingml/2006/main" prst="rect">
-            <a:avLst/>
-          </a:prstGeom>
-        </p:spPr>
-        <p:txBody>
-          <a:bodyPr xmlns:a="http://schemas.openxmlformats.org/drawingml/2006/main"/>
-          <a:lstStyle xmlns:a="http://schemas.openxmlformats.org/drawingml/2006/main"/>
-          <a:p xmlns:a="http://schemas.openxmlformats.org/drawingml/2006/main"/>
+          <a:prstGeom prst="rect">
+            <a:avLst/>
+          </a:prstGeom>
+        </p:spPr>
+        <p:txBody>
+          <a:bodyPr/>
+          <a:lstStyle/>
+          <a:p>
+            <a:endParaRPr/>
+          </a:p>
         </p:txBody>
       </p:sp>
       <p:sp>
         <p:nvSpPr>
           <p:cNvPr id="3" name="Date Placeholder"/>
-          <p:cNvSpPr/>
+          <p:cNvSpPr>
+            <a:spLocks noGrp="1"/>
+          </p:cNvSpPr>
           <p:nvPr>
             <p:ph type="dt" sz="quarter" idx="1"/>
           </p:nvPr>
         </p:nvSpPr>
         <p:spPr>
-          <a:prstGeom xmlns:a="http://schemas.openxmlformats.org/drawingml/2006/main" prst="rect">
-            <a:avLst/>
-          </a:prstGeom>
-        </p:spPr>
-        <p:txBody>
-          <a:bodyPr xmlns:a="http://schemas.openxmlformats.org/drawingml/2006/main"/>
-          <a:lstStyle xmlns:a="http://schemas.openxmlformats.org/drawingml/2006/main"/>
-          <a:p xmlns:a="http://schemas.openxmlformats.org/drawingml/2006/main"/>
+          <a:prstGeom prst="rect">
+            <a:avLst/>
+          </a:prstGeom>
+        </p:spPr>
+        <p:txBody>
+          <a:bodyPr/>
+          <a:lstStyle/>
+          <a:p>
+            <a:endParaRPr/>
+          </a:p>
         </p:txBody>
       </p:sp>
       <p:sp>
         <p:nvSpPr>
           <p:cNvPr id="4" name="Slide Image Placeholder"/>
-          <p:cNvSpPr/>
+          <p:cNvSpPr>
+            <a:spLocks noGrp="1" noRot="1" noChangeAspect="1"/>
+          </p:cNvSpPr>
           <p:nvPr>
             <p:ph type="sldImg" idx="2"/>
           </p:nvPr>
         </p:nvSpPr>
         <p:spPr>
-          <a:prstGeom xmlns:a="http://schemas.openxmlformats.org/drawingml/2006/main" prst="rect">
-            <a:avLst/>
-          </a:prstGeom>
-        </p:spPr>
-        <p:txBody>
-          <a:bodyPr xmlns:a="http://schemas.openxmlformats.org/drawingml/2006/main"/>
-          <a:lstStyle xmlns:a="http://schemas.openxmlformats.org/drawingml/2006/main"/>
-          <a:p xmlns:a="http://schemas.openxmlformats.org/drawingml/2006/main"/>
+          <a:prstGeom prst="rect">
+            <a:avLst/>
+          </a:prstGeom>
+        </p:spPr>
+        <p:txBody>
+          <a:bodyPr/>
+          <a:lstStyle/>
+          <a:p>
+            <a:endParaRPr/>
+          </a:p>
         </p:txBody>
       </p:sp>
       <p:sp>
         <p:nvSpPr>
           <p:cNvPr id="5" name="Notes Placeholder"/>
-          <p:cNvSpPr/>
+          <p:cNvSpPr>
+            <a:spLocks noGrp="1"/>
+          </p:cNvSpPr>
           <p:nvPr>
             <p:ph type="body" sz="quarter" idx="3"/>
           </p:nvPr>
         </p:nvSpPr>
         <p:spPr>
-          <a:prstGeom xmlns:a="http://schemas.openxmlformats.org/drawingml/2006/main" prst="rect">
-            <a:avLst/>
-          </a:prstGeom>
-        </p:spPr>
-        <p:txBody>
-          <a:bodyPr xmlns:a="http://schemas.openxmlformats.org/drawingml/2006/main"/>
-          <a:lstStyle xmlns:a="http://schemas.openxmlformats.org/drawingml/2006/main"/>
-          <a:p xmlns:a="http://schemas.openxmlformats.org/drawingml/2006/main"/>
+          <a:prstGeom prst="rect">
+            <a:avLst/>
+          </a:prstGeom>
+        </p:spPr>
+        <p:txBody>
+          <a:bodyPr/>
+          <a:lstStyle/>
+          <a:p>
+            <a:endParaRPr/>
+          </a:p>
         </p:txBody>
       </p:sp>
       <p:sp>
         <p:nvSpPr>
           <p:cNvPr id="6" name="Footer Placeholder"/>
-          <p:cNvSpPr/>
+          <p:cNvSpPr>
+            <a:spLocks noGrp="1"/>
+          </p:cNvSpPr>
           <p:nvPr>
             <p:ph type="ftr" sz="quarter" idx="4"/>
           </p:nvPr>
         </p:nvSpPr>
         <p:spPr>
-          <a:prstGeom xmlns:a="http://schemas.openxmlformats.org/drawingml/2006/main" prst="rect">
-            <a:avLst/>
-          </a:prstGeom>
-        </p:spPr>
-        <p:txBody>
-          <a:bodyPr xmlns:a="http://schemas.openxmlformats.org/drawingml/2006/main"/>
-          <a:lstStyle xmlns:a="http://schemas.openxmlformats.org/drawingml/2006/main"/>
-          <a:p xmlns:a="http://schemas.openxmlformats.org/drawingml/2006/main"/>
+          <a:prstGeom prst="rect">
+            <a:avLst/>
+          </a:prstGeom>
+        </p:spPr>
+        <p:txBody>
+          <a:bodyPr/>
+          <a:lstStyle/>
+          <a:p>
+            <a:endParaRPr/>
+          </a:p>
         </p:txBody>
       </p:sp>
       <p:sp>
         <p:nvSpPr>
           <p:cNvPr id="7" name="Slide Number Placeholder"/>
-          <p:cNvSpPr/>
+          <p:cNvSpPr>
+            <a:spLocks noGrp="1"/>
+          </p:cNvSpPr>
           <p:nvPr>
             <p:ph type="sldNum" sz="quarter" idx="5"/>
           </p:nvPr>
         </p:nvSpPr>
         <p:spPr>
-          <a:prstGeom xmlns:a="http://schemas.openxmlformats.org/drawingml/2006/main" prst="rect">
-            <a:avLst/>
-          </a:prstGeom>
-        </p:spPr>
-        <p:txBody>
-          <a:bodyPr xmlns:a="http://schemas.openxmlformats.org/drawingml/2006/main"/>
-          <a:lstStyle xmlns:a="http://schemas.openxmlformats.org/drawingml/2006/main"/>
-          <a:p xmlns:a="http://schemas.openxmlformats.org/drawingml/2006/main"/>
+          <a:prstGeom prst="rect">
+            <a:avLst/>
+          </a:prstGeom>
+        </p:spPr>
+        <p:txBody>
+          <a:bodyPr/>
+          <a:lstStyle/>
+          <a:p>
+            <a:endParaRPr/>
+          </a:p>
         </p:txBody>
       </p:sp>
     </p:spTree>
   </p:cSld>
   <p:clrMap bg1="lt1" tx1="dk1" bg2="lt2" tx2="dk2" accent1="accent1" accent2="accent2" accent3="accent3" accent4="accent4" accent5="accent5" accent6="accent6" hlink="hlink" folHlink="folHlink"/>
   <p:notesStyle>
-    <a:lvl1pPr xmlns:a="http://schemas.openxmlformats.org/drawingml/2006/main" marL="0" algn="l" defTabSz="914400" rtl="0" eaLnBrk="1" latinLnBrk="0" hangingPunct="1">
+    <a:lvl1pPr marL="0" algn="l" defTabSz="914400" rtl="0" eaLnBrk="1" latinLnBrk="0" hangingPunct="1">
       <a:defRPr sz="1200" kern="1200"/>
     </a:lvl1pPr>
   </p:notesStyle>
 </p:notesMaster>
 </file>
 
-<file path=ppt/notesMasters/theme/theme3.xml><?xml version="1.0" encoding="utf-8"?>
-<a:theme xmlns:a="http://schemas.openxmlformats.org/drawingml/2006/main" name="ChatGPT">
-  <a:themeElements>
-    <a:clrScheme name="ChatGPT">
-      <a:dk1>
-        <a:srgbClr val="000000"/>
-      </a:dk1>
-      <a:lt1>
-        <a:srgbClr val="FFFFFF"/>
-      </a:lt1>
-      <a:dk2>
-        <a:srgbClr val="0E2841"/>
-      </a:dk2>
-      <a:lt2>
-        <a:srgbClr val="E8E8E8"/>
-      </a:lt2>
-      <a:accent1>
-        <a:srgbClr val="156082"/>
-      </a:accent1>
-      <a:accent2>
-        <a:srgbClr val="E97132"/>
-      </a:accent2>
-      <a:accent3>
-        <a:srgbClr val="196B24"/>
-      </a:accent3>
-      <a:accent4>
-        <a:srgbClr val="0F9ED5"/>
-      </a:accent4>
-      <a:accent5>
-        <a:srgbClr val="A02B93"/>
-      </a:accent5>
-      <a:accent6>
-        <a:srgbClr val="4EA72E"/>
-      </a:accent6>
-      <a:hlink>
-        <a:srgbClr val="467886"/>
-      </a:hlink>
-      <a:folHlink>
-        <a:srgbClr val="96607D"/>
-      </a:folHlink>
-    </a:clrScheme>
-    <a:fontScheme name="Office">
-      <a:majorFont>
-        <a:latin typeface="Calibri Light"/>
-        <a:ea typeface="Calibri Light"/>
-        <a:cs typeface="Calibri Light"/>
-      </a:majorFont>
-      <a:minorFont>
-        <a:latin typeface="Calibri"/>
-        <a:ea typeface="Calibri"/>
-        <a:cs typeface="Calibri"/>
-      </a:minorFont>
-    </a:fontScheme>
-    <a:fmtScheme name="ChatGPT">
-      <a:fillStyleLst>
-        <a:solidFill>
-          <a:schemeClr val="phClr"/>
-        </a:solidFill>
-        <a:gradFill>
-          <a:gsLst>
-            <a:gs pos="0">
-              <a:schemeClr val="phClr">
-                <a:tint val="67000"/>
-                <a:lumMod val="110000"/>
-                <a:satMod val="105000"/>
-              </a:schemeClr>
-            </a:gs>
-            <a:gs pos="50000">
-              <a:schemeClr val="phClr">
-                <a:tint val="73000"/>
-                <a:lumMod val="105000"/>
-                <a:satMod val="103000"/>
-              </a:schemeClr>
-            </a:gs>
-            <a:gs pos="100000">
-              <a:schemeClr val="phClr">
-                <a:tint val="81000"/>
-                <a:lumMod val="105000"/>
-                <a:satMod val="109000"/>
-              </a:schemeClr>
-            </a:gs>
-          </a:gsLst>
-          <a:lin ang="5400000" scaled="0"/>
-        </a:gradFill>
-        <a:gradFill>
-          <a:gsLst>
-            <a:gs pos="0">
-              <a:schemeClr val="phClr">
-                <a:tint val="94000"/>
-                <a:lumMod val="102000"/>
-                <a:satMod val="103000"/>
-              </a:schemeClr>
-            </a:gs>
-            <a:gs pos="50000">
-              <a:schemeClr val="phClr">
-                <a:shade val="100000"/>
-                <a:lumMod val="100000"/>
-                <a:satMod val="110000"/>
-              </a:schemeClr>
-            </a:gs>
-            <a:gs pos="100000">
-              <a:schemeClr val="phClr">
-                <a:shade val="78000"/>
-                <a:lumMod val="99000"/>
-                <a:satMod val="120000"/>
-              </a:schemeClr>
-            </a:gs>
-          </a:gsLst>
-          <a:lin ang="5400000" scaled="0"/>
-        </a:gradFill>
-      </a:fillStyleLst>
-      <a:lnStyleLst>
-        <a:ln w="12700">
-          <a:solidFill>
-            <a:schemeClr val="phClr"/>
-          </a:solidFill>
-          <a:prstDash val="solid"/>
-        </a:ln>
-        <a:ln w="19050">
-          <a:solidFill>
-            <a:schemeClr val="phClr"/>
-          </a:solidFill>
-          <a:prstDash val="solid"/>
-        </a:ln>
-        <a:ln w="25400">
-          <a:solidFill>
-            <a:schemeClr val="phClr"/>
-          </a:solidFill>
-          <a:prstDash val="solid"/>
-        </a:ln>
-      </a:lnStyleLst>
-      <a:effectStyleLst>
-        <a:effectStyle>
-          <a:effectLst/>
-        </a:effectStyle>
-        <a:effectStyle>
-          <a:effectLst/>
-        </a:effectStyle>
-        <a:effectStyle>
-          <a:effectLst>
-            <a:outerShdw blurRad="57150" dist="19050" dir="5400000">
-              <a:srgbClr val="000000">
-                <a:alpha val="16000"/>
-              </a:srgbClr>
-            </a:outerShdw>
-          </a:effectLst>
-        </a:effectStyle>
-        <a:effectStyle>
-          <a:effectLst>
-            <a:outerShdw blurRad="19050" dist="9525" dir="5400000">
-              <a:srgbClr val="000000">
-                <a:alpha val="6000"/>
-              </a:srgbClr>
-            </a:outerShdw>
-          </a:effectLst>
-        </a:effectStyle>
-        <a:effectStyle>
-          <a:effectLst>
-            <a:outerShdw blurRad="28575" dist="9525" dir="5400000">
-              <a:srgbClr val="000000">
-                <a:alpha val="8000"/>
-              </a:srgbClr>
-            </a:outerShdw>
-          </a:effectLst>
-        </a:effectStyle>
-        <a:effectStyle>
-          <a:effectLst>
-            <a:outerShdw blurRad="57150" dist="19050" dir="5400000">
-              <a:srgbClr val="000000">
-                <a:alpha val="10000"/>
-              </a:srgbClr>
-            </a:outerShdw>
-          </a:effectLst>
-        </a:effectStyle>
-        <a:effectStyle>
-          <a:effectLst>
-            <a:outerShdw blurRad="114300" dist="38100" dir="5400000">
-              <a:srgbClr val="000000">
-                <a:alpha val="12000"/>
-              </a:srgbClr>
-            </a:outerShdw>
-          </a:effectLst>
-        </a:effectStyle>
-        <a:effectStyle>
-          <a:effectLst>
-            <a:outerShdw blurRad="171450" dist="57150" dir="5400000">
-              <a:srgbClr val="000000">
-                <a:alpha val="16000"/>
-              </a:srgbClr>
-            </a:outerShdw>
-          </a:effectLst>
-        </a:effectStyle>
-        <a:effectStyle>
-          <a:effectLst>
-            <a:outerShdw blurRad="266700" dist="95250" dir="5400000">
-              <a:srgbClr val="000000">
-                <a:alpha val="24000"/>
-              </a:srgbClr>
-            </a:outerShdw>
-          </a:effectLst>
-        </a:effectStyle>
-      </a:effectStyleLst>
-      <a:bgFillStyleLst>
-        <a:solidFill>
-          <a:schemeClr val="phClr"/>
-        </a:solidFill>
-        <a:solidFill>
-          <a:schemeClr val="phClr">
-            <a:tint val="95000"/>
-            <a:satMod val="170000"/>
-          </a:schemeClr>
-        </a:solidFill>
-        <a:gradFill>
-          <a:gsLst>
-            <a:gs pos="0">
-              <a:schemeClr val="phClr">
-                <a:tint val="93000"/>
-                <a:shade val="98000"/>
-                <a:lumMod val="102000"/>
-                <a:satMod val="150000"/>
-              </a:schemeClr>
-            </a:gs>
-            <a:gs pos="50000">
-              <a:schemeClr val="phClr">
-                <a:tint val="98000"/>
-                <a:shade val="90000"/>
-                <a:lumMod val="103000"/>
-                <a:satMod val="130000"/>
-              </a:schemeClr>
-            </a:gs>
-            <a:gs pos="100000">
-              <a:schemeClr val="phClr">
-                <a:shade val="63000"/>
-                <a:satMod val="120000"/>
-              </a:schemeClr>
-            </a:gs>
-          </a:gsLst>
-          <a:lin ang="5400000" scaled="0"/>
-        </a:gradFill>
-      </a:bgFillStyleLst>
-    </a:fmtScheme>
-  </a:themeElements>
-</a:theme>
-</file>
-
 <file path=ppt/notesSlides/notesSlide1.xml><?xml version="1.0" encoding="utf-8"?>
-<p:notes xmlns:p="http://schemas.openxmlformats.org/presentationml/2006/main">
+<p:notes xmlns:a="http://schemas.openxmlformats.org/drawingml/2006/main" xmlns:r="http://schemas.openxmlformats.org/officeDocument/2006/relationships" xmlns:p="http://schemas.openxmlformats.org/presentationml/2006/main">
   <p:cSld>
     <p:spTree>
       <p:nvGrpSpPr>
@@ -412,16 +291,21 @@
         <p:nvPr/>
       </p:nvGrpSpPr>
       <p:grpSpPr>
-        <a:xfrm xmlns:a="http://schemas.openxmlformats.org/drawingml/2006/main"/>
+        <a:xfrm>
+          <a:off x="0" y="0"/>
+          <a:ext cx="0" cy="0"/>
+          <a:chOff x="0" y="0"/>
+          <a:chExt cx="0" cy="0"/>
+        </a:xfrm>
       </p:grpSpPr>
       <p:sp>
         <p:nvSpPr>
           <p:cNvPr id="2" name="Slide Image Placeholder 1"/>
           <p:cNvSpPr>
-            <a:spLocks xmlns:a="http://schemas.openxmlformats.org/drawingml/2006/main" noGrp="1"/>
+            <a:spLocks noGrp="1" noRot="1" noChangeAspect="1"/>
           </p:cNvSpPr>
           <p:nvPr>
-            <p:ph type="sldImg" idx="0"/>
+            <p:ph type="sldImg"/>
           </p:nvPr>
         </p:nvSpPr>
         <p:spPr/>
@@ -430,7 +314,7 @@
         <p:nvSpPr>
           <p:cNvPr id="3" name="Notes Placeholder 2"/>
           <p:cNvSpPr>
-            <a:spLocks xmlns:a="http://schemas.openxmlformats.org/drawingml/2006/main" noGrp="1"/>
+            <a:spLocks noGrp="1"/>
           </p:cNvSpPr>
           <p:nvPr>
             <p:ph type="body" idx="1"/>
@@ -438,24 +322,24 @@
         </p:nvSpPr>
         <p:spPr/>
         <p:txBody>
-          <a:bodyPr xmlns:a="http://schemas.openxmlformats.org/drawingml/2006/main"/>
-          <a:lstStyle xmlns:a="http://schemas.openxmlformats.org/drawingml/2006/main"/>
-          <a:p xmlns:a="http://schemas.openxmlformats.org/drawingml/2006/main">
+          <a:bodyPr/>
+          <a:lstStyle/>
+          <a:p>
             <a:r>
               <a:t>COMSCI/ECON 206 PS2 clean A0 poster template.</a:t>
             </a:r>
           </a:p>
-          <a:p xmlns:a="http://schemas.openxmlformats.org/drawingml/2006/main">
+          <a:p>
             <a:r>
               <a:t>Brand guide: https://dku-web-admissions.s3.cn-north-1.amazonaws.com.cn/dkumain/wp-content/uploads/mainsite/2022/05/brand-guide-compressed_2021.pdf, linked from https://www.dukekunshan.edu.cn/media/. Guide pp. 5, 6, 12, 14, and 15 establish logo clear space/proportions, unchanged logo artwork, application colors #003399 and #006633 plus white, and Calibri as the office system font when InterstatePlus cannot be used. Official logo asset: https://www.dukekunshan.edu.cn/wp-content/uploads/2021/08/large_dku-Logo.png.</a:t>
             </a:r>
           </a:p>
-          <a:p xmlns:a="http://schemas.openxmlformats.org/drawingml/2006/main">
+          <a:p>
             <a:r>
               <a:t>Calibri is specified in the editable PowerPoint. The exported PDF uses Carlito, a metric-compatible open-source substitute because Calibri is unavailable in the export environment. Re-export from PowerPoint with Calibri for institution-font-exact output.</a:t>
             </a:r>
           </a:p>
-          <a:p xmlns:a="http://schemas.openxmlformats.org/drawingml/2006/main">
+          <a:p>
             <a:r>
               <a:t>Clean and annotated versions share all element positions. Keep A0 landscape 1189 x 841 mm, 100% print scale. Text and figure/QR placeholders are editable; preserve the embedded logo unchanged and keep at least half its height as clear space. Instructor belongs below authors, not in the author list. Replace all placeholders with actual work; distinguish observed results, inferences, and planned tests. QR codes are optional but full public URLs and tested access are required. References must be full and traceable; acknowledgments must name actual contributions and AI assistance. Sep 28: symposium, peer evaluation and real-world case impacts. Sep 30: final update. The PS1-style paper, LaTeX, and learning pathway are unchanged.</a:t>
             </a:r>
@@ -466,7 +350,7 @@
         <p:nvSpPr>
           <p:cNvPr id="4" name="Slide Number Placeholder 3"/>
           <p:cNvSpPr>
-            <a:spLocks xmlns:a="http://schemas.openxmlformats.org/drawingml/2006/main" noGrp="1"/>
+            <a:spLocks noGrp="1"/>
           </p:cNvSpPr>
           <p:nvPr>
             <p:ph type="sldNum" idx="5"/>
@@ -474,21 +358,23 @@
         </p:nvSpPr>
         <p:spPr/>
         <p:txBody>
-          <a:bodyPr xmlns:a="http://schemas.openxmlformats.org/drawingml/2006/main"/>
-          <a:lstStyle xmlns:a="http://schemas.openxmlformats.org/drawingml/2006/main"/>
-          <a:p xmlns:a="http://schemas.openxmlformats.org/drawingml/2006/main"/>
+          <a:bodyPr/>
+          <a:lstStyle/>
+          <a:p>
+            <a:endParaRPr/>
+          </a:p>
         </p:txBody>
       </p:sp>
     </p:spTree>
   </p:cSld>
   <p:clrMapOvr>
-    <a:masterClrMapping xmlns:a="http://schemas.openxmlformats.org/drawingml/2006/main"/>
+    <a:masterClrMapping/>
   </p:clrMapOvr>
 </p:notes>
 </file>
 
 <file path=ppt/slideLayouts/slideLayout1.xml><?xml version="1.0" encoding="utf-8"?>
-<p:sldLayout xmlns:p="http://schemas.openxmlformats.org/presentationml/2006/main" type="title">
+<p:sldLayout xmlns:a="http://schemas.openxmlformats.org/drawingml/2006/main" xmlns:r="http://schemas.openxmlformats.org/officeDocument/2006/relationships" xmlns:p="http://schemas.openxmlformats.org/presentationml/2006/main" type="title">
   <p:cSld name="Title Slide">
     <p:spTree>
       <p:nvGrpSpPr>
@@ -497,19 +383,27 @@
         <p:nvPr/>
       </p:nvGrpSpPr>
       <p:grpSpPr>
-        <a:xfrm xmlns:a="http://schemas.openxmlformats.org/drawingml/2006/main"/>
+        <a:xfrm>
+          <a:off x="0" y="0"/>
+          <a:ext cx="0" cy="0"/>
+          <a:chOff x="0" y="0"/>
+          <a:chExt cx="0" cy="0"/>
+        </a:xfrm>
       </p:grpSpPr>
     </p:spTree>
   </p:cSld>
+  <p:clrMapOvr>
+    <a:masterClrMapping/>
+  </p:clrMapOvr>
 </p:sldLayout>
 </file>
 
 <file path=ppt/slideMasters/slideMaster1.xml><?xml version="1.0" encoding="utf-8"?>
-<p:sldMaster xmlns:p="http://schemas.openxmlformats.org/presentationml/2006/main">
+<p:sldMaster xmlns:a="http://schemas.openxmlformats.org/drawingml/2006/main" xmlns:r="http://schemas.openxmlformats.org/officeDocument/2006/relationships" xmlns:p="http://schemas.openxmlformats.org/presentationml/2006/main">
   <p:cSld name="Master">
     <p:bg>
       <p:bgRef idx="1001">
-        <a:schemeClr xmlns:a="http://schemas.openxmlformats.org/drawingml/2006/main" val="bg1"/>
+        <a:schemeClr val="bg1"/>
       </p:bgRef>
     </p:bg>
     <p:spTree>
@@ -519,17 +413,22 @@
         <p:nvPr/>
       </p:nvGrpSpPr>
       <p:grpSpPr>
-        <a:xfrm xmlns:a="http://schemas.openxmlformats.org/drawingml/2006/main"/>
+        <a:xfrm>
+          <a:off x="0" y="0"/>
+          <a:ext cx="0" cy="0"/>
+          <a:chOff x="0" y="0"/>
+          <a:chExt cx="0" cy="0"/>
+        </a:xfrm>
       </p:grpSpPr>
     </p:spTree>
   </p:cSld>
   <p:clrMap bg1="lt1" tx1="dk1" bg2="lt2" tx2="dk2" accent1="accent1" accent2="accent2" accent3="accent3" accent4="accent4" accent5="accent5" accent6="accent6" hlink="hlink" folHlink="folHlink"/>
   <p:sldLayoutIdLst>
-    <p:sldLayoutId xmlns:r="http://schemas.openxmlformats.org/officeDocument/2006/relationships" id="2147483649" r:id="Rb72baf7da2724bc2"/>
+    <p:sldLayoutId id="2147483649" r:id="rId1"/>
   </p:sldLayoutIdLst>
   <p:txStyles>
     <p:titleStyle>
-      <a:lvl1pPr xmlns:a="http://schemas.openxmlformats.org/drawingml/2006/main" algn="l">
+      <a:lvl1pPr algn="l">
         <a:lnSpc>
           <a:spcPct val="90000"/>
         </a:lnSpc>
@@ -548,7 +447,7 @@
       </a:lvl1pPr>
     </p:titleStyle>
     <p:bodyStyle>
-      <a:lvl1pPr xmlns:a="http://schemas.openxmlformats.org/drawingml/2006/main" marL="228600" indent="-228600" algn="l">
+      <a:lvl1pPr marL="228600" indent="-228600" algn="l">
         <a:lnSpc>
           <a:spcPct val="90000"/>
         </a:lnSpc>
@@ -565,7 +464,7 @@
           <a:cs typeface="+mn-lt"/>
         </a:defRPr>
       </a:lvl1pPr>
-      <a:lvl2pPr xmlns:a="http://schemas.openxmlformats.org/drawingml/2006/main" marL="685800" indent="-228600" algn="l">
+      <a:lvl2pPr marL="685800" indent="-228600" algn="l">
         <a:lnSpc>
           <a:spcPct val="90000"/>
         </a:lnSpc>
@@ -582,7 +481,7 @@
           <a:cs typeface="+mn-lt"/>
         </a:defRPr>
       </a:lvl2pPr>
-      <a:lvl3pPr xmlns:a="http://schemas.openxmlformats.org/drawingml/2006/main" marL="1143000" indent="-228600" algn="l">
+      <a:lvl3pPr marL="1143000" indent="-228600" algn="l">
         <a:lnSpc>
           <a:spcPct val="90000"/>
         </a:lnSpc>
@@ -599,7 +498,7 @@
           <a:cs typeface="+mn-lt"/>
         </a:defRPr>
       </a:lvl3pPr>
-      <a:lvl4pPr xmlns:a="http://schemas.openxmlformats.org/drawingml/2006/main" marL="1600200" indent="-228600" algn="l">
+      <a:lvl4pPr marL="1600200" indent="-228600" algn="l">
         <a:lnSpc>
           <a:spcPct val="90000"/>
         </a:lnSpc>
@@ -616,7 +515,7 @@
           <a:cs typeface="+mn-lt"/>
         </a:defRPr>
       </a:lvl4pPr>
-      <a:lvl5pPr xmlns:a="http://schemas.openxmlformats.org/drawingml/2006/main" marL="2057400" indent="-228600" algn="l">
+      <a:lvl5pPr marL="2057400" indent="-228600" algn="l">
         <a:lnSpc>
           <a:spcPct val="90000"/>
         </a:lnSpc>
@@ -633,7 +532,7 @@
           <a:cs typeface="+mn-lt"/>
         </a:defRPr>
       </a:lvl5pPr>
-      <a:lvl6pPr xmlns:a="http://schemas.openxmlformats.org/drawingml/2006/main" marL="2514600" indent="-228600" algn="l">
+      <a:lvl6pPr marL="2514600" indent="-228600" algn="l">
         <a:lnSpc>
           <a:spcPct val="90000"/>
         </a:lnSpc>
@@ -650,7 +549,7 @@
           <a:cs typeface="+mn-lt"/>
         </a:defRPr>
       </a:lvl6pPr>
-      <a:lvl7pPr xmlns:a="http://schemas.openxmlformats.org/drawingml/2006/main" marL="2971800" indent="-228600" algn="l">
+      <a:lvl7pPr marL="2971800" indent="-228600" algn="l">
         <a:lnSpc>
           <a:spcPct val="90000"/>
         </a:lnSpc>
@@ -667,7 +566,7 @@
           <a:cs typeface="+mn-lt"/>
         </a:defRPr>
       </a:lvl7pPr>
-      <a:lvl8pPr xmlns:a="http://schemas.openxmlformats.org/drawingml/2006/main" marL="3429000" indent="-228600" algn="l">
+      <a:lvl8pPr marL="3429000" indent="-228600" algn="l">
         <a:lnSpc>
           <a:spcPct val="90000"/>
         </a:lnSpc>
@@ -684,7 +583,7 @@
           <a:cs typeface="+mn-lt"/>
         </a:defRPr>
       </a:lvl8pPr>
-      <a:lvl9pPr xmlns:a="http://schemas.openxmlformats.org/drawingml/2006/main" marL="3886200" indent="-228600" algn="l">
+      <a:lvl9pPr marL="3886200" indent="-228600" algn="l">
         <a:lnSpc>
           <a:spcPct val="90000"/>
         </a:lnSpc>
@@ -703,7 +602,7 @@
       </a:lvl9pPr>
     </p:bodyStyle>
     <p:otherStyle>
-      <a:lvl1pPr xmlns:a="http://schemas.openxmlformats.org/drawingml/2006/main" marL="0" algn="l">
+      <a:lvl1pPr marL="0" algn="l">
         <a:buNone/>
         <a:defRPr sz="1800">
           <a:solidFill>
@@ -714,7 +613,7 @@
           <a:cs typeface="+mn-lt"/>
         </a:defRPr>
       </a:lvl1pPr>
-      <a:lvl2pPr xmlns:a="http://schemas.openxmlformats.org/drawingml/2006/main" marL="457200" algn="l">
+      <a:lvl2pPr marL="457200" algn="l">
         <a:buNone/>
         <a:defRPr sz="1800">
           <a:solidFill>
@@ -725,7 +624,7 @@
           <a:cs typeface="+mn-lt"/>
         </a:defRPr>
       </a:lvl2pPr>
-      <a:lvl3pPr xmlns:a="http://schemas.openxmlformats.org/drawingml/2006/main" marL="914400" algn="l">
+      <a:lvl3pPr marL="914400" algn="l">
         <a:buNone/>
         <a:defRPr sz="1800">
           <a:solidFill>
@@ -736,7 +635,7 @@
           <a:cs typeface="+mn-lt"/>
         </a:defRPr>
       </a:lvl3pPr>
-      <a:lvl4pPr xmlns:a="http://schemas.openxmlformats.org/drawingml/2006/main" marL="1371600" algn="l">
+      <a:lvl4pPr marL="1371600" algn="l">
         <a:buNone/>
         <a:defRPr sz="1800">
           <a:solidFill>
@@ -747,7 +646,7 @@
           <a:cs typeface="+mn-lt"/>
         </a:defRPr>
       </a:lvl4pPr>
-      <a:lvl5pPr xmlns:a="http://schemas.openxmlformats.org/drawingml/2006/main" marL="1828800" algn="l">
+      <a:lvl5pPr marL="1828800" algn="l">
         <a:buNone/>
         <a:defRPr sz="1800">
           <a:solidFill>
@@ -758,7 +657,7 @@
           <a:cs typeface="+mn-lt"/>
         </a:defRPr>
       </a:lvl5pPr>
-      <a:lvl6pPr xmlns:a="http://schemas.openxmlformats.org/drawingml/2006/main" marL="2286000" algn="l">
+      <a:lvl6pPr marL="2286000" algn="l">
         <a:buNone/>
         <a:defRPr sz="1800">
           <a:solidFill>
@@ -769,7 +668,7 @@
           <a:cs typeface="+mn-lt"/>
         </a:defRPr>
       </a:lvl6pPr>
-      <a:lvl7pPr xmlns:a="http://schemas.openxmlformats.org/drawingml/2006/main" marL="2743200" algn="l">
+      <a:lvl7pPr marL="2743200" algn="l">
         <a:buNone/>
         <a:defRPr sz="1800">
           <a:solidFill>
@@ -780,7 +679,7 @@
           <a:cs typeface="+mn-lt"/>
         </a:defRPr>
       </a:lvl7pPr>
-      <a:lvl8pPr xmlns:a="http://schemas.openxmlformats.org/drawingml/2006/main" marL="3200400" algn="l">
+      <a:lvl8pPr marL="3200400" algn="l">
         <a:buNone/>
         <a:defRPr sz="1800">
           <a:solidFill>
@@ -791,7 +690,7 @@
           <a:cs typeface="+mn-lt"/>
         </a:defRPr>
       </a:lvl8pPr>
-      <a:lvl9pPr xmlns:a="http://schemas.openxmlformats.org/drawingml/2006/main" marL="3657600" algn="l">
+      <a:lvl9pPr marL="3657600" algn="l">
         <a:buNone/>
         <a:defRPr sz="1800">
           <a:solidFill>
@@ -807,259 +706,15 @@
 </p:sldMaster>
 </file>
 
-<file path=ppt/slideMasters/theme/theme2.xml><?xml version="1.0" encoding="utf-8"?>
-<a:theme xmlns:a="http://schemas.openxmlformats.org/drawingml/2006/main" name="ChatGPT">
-  <a:themeElements>
-    <a:clrScheme name="ChatGPT">
-      <a:dk1>
-        <a:srgbClr val="000000"/>
-      </a:dk1>
-      <a:lt1>
-        <a:srgbClr val="FFFFFF"/>
-      </a:lt1>
-      <a:dk2>
-        <a:srgbClr val="0E2841"/>
-      </a:dk2>
-      <a:lt2>
-        <a:srgbClr val="E8E8E8"/>
-      </a:lt2>
-      <a:accent1>
-        <a:srgbClr val="156082"/>
-      </a:accent1>
-      <a:accent2>
-        <a:srgbClr val="E97132"/>
-      </a:accent2>
-      <a:accent3>
-        <a:srgbClr val="196B24"/>
-      </a:accent3>
-      <a:accent4>
-        <a:srgbClr val="0F9ED5"/>
-      </a:accent4>
-      <a:accent5>
-        <a:srgbClr val="A02B93"/>
-      </a:accent5>
-      <a:accent6>
-        <a:srgbClr val="4EA72E"/>
-      </a:accent6>
-      <a:hlink>
-        <a:srgbClr val="467886"/>
-      </a:hlink>
-      <a:folHlink>
-        <a:srgbClr val="96607D"/>
-      </a:folHlink>
-    </a:clrScheme>
-    <a:fontScheme name="Office">
-      <a:majorFont>
-        <a:latin typeface="Calibri Light"/>
-        <a:ea typeface="Calibri Light"/>
-        <a:cs typeface="Calibri Light"/>
-      </a:majorFont>
-      <a:minorFont>
-        <a:latin typeface="Calibri"/>
-        <a:ea typeface="Calibri"/>
-        <a:cs typeface="Calibri"/>
-      </a:minorFont>
-    </a:fontScheme>
-    <a:fmtScheme name="ChatGPT">
-      <a:fillStyleLst>
-        <a:solidFill>
-          <a:schemeClr val="phClr"/>
-        </a:solidFill>
-        <a:gradFill>
-          <a:gsLst>
-            <a:gs pos="0">
-              <a:schemeClr val="phClr">
-                <a:tint val="67000"/>
-                <a:lumMod val="110000"/>
-                <a:satMod val="105000"/>
-              </a:schemeClr>
-            </a:gs>
-            <a:gs pos="50000">
-              <a:schemeClr val="phClr">
-                <a:tint val="73000"/>
-                <a:lumMod val="105000"/>
-                <a:satMod val="103000"/>
-              </a:schemeClr>
-            </a:gs>
-            <a:gs pos="100000">
-              <a:schemeClr val="phClr">
-                <a:tint val="81000"/>
-                <a:lumMod val="105000"/>
-                <a:satMod val="109000"/>
-              </a:schemeClr>
-            </a:gs>
-          </a:gsLst>
-          <a:lin ang="5400000" scaled="0"/>
-        </a:gradFill>
-        <a:gradFill>
-          <a:gsLst>
-            <a:gs pos="0">
-              <a:schemeClr val="phClr">
-                <a:tint val="94000"/>
-                <a:lumMod val="102000"/>
-                <a:satMod val="103000"/>
-              </a:schemeClr>
-            </a:gs>
-            <a:gs pos="50000">
-              <a:schemeClr val="phClr">
-                <a:shade val="100000"/>
-                <a:lumMod val="100000"/>
-                <a:satMod val="110000"/>
-              </a:schemeClr>
-            </a:gs>
-            <a:gs pos="100000">
-              <a:schemeClr val="phClr">
-                <a:shade val="78000"/>
-                <a:lumMod val="99000"/>
-                <a:satMod val="120000"/>
-              </a:schemeClr>
-            </a:gs>
-          </a:gsLst>
-          <a:lin ang="5400000" scaled="0"/>
-        </a:gradFill>
-      </a:fillStyleLst>
-      <a:lnStyleLst>
-        <a:ln w="12700">
-          <a:solidFill>
-            <a:schemeClr val="phClr"/>
-          </a:solidFill>
-          <a:prstDash val="solid"/>
-        </a:ln>
-        <a:ln w="19050">
-          <a:solidFill>
-            <a:schemeClr val="phClr"/>
-          </a:solidFill>
-          <a:prstDash val="solid"/>
-        </a:ln>
-        <a:ln w="25400">
-          <a:solidFill>
-            <a:schemeClr val="phClr"/>
-          </a:solidFill>
-          <a:prstDash val="solid"/>
-        </a:ln>
-      </a:lnStyleLst>
-      <a:effectStyleLst>
-        <a:effectStyle>
-          <a:effectLst/>
-        </a:effectStyle>
-        <a:effectStyle>
-          <a:effectLst/>
-        </a:effectStyle>
-        <a:effectStyle>
-          <a:effectLst>
-            <a:outerShdw blurRad="57150" dist="19050" dir="5400000">
-              <a:srgbClr val="000000">
-                <a:alpha val="16000"/>
-              </a:srgbClr>
-            </a:outerShdw>
-          </a:effectLst>
-        </a:effectStyle>
-        <a:effectStyle>
-          <a:effectLst>
-            <a:outerShdw blurRad="19050" dist="9525" dir="5400000">
-              <a:srgbClr val="000000">
-                <a:alpha val="6000"/>
-              </a:srgbClr>
-            </a:outerShdw>
-          </a:effectLst>
-        </a:effectStyle>
-        <a:effectStyle>
-          <a:effectLst>
-            <a:outerShdw blurRad="28575" dist="9525" dir="5400000">
-              <a:srgbClr val="000000">
-                <a:alpha val="8000"/>
-              </a:srgbClr>
-            </a:outerShdw>
-          </a:effectLst>
-        </a:effectStyle>
-        <a:effectStyle>
-          <a:effectLst>
-            <a:outerShdw blurRad="57150" dist="19050" dir="5400000">
-              <a:srgbClr val="000000">
-                <a:alpha val="10000"/>
-              </a:srgbClr>
-            </a:outerShdw>
-          </a:effectLst>
-        </a:effectStyle>
-        <a:effectStyle>
-          <a:effectLst>
-            <a:outerShdw blurRad="114300" dist="38100" dir="5400000">
-              <a:srgbClr val="000000">
-                <a:alpha val="12000"/>
-              </a:srgbClr>
-            </a:outerShdw>
-          </a:effectLst>
-        </a:effectStyle>
-        <a:effectStyle>
-          <a:effectLst>
-            <a:outerShdw blurRad="171450" dist="57150" dir="5400000">
-              <a:srgbClr val="000000">
-                <a:alpha val="16000"/>
-              </a:srgbClr>
-            </a:outerShdw>
-          </a:effectLst>
-        </a:effectStyle>
-        <a:effectStyle>
-          <a:effectLst>
-            <a:outerShdw blurRad="266700" dist="95250" dir="5400000">
-              <a:srgbClr val="000000">
-                <a:alpha val="24000"/>
-              </a:srgbClr>
-            </a:outerShdw>
-          </a:effectLst>
-        </a:effectStyle>
-      </a:effectStyleLst>
-      <a:bgFillStyleLst>
-        <a:solidFill>
-          <a:schemeClr val="phClr"/>
-        </a:solidFill>
-        <a:solidFill>
-          <a:schemeClr val="phClr">
-            <a:tint val="95000"/>
-            <a:satMod val="170000"/>
-          </a:schemeClr>
-        </a:solidFill>
-        <a:gradFill>
-          <a:gsLst>
-            <a:gs pos="0">
-              <a:schemeClr val="phClr">
-                <a:tint val="93000"/>
-                <a:shade val="98000"/>
-                <a:lumMod val="102000"/>
-                <a:satMod val="150000"/>
-              </a:schemeClr>
-            </a:gs>
-            <a:gs pos="50000">
-              <a:schemeClr val="phClr">
-                <a:tint val="98000"/>
-                <a:shade val="90000"/>
-                <a:lumMod val="103000"/>
-                <a:satMod val="130000"/>
-              </a:schemeClr>
-            </a:gs>
-            <a:gs pos="100000">
-              <a:schemeClr val="phClr">
-                <a:shade val="63000"/>
-                <a:satMod val="120000"/>
-              </a:schemeClr>
-            </a:gs>
-          </a:gsLst>
-          <a:lin ang="5400000" scaled="0"/>
-        </a:gradFill>
-      </a:bgFillStyleLst>
-    </a:fmtScheme>
-  </a:themeElements>
-</a:theme>
-</file>
-
 <file path=ppt/slides/slide1.xml><?xml version="1.0" encoding="utf-8"?>
-<p:sld xmlns:p="http://schemas.openxmlformats.org/presentationml/2006/main">
+<p:sld xmlns:a="http://schemas.openxmlformats.org/drawingml/2006/main" xmlns:r="http://schemas.openxmlformats.org/officeDocument/2006/relationships" xmlns:p="http://schemas.openxmlformats.org/presentationml/2006/main">
   <p:cSld>
     <p:bg>
       <p:bgPr>
-        <a:solidFill xmlns:a="http://schemas.openxmlformats.org/drawingml/2006/main">
+        <a:solidFill>
           <a:srgbClr val="FFFFFF"/>
         </a:solidFill>
+        <a:effectLst/>
       </p:bgPr>
     </p:bg>
     <p:spTree>
@@ -1069,34 +724,39 @@
         <p:nvPr/>
       </p:nvGrpSpPr>
       <p:grpSpPr>
-        <a:xfrm xmlns:a="http://schemas.openxmlformats.org/drawingml/2006/main"/>
+        <a:xfrm>
+          <a:off x="0" y="0"/>
+          <a:ext cx="0" cy="0"/>
+          <a:chOff x="0" y="0"/>
+          <a:chExt cx="0" cy="0"/>
+        </a:xfrm>
       </p:grpSpPr>
       <p:sp>
         <p:nvSpPr>
           <p:cNvPr id="52" name="top-brand-rule">
-            <a:extLst xmlns:a="http://schemas.openxmlformats.org/drawingml/2006/main">
+            <a:extLst>
               <a:ext uri="{FF2B5EF4-FFF2-40B4-BE49-F238E27FC236}">
                 <a16:creationId xmlns:a16="http://schemas.microsoft.com/office/drawing/2014/main" id="{FDACD238-30EA-433B-B9A8-2AB270625A83}"/>
               </a:ext>
             </a:extLst>
           </p:cNvPr>
           <p:cNvSpPr>
-            <a:spLocks xmlns:a="http://schemas.openxmlformats.org/drawingml/2006/main" noGrp="1"/>
+            <a:spLocks noGrp="1"/>
           </p:cNvSpPr>
           <p:nvPr/>
         </p:nvSpPr>
         <p:spPr>
-          <a:xfrm xmlns:a="http://schemas.openxmlformats.org/drawingml/2006/main">
+          <a:xfrm>
             <a:off x="0" y="0"/>
             <a:ext cx="42804000" cy="228600"/>
           </a:xfrm>
-          <a:prstGeom xmlns:a="http://schemas.openxmlformats.org/drawingml/2006/main" prst="rect">
-            <a:avLst/>
-          </a:prstGeom>
-          <a:solidFill xmlns:a="http://schemas.openxmlformats.org/drawingml/2006/main">
+          <a:prstGeom prst="rect">
+            <a:avLst/>
+          </a:prstGeom>
+          <a:solidFill>
             <a:srgbClr val="003399"/>
           </a:solidFill>
-          <a:ln xmlns:a="http://schemas.openxmlformats.org/drawingml/2006/main" w="0">
+          <a:ln w="0">
             <a:noFill/>
             <a:prstDash val="solid"/>
           </a:ln>
@@ -1105,37 +765,37 @@
       <p:sp>
         <p:nvSpPr>
           <p:cNvPr id="2" name="course-line">
-            <a:extLst xmlns:a="http://schemas.openxmlformats.org/drawingml/2006/main">
+            <a:extLst>
               <a:ext uri="{FF2B5EF4-FFF2-40B4-BE49-F238E27FC236}">
                 <a16:creationId xmlns:a16="http://schemas.microsoft.com/office/drawing/2014/main" id="{5806B552-CE06-4C40-BA14-45983C2DB289}"/>
               </a:ext>
             </a:extLst>
           </p:cNvPr>
           <p:cNvSpPr>
-            <a:spLocks xmlns:a="http://schemas.openxmlformats.org/drawingml/2006/main" noGrp="1"/>
+            <a:spLocks noGrp="1"/>
           </p:cNvSpPr>
           <p:nvPr/>
         </p:nvSpPr>
         <p:spPr>
-          <a:xfrm xmlns:a="http://schemas.openxmlformats.org/drawingml/2006/main">
+          <a:xfrm>
             <a:off x="1333500" y="781050"/>
             <a:ext cx="28860750" cy="619125"/>
           </a:xfrm>
-          <a:prstGeom xmlns:a="http://schemas.openxmlformats.org/drawingml/2006/main" prst="rect">
-            <a:avLst/>
-          </a:prstGeom>
-          <a:noFill xmlns:a="http://schemas.openxmlformats.org/drawingml/2006/main"/>
-          <a:ln xmlns:a="http://schemas.openxmlformats.org/drawingml/2006/main" w="0">
+          <a:prstGeom prst="rect">
+            <a:avLst/>
+          </a:prstGeom>
+          <a:noFill/>
+          <a:ln w="0">
             <a:noFill/>
             <a:prstDash val="solid"/>
           </a:ln>
         </p:spPr>
         <p:txBody>
-          <a:bodyPr xmlns:a="http://schemas.openxmlformats.org/drawingml/2006/main" wrap="square" anchor="t">
+          <a:bodyPr wrap="square" anchor="t">
             <a:noAutofit/>
           </a:bodyPr>
-          <a:lstStyle xmlns:a="http://schemas.openxmlformats.org/drawingml/2006/main"/>
-          <a:p xmlns:a="http://schemas.openxmlformats.org/drawingml/2006/main">
+          <a:lstStyle/>
+          <a:p>
             <a:r>
               <a:rPr sz="2775" b="1"/>
               <a:t>COMSCI / ECON 206   |   FINAL PROJECT   |   FALL 2026</a:t>
@@ -1146,37 +806,37 @@
       <p:sp>
         <p:nvSpPr>
           <p:cNvPr id="3" name="version">
-            <a:extLst xmlns:a="http://schemas.openxmlformats.org/drawingml/2006/main">
+            <a:extLst>
               <a:ext uri="{FF2B5EF4-FFF2-40B4-BE49-F238E27FC236}">
                 <a16:creationId xmlns:a16="http://schemas.microsoft.com/office/drawing/2014/main" id="{05588AA4-5EDB-4475-A143-90877DB14160}"/>
               </a:ext>
             </a:extLst>
           </p:cNvPr>
           <p:cNvSpPr>
-            <a:spLocks xmlns:a="http://schemas.openxmlformats.org/drawingml/2006/main" noGrp="1"/>
+            <a:spLocks noGrp="1"/>
           </p:cNvSpPr>
           <p:nvPr/>
         </p:nvSpPr>
         <p:spPr>
-          <a:xfrm xmlns:a="http://schemas.openxmlformats.org/drawingml/2006/main">
+          <a:xfrm>
             <a:off x="31623120" y="5903999"/>
             <a:ext cx="9810720" cy="371520"/>
           </a:xfrm>
-          <a:prstGeom xmlns:a="http://schemas.openxmlformats.org/drawingml/2006/main" prst="rect">
-            <a:avLst/>
-          </a:prstGeom>
-          <a:noFill xmlns:a="http://schemas.openxmlformats.org/drawingml/2006/main"/>
-          <a:ln xmlns:a="http://schemas.openxmlformats.org/drawingml/2006/main" w="0">
+          <a:prstGeom prst="rect">
+            <a:avLst/>
+          </a:prstGeom>
+          <a:noFill/>
+          <a:ln w="0">
             <a:noFill/>
             <a:prstDash val="solid"/>
           </a:ln>
         </p:spPr>
         <p:txBody>
-          <a:bodyPr xmlns:a="http://schemas.openxmlformats.org/drawingml/2006/main" wrap="square" anchor="t">
+          <a:bodyPr wrap="square" anchor="t">
             <a:noAutofit/>
           </a:bodyPr>
-          <a:lstStyle xmlns:a="http://schemas.openxmlformats.org/drawingml/2006/main"/>
-          <a:p xmlns:a="http://schemas.openxmlformats.org/drawingml/2006/main">
+          <a:lstStyle/>
+          <a:p>
             <a:r>
               <a:rPr sz="2100" b="1"/>
               <a:t>FINAL · CAPABILITY-TRANSFER OPENNESS</a:t>
@@ -1187,37 +847,37 @@
       <p:sp>
         <p:nvSpPr>
           <p:cNvPr id="4" name="project-title">
-            <a:extLst xmlns:a="http://schemas.openxmlformats.org/drawingml/2006/main">
+            <a:extLst>
               <a:ext uri="{FF2B5EF4-FFF2-40B4-BE49-F238E27FC236}">
                 <a16:creationId xmlns:a16="http://schemas.microsoft.com/office/drawing/2014/main" id="{B66A5B7F-804A-4F30-B6A0-3C5C2AB4C437}"/>
               </a:ext>
             </a:extLst>
           </p:cNvPr>
           <p:cNvSpPr>
-            <a:spLocks xmlns:a="http://schemas.openxmlformats.org/drawingml/2006/main" noGrp="1"/>
+            <a:spLocks noGrp="1"/>
           </p:cNvSpPr>
           <p:nvPr/>
         </p:nvSpPr>
         <p:spPr>
-          <a:xfrm xmlns:a="http://schemas.openxmlformats.org/drawingml/2006/main">
+          <a:xfrm>
             <a:off x="1333500" y="1733550"/>
             <a:ext cx="29146500" cy="2619375"/>
           </a:xfrm>
-          <a:prstGeom xmlns:a="http://schemas.openxmlformats.org/drawingml/2006/main" prst="rect">
-            <a:avLst/>
-          </a:prstGeom>
-          <a:noFill xmlns:a="http://schemas.openxmlformats.org/drawingml/2006/main"/>
-          <a:ln xmlns:a="http://schemas.openxmlformats.org/drawingml/2006/main" w="0">
+          <a:prstGeom prst="rect">
+            <a:avLst/>
+          </a:prstGeom>
+          <a:noFill/>
+          <a:ln w="0">
             <a:noFill/>
             <a:prstDash val="solid"/>
           </a:ln>
         </p:spPr>
         <p:txBody>
-          <a:bodyPr xmlns:a="http://schemas.openxmlformats.org/drawingml/2006/main" wrap="square" anchor="t">
+          <a:bodyPr wrap="square" anchor="t">
             <a:noAutofit/>
           </a:bodyPr>
-          <a:lstStyle xmlns:a="http://schemas.openxmlformats.org/drawingml/2006/main"/>
-          <a:p xmlns:a="http://schemas.openxmlformats.org/drawingml/2006/main">
+          <a:lstStyle/>
+          <a:p>
             <a:pPr algn="l">
               <a:lnSpc>
                 <a:spcPct val="95000"/>
@@ -1247,7 +907,7 @@
               <a:t>Pay for Training, Not for Openness:</a:t>
             </a:r>
           </a:p>
-          <a:p xmlns:a="http://schemas.openxmlformats.org/drawingml/2006/main">
+          <a:p>
             <a:pPr algn="l">
               <a:lnSpc>
                 <a:spcPct val="95000"/>
@@ -1274,37 +934,37 @@
       <p:sp>
         <p:nvSpPr>
           <p:cNvPr id="5" name="authors">
-            <a:extLst xmlns:a="http://schemas.openxmlformats.org/drawingml/2006/main">
+            <a:extLst>
               <a:ext uri="{FF2B5EF4-FFF2-40B4-BE49-F238E27FC236}">
                 <a16:creationId xmlns:a16="http://schemas.microsoft.com/office/drawing/2014/main" id="{439A7EDB-36D0-4D9A-9F53-6704B96A144F}"/>
               </a:ext>
             </a:extLst>
           </p:cNvPr>
           <p:cNvSpPr>
-            <a:spLocks xmlns:a="http://schemas.openxmlformats.org/drawingml/2006/main" noGrp="1"/>
+            <a:spLocks noGrp="1"/>
           </p:cNvSpPr>
           <p:nvPr/>
         </p:nvSpPr>
         <p:spPr>
-          <a:xfrm xmlns:a="http://schemas.openxmlformats.org/drawingml/2006/main">
+          <a:xfrm>
             <a:off x="1333500" y="4457700"/>
             <a:ext cx="28575000" cy="762000"/>
           </a:xfrm>
-          <a:prstGeom xmlns:a="http://schemas.openxmlformats.org/drawingml/2006/main" prst="rect">
-            <a:avLst/>
-          </a:prstGeom>
-          <a:noFill xmlns:a="http://schemas.openxmlformats.org/drawingml/2006/main"/>
-          <a:ln xmlns:a="http://schemas.openxmlformats.org/drawingml/2006/main" w="0">
+          <a:prstGeom prst="rect">
+            <a:avLst/>
+          </a:prstGeom>
+          <a:noFill/>
+          <a:ln w="0">
             <a:noFill/>
             <a:prstDash val="solid"/>
           </a:ln>
         </p:spPr>
         <p:txBody>
-          <a:bodyPr xmlns:a="http://schemas.openxmlformats.org/drawingml/2006/main" wrap="square" anchor="t">
+          <a:bodyPr wrap="square" anchor="t">
             <a:noAutofit/>
           </a:bodyPr>
-          <a:lstStyle xmlns:a="http://schemas.openxmlformats.org/drawingml/2006/main"/>
-          <a:p xmlns:a="http://schemas.openxmlformats.org/drawingml/2006/main">
+          <a:lstStyle/>
+          <a:p>
             <a:pPr algn="l">
               <a:lnSpc>
                 <a:spcPct val="100000"/>
@@ -1339,37 +999,37 @@
       <p:sp>
         <p:nvSpPr>
           <p:cNvPr id="6" name="course-instructor">
-            <a:extLst xmlns:a="http://schemas.openxmlformats.org/drawingml/2006/main">
+            <a:extLst>
               <a:ext uri="{FF2B5EF4-FFF2-40B4-BE49-F238E27FC236}">
                 <a16:creationId xmlns:a16="http://schemas.microsoft.com/office/drawing/2014/main" id="{E0620329-B4C6-41DE-A2DD-7C1BAB05722F}"/>
               </a:ext>
             </a:extLst>
           </p:cNvPr>
           <p:cNvSpPr>
-            <a:spLocks xmlns:a="http://schemas.openxmlformats.org/drawingml/2006/main" noGrp="1"/>
+            <a:spLocks noGrp="1"/>
           </p:cNvSpPr>
           <p:nvPr/>
         </p:nvSpPr>
         <p:spPr>
-          <a:xfrm xmlns:a="http://schemas.openxmlformats.org/drawingml/2006/main">
+          <a:xfrm>
             <a:off x="1333500" y="5229225"/>
             <a:ext cx="28575000" cy="619125"/>
           </a:xfrm>
-          <a:prstGeom xmlns:a="http://schemas.openxmlformats.org/drawingml/2006/main" prst="rect">
-            <a:avLst/>
-          </a:prstGeom>
-          <a:noFill xmlns:a="http://schemas.openxmlformats.org/drawingml/2006/main"/>
-          <a:ln xmlns:a="http://schemas.openxmlformats.org/drawingml/2006/main" w="0">
+          <a:prstGeom prst="rect">
+            <a:avLst/>
+          </a:prstGeom>
+          <a:noFill/>
+          <a:ln w="0">
             <a:noFill/>
             <a:prstDash val="solid"/>
           </a:ln>
         </p:spPr>
         <p:txBody>
-          <a:bodyPr xmlns:a="http://schemas.openxmlformats.org/drawingml/2006/main" wrap="square" anchor="t">
+          <a:bodyPr wrap="square" anchor="t">
             <a:noAutofit/>
           </a:bodyPr>
-          <a:lstStyle xmlns:a="http://schemas.openxmlformats.org/drawingml/2006/main"/>
-          <a:p xmlns:a="http://schemas.openxmlformats.org/drawingml/2006/main">
+          <a:lstStyle/>
+          <a:p>
             <a:pPr algn="l">
               <a:lnSpc>
                 <a:spcPct val="100000"/>
@@ -1403,22 +1063,22 @@
       </p:sp>
       <p:pic>
         <p:nvPicPr>
-          <p:cNvPr id="58" name=""/>
+          <p:cNvPr id="58" name="图片 57"/>
           <p:cNvPicPr>
-            <a:picLocks xmlns:a="http://schemas.openxmlformats.org/drawingml/2006/main" noChangeAspect="1"/>
+            <a:picLocks noChangeAspect="1"/>
           </p:cNvPicPr>
           <p:nvPr/>
         </p:nvPicPr>
         <p:blipFill>
-          <a:blip xmlns:r="http://schemas.openxmlformats.org/officeDocument/2006/relationships" xmlns:a="http://schemas.openxmlformats.org/drawingml/2006/main" r:embed="Re598f34444bc47b7"/>
-          <a:stretch xmlns:a="http://schemas.openxmlformats.org/drawingml/2006/main"/>
+          <a:blip r:embed="rId3"/>
+          <a:stretch/>
         </p:blipFill>
         <p:spPr>
-          <a:xfrm xmlns:a="http://schemas.openxmlformats.org/drawingml/2006/main">
+          <a:xfrm>
             <a:off x="32575500" y="2190750"/>
             <a:ext cx="8096250" cy="2595818"/>
           </a:xfrm>
-          <a:prstGeom xmlns:a="http://schemas.openxmlformats.org/drawingml/2006/main" prst="rect">
+          <a:prstGeom prst="rect">
             <a:avLst/>
           </a:prstGeom>
         </p:spPr>
@@ -1426,29 +1086,29 @@
       <p:sp>
         <p:nvSpPr>
           <p:cNvPr id="8" name="takeaway-band">
-            <a:extLst xmlns:a="http://schemas.openxmlformats.org/drawingml/2006/main">
+            <a:extLst>
               <a:ext uri="{FF2B5EF4-FFF2-40B4-BE49-F238E27FC236}">
                 <a16:creationId xmlns:a16="http://schemas.microsoft.com/office/drawing/2014/main" id="{E5C59819-8AE8-4F07-93AA-7B6F5A9A66D5}"/>
               </a:ext>
             </a:extLst>
           </p:cNvPr>
           <p:cNvSpPr>
-            <a:spLocks xmlns:a="http://schemas.openxmlformats.org/drawingml/2006/main" noGrp="1"/>
+            <a:spLocks noGrp="1"/>
           </p:cNvSpPr>
           <p:nvPr/>
         </p:nvSpPr>
         <p:spPr>
-          <a:xfrm xmlns:a="http://schemas.openxmlformats.org/drawingml/2006/main">
+          <a:xfrm>
             <a:off x="0" y="6572250"/>
             <a:ext cx="42804000" cy="2143125"/>
           </a:xfrm>
-          <a:prstGeom xmlns:a="http://schemas.openxmlformats.org/drawingml/2006/main" prst="rect">
-            <a:avLst/>
-          </a:prstGeom>
-          <a:solidFill xmlns:a="http://schemas.openxmlformats.org/drawingml/2006/main">
+          <a:prstGeom prst="rect">
+            <a:avLst/>
+          </a:prstGeom>
+          <a:solidFill>
             <a:srgbClr val="003399"/>
           </a:solidFill>
-          <a:ln xmlns:a="http://schemas.openxmlformats.org/drawingml/2006/main" w="0">
+          <a:ln w="0">
             <a:noFill/>
             <a:prstDash val="solid"/>
           </a:ln>
@@ -1457,37 +1117,37 @@
       <p:sp>
         <p:nvSpPr>
           <p:cNvPr id="9" name="takeaway-label">
-            <a:extLst xmlns:a="http://schemas.openxmlformats.org/drawingml/2006/main">
+            <a:extLst>
               <a:ext uri="{FF2B5EF4-FFF2-40B4-BE49-F238E27FC236}">
                 <a16:creationId xmlns:a16="http://schemas.microsoft.com/office/drawing/2014/main" id="{701690AD-D64E-4607-AE56-414773E6FFD1}"/>
               </a:ext>
             </a:extLst>
           </p:cNvPr>
           <p:cNvSpPr>
-            <a:spLocks xmlns:a="http://schemas.openxmlformats.org/drawingml/2006/main" noGrp="1"/>
+            <a:spLocks noGrp="1"/>
           </p:cNvSpPr>
           <p:nvPr/>
         </p:nvSpPr>
         <p:spPr>
-          <a:xfrm xmlns:a="http://schemas.openxmlformats.org/drawingml/2006/main">
+          <a:xfrm>
             <a:off x="1333500" y="7239000"/>
             <a:ext cx="4667250" cy="619125"/>
           </a:xfrm>
-          <a:prstGeom xmlns:a="http://schemas.openxmlformats.org/drawingml/2006/main" prst="rect">
-            <a:avLst/>
-          </a:prstGeom>
-          <a:noFill xmlns:a="http://schemas.openxmlformats.org/drawingml/2006/main"/>
-          <a:ln xmlns:a="http://schemas.openxmlformats.org/drawingml/2006/main" w="0">
+          <a:prstGeom prst="rect">
+            <a:avLst/>
+          </a:prstGeom>
+          <a:noFill/>
+          <a:ln w="0">
             <a:noFill/>
             <a:prstDash val="solid"/>
           </a:ln>
         </p:spPr>
         <p:txBody>
-          <a:bodyPr xmlns:a="http://schemas.openxmlformats.org/drawingml/2006/main" wrap="square" anchor="t">
+          <a:bodyPr wrap="square" anchor="t">
             <a:noAutofit/>
           </a:bodyPr>
-          <a:lstStyle xmlns:a="http://schemas.openxmlformats.org/drawingml/2006/main"/>
-          <a:p xmlns:a="http://schemas.openxmlformats.org/drawingml/2006/main">
+          <a:lstStyle/>
+          <a:p>
             <a:pPr algn="l">
               <a:lnSpc>
                 <a:spcPct val="100000"/>
@@ -1522,37 +1182,37 @@
       <p:sp>
         <p:nvSpPr>
           <p:cNvPr id="10" name="takeaway">
-            <a:extLst xmlns:a="http://schemas.openxmlformats.org/drawingml/2006/main">
+            <a:extLst>
               <a:ext uri="{FF2B5EF4-FFF2-40B4-BE49-F238E27FC236}">
                 <a16:creationId xmlns:a16="http://schemas.microsoft.com/office/drawing/2014/main" id="{83EFFE95-83CD-498B-99EF-83DF06C3C922}"/>
               </a:ext>
             </a:extLst>
           </p:cNvPr>
           <p:cNvSpPr>
-            <a:spLocks xmlns:a="http://schemas.openxmlformats.org/drawingml/2006/main" noGrp="1"/>
+            <a:spLocks noGrp="1"/>
           </p:cNvSpPr>
           <p:nvPr/>
         </p:nvSpPr>
         <p:spPr>
-          <a:xfrm xmlns:a="http://schemas.openxmlformats.org/drawingml/2006/main">
+          <a:xfrm>
             <a:off x="6477000" y="7000875"/>
             <a:ext cx="34993500" cy="1524000"/>
           </a:xfrm>
-          <a:prstGeom xmlns:a="http://schemas.openxmlformats.org/drawingml/2006/main" prst="rect">
-            <a:avLst/>
-          </a:prstGeom>
-          <a:noFill xmlns:a="http://schemas.openxmlformats.org/drawingml/2006/main"/>
-          <a:ln xmlns:a="http://schemas.openxmlformats.org/drawingml/2006/main" w="0">
+          <a:prstGeom prst="rect">
+            <a:avLst/>
+          </a:prstGeom>
+          <a:noFill/>
+          <a:ln w="0">
             <a:noFill/>
             <a:prstDash val="solid"/>
           </a:ln>
         </p:spPr>
         <p:txBody>
-          <a:bodyPr xmlns:a="http://schemas.openxmlformats.org/drawingml/2006/main" wrap="square" anchor="ctr">
+          <a:bodyPr wrap="square" anchor="ctr">
             <a:noAutofit/>
           </a:bodyPr>
-          <a:lstStyle xmlns:a="http://schemas.openxmlformats.org/drawingml/2006/main"/>
-          <a:p xmlns:a="http://schemas.openxmlformats.org/drawingml/2006/main">
+          <a:lstStyle/>
+          <a:p>
             <a:pPr algn="l">
               <a:lnSpc>
                 <a:spcPct val="100000"/>
@@ -1623,37 +1283,37 @@
       <p:sp>
         <p:nvSpPr>
           <p:cNvPr id="11" name="question-model-title">
-            <a:extLst xmlns:a="http://schemas.openxmlformats.org/drawingml/2006/main">
+            <a:extLst>
               <a:ext uri="{FF2B5EF4-FFF2-40B4-BE49-F238E27FC236}">
                 <a16:creationId xmlns:a16="http://schemas.microsoft.com/office/drawing/2014/main" id="{CD5C4DFB-E23C-429C-B167-B9CF4889CB3B}"/>
               </a:ext>
             </a:extLst>
           </p:cNvPr>
           <p:cNvSpPr>
-            <a:spLocks xmlns:a="http://schemas.openxmlformats.org/drawingml/2006/main" noGrp="1"/>
+            <a:spLocks noGrp="1"/>
           </p:cNvSpPr>
           <p:nvPr/>
         </p:nvSpPr>
         <p:spPr>
-          <a:xfrm xmlns:a="http://schemas.openxmlformats.org/drawingml/2006/main">
+          <a:xfrm>
             <a:off x="1333500" y="9525000"/>
             <a:ext cx="11049000" cy="809625"/>
           </a:xfrm>
-          <a:prstGeom xmlns:a="http://schemas.openxmlformats.org/drawingml/2006/main" prst="rect">
-            <a:avLst/>
-          </a:prstGeom>
-          <a:noFill xmlns:a="http://schemas.openxmlformats.org/drawingml/2006/main"/>
-          <a:ln xmlns:a="http://schemas.openxmlformats.org/drawingml/2006/main" w="0">
+          <a:prstGeom prst="rect">
+            <a:avLst/>
+          </a:prstGeom>
+          <a:noFill/>
+          <a:ln w="0">
             <a:noFill/>
             <a:prstDash val="solid"/>
           </a:ln>
         </p:spPr>
         <p:txBody>
-          <a:bodyPr xmlns:a="http://schemas.openxmlformats.org/drawingml/2006/main" wrap="square" anchor="t">
+          <a:bodyPr wrap="square" anchor="t">
             <a:noAutofit/>
           </a:bodyPr>
-          <a:lstStyle xmlns:a="http://schemas.openxmlformats.org/drawingml/2006/main"/>
-          <a:p xmlns:a="http://schemas.openxmlformats.org/drawingml/2006/main">
+          <a:lstStyle/>
+          <a:p>
             <a:pPr algn="l">
               <a:lnSpc>
                 <a:spcPct val="100000"/>
@@ -1688,29 +1348,29 @@
       <p:sp>
         <p:nvSpPr>
           <p:cNvPr id="12" name="question-model-title-rule">
-            <a:extLst xmlns:a="http://schemas.openxmlformats.org/drawingml/2006/main">
+            <a:extLst>
               <a:ext uri="{FF2B5EF4-FFF2-40B4-BE49-F238E27FC236}">
                 <a16:creationId xmlns:a16="http://schemas.microsoft.com/office/drawing/2014/main" id="{F81F4A35-5377-44CB-941D-4B8D9F26180B}"/>
               </a:ext>
             </a:extLst>
           </p:cNvPr>
           <p:cNvSpPr>
-            <a:spLocks xmlns:a="http://schemas.openxmlformats.org/drawingml/2006/main" noGrp="1"/>
+            <a:spLocks noGrp="1"/>
           </p:cNvSpPr>
           <p:nvPr/>
         </p:nvSpPr>
         <p:spPr>
-          <a:xfrm xmlns:a="http://schemas.openxmlformats.org/drawingml/2006/main">
+          <a:xfrm>
             <a:off x="1333500" y="10506075"/>
             <a:ext cx="11049000" cy="47625"/>
           </a:xfrm>
-          <a:prstGeom xmlns:a="http://schemas.openxmlformats.org/drawingml/2006/main" prst="rect">
-            <a:avLst/>
-          </a:prstGeom>
-          <a:solidFill xmlns:a="http://schemas.openxmlformats.org/drawingml/2006/main">
+          <a:prstGeom prst="rect">
+            <a:avLst/>
+          </a:prstGeom>
+          <a:solidFill>
             <a:srgbClr val="006633"/>
           </a:solidFill>
-          <a:ln xmlns:a="http://schemas.openxmlformats.org/drawingml/2006/main" w="0">
+          <a:ln w="0">
             <a:noFill/>
             <a:prstDash val="solid"/>
           </a:ln>
@@ -1719,37 +1379,37 @@
       <p:sp>
         <p:nvSpPr>
           <p:cNvPr id="13" name="research-question-heading">
-            <a:extLst xmlns:a="http://schemas.openxmlformats.org/drawingml/2006/main">
+            <a:extLst>
               <a:ext uri="{FF2B5EF4-FFF2-40B4-BE49-F238E27FC236}">
                 <a16:creationId xmlns:a16="http://schemas.microsoft.com/office/drawing/2014/main" id="{4190E777-F9CF-4131-93FB-BBFC74FF79EA}"/>
               </a:ext>
             </a:extLst>
           </p:cNvPr>
           <p:cNvSpPr>
-            <a:spLocks xmlns:a="http://schemas.openxmlformats.org/drawingml/2006/main" noGrp="1"/>
+            <a:spLocks noGrp="1"/>
           </p:cNvSpPr>
           <p:nvPr/>
         </p:nvSpPr>
         <p:spPr>
-          <a:xfrm xmlns:a="http://schemas.openxmlformats.org/drawingml/2006/main">
+          <a:xfrm>
             <a:off x="1333500" y="11144250"/>
             <a:ext cx="11049000" cy="666750"/>
           </a:xfrm>
-          <a:prstGeom xmlns:a="http://schemas.openxmlformats.org/drawingml/2006/main" prst="rect">
-            <a:avLst/>
-          </a:prstGeom>
-          <a:noFill xmlns:a="http://schemas.openxmlformats.org/drawingml/2006/main"/>
-          <a:ln xmlns:a="http://schemas.openxmlformats.org/drawingml/2006/main" w="0">
+          <a:prstGeom prst="rect">
+            <a:avLst/>
+          </a:prstGeom>
+          <a:noFill/>
+          <a:ln w="0">
             <a:noFill/>
             <a:prstDash val="solid"/>
           </a:ln>
         </p:spPr>
         <p:txBody>
-          <a:bodyPr xmlns:a="http://schemas.openxmlformats.org/drawingml/2006/main" wrap="square" anchor="t">
+          <a:bodyPr wrap="square" anchor="t">
             <a:noAutofit/>
           </a:bodyPr>
-          <a:lstStyle xmlns:a="http://schemas.openxmlformats.org/drawingml/2006/main"/>
-          <a:p xmlns:a="http://schemas.openxmlformats.org/drawingml/2006/main">
+          <a:lstStyle/>
+          <a:p>
             <a:pPr algn="l">
               <a:lnSpc>
                 <a:spcPct val="100000"/>
@@ -1784,37 +1444,37 @@
       <p:sp>
         <p:nvSpPr>
           <p:cNvPr id="14" name="research-question">
-            <a:extLst xmlns:a="http://schemas.openxmlformats.org/drawingml/2006/main">
+            <a:extLst>
               <a:ext uri="{FF2B5EF4-FFF2-40B4-BE49-F238E27FC236}">
                 <a16:creationId xmlns:a16="http://schemas.microsoft.com/office/drawing/2014/main" id="{76FF89C4-3045-4C47-A236-4952EAA04A98}"/>
               </a:ext>
             </a:extLst>
           </p:cNvPr>
           <p:cNvSpPr>
-            <a:spLocks xmlns:a="http://schemas.openxmlformats.org/drawingml/2006/main" noGrp="1"/>
+            <a:spLocks noGrp="1"/>
           </p:cNvSpPr>
           <p:nvPr/>
         </p:nvSpPr>
         <p:spPr>
-          <a:xfrm xmlns:a="http://schemas.openxmlformats.org/drawingml/2006/main">
+          <a:xfrm>
             <a:off x="1333500" y="11906250"/>
             <a:ext cx="11049000" cy="2952750"/>
           </a:xfrm>
-          <a:prstGeom xmlns:a="http://schemas.openxmlformats.org/drawingml/2006/main" prst="rect">
-            <a:avLst/>
-          </a:prstGeom>
-          <a:noFill xmlns:a="http://schemas.openxmlformats.org/drawingml/2006/main"/>
-          <a:ln xmlns:a="http://schemas.openxmlformats.org/drawingml/2006/main" w="0">
+          <a:prstGeom prst="rect">
+            <a:avLst/>
+          </a:prstGeom>
+          <a:noFill/>
+          <a:ln w="0">
             <a:noFill/>
             <a:prstDash val="solid"/>
           </a:ln>
         </p:spPr>
         <p:txBody>
-          <a:bodyPr xmlns:a="http://schemas.openxmlformats.org/drawingml/2006/main" wrap="square" anchor="t">
+          <a:bodyPr wrap="square" anchor="t">
             <a:noAutofit/>
           </a:bodyPr>
-          <a:lstStyle xmlns:a="http://schemas.openxmlformats.org/drawingml/2006/main"/>
-          <a:p xmlns:a="http://schemas.openxmlformats.org/drawingml/2006/main">
+          <a:lstStyle/>
+          <a:p>
             <a:pPr algn="l">
               <a:lnSpc>
                 <a:spcPct val="102000"/>
@@ -1853,7 +1513,7 @@
               <a:t>A developer may imitate (distil) or innovate (train from scratch), and may release the result under secrecy or openness. Which of the four does it choose — and does society want the same?</a:t>
             </a:r>
           </a:p>
-          <a:p xmlns:a="http://schemas.openxmlformats.org/drawingml/2006/main">
+          <a:p>
             <a:pPr algn="l">
               <a:lnSpc>
                 <a:spcPct val="102000"/>
@@ -1892,7 +1552,7 @@
               <a:t>Rules that reward openness reward it as such (Qiu et al. 2025), and stay silent on whether a model was originally trained or merely imitated. That silence is where the incentive breaks.</a:t>
             </a:r>
           </a:p>
-          <a:p xmlns:a="http://schemas.openxmlformats.org/drawingml/2006/main">
+          <a:p>
             <a:pPr algn="l">
               <a:lnSpc>
                 <a:spcPct val="102000"/>
@@ -1936,37 +1596,37 @@
       <p:sp>
         <p:nvSpPr>
           <p:cNvPr id="15" name="model-heading">
-            <a:extLst xmlns:a="http://schemas.openxmlformats.org/drawingml/2006/main">
+            <a:extLst>
               <a:ext uri="{FF2B5EF4-FFF2-40B4-BE49-F238E27FC236}">
                 <a16:creationId xmlns:a16="http://schemas.microsoft.com/office/drawing/2014/main" id="{19910E6B-D44C-401D-8E76-04691CDB9EA9}"/>
               </a:ext>
             </a:extLst>
           </p:cNvPr>
           <p:cNvSpPr>
-            <a:spLocks xmlns:a="http://schemas.openxmlformats.org/drawingml/2006/main" noGrp="1"/>
+            <a:spLocks noGrp="1"/>
           </p:cNvSpPr>
           <p:nvPr/>
         </p:nvSpPr>
         <p:spPr>
-          <a:xfrm xmlns:a="http://schemas.openxmlformats.org/drawingml/2006/main">
+          <a:xfrm>
             <a:off x="1333500" y="15144750"/>
             <a:ext cx="11049000" cy="666750"/>
           </a:xfrm>
-          <a:prstGeom xmlns:a="http://schemas.openxmlformats.org/drawingml/2006/main" prst="rect">
-            <a:avLst/>
-          </a:prstGeom>
-          <a:noFill xmlns:a="http://schemas.openxmlformats.org/drawingml/2006/main"/>
-          <a:ln xmlns:a="http://schemas.openxmlformats.org/drawingml/2006/main" w="0">
+          <a:prstGeom prst="rect">
+            <a:avLst/>
+          </a:prstGeom>
+          <a:noFill/>
+          <a:ln w="0">
             <a:noFill/>
             <a:prstDash val="solid"/>
           </a:ln>
         </p:spPr>
         <p:txBody>
-          <a:bodyPr xmlns:a="http://schemas.openxmlformats.org/drawingml/2006/main" wrap="square" anchor="t">
+          <a:bodyPr wrap="square" anchor="t">
             <a:noAutofit/>
           </a:bodyPr>
-          <a:lstStyle xmlns:a="http://schemas.openxmlformats.org/drawingml/2006/main"/>
-          <a:p xmlns:a="http://schemas.openxmlformats.org/drawingml/2006/main">
+          <a:lstStyle/>
+          <a:p>
             <a:pPr algn="l">
               <a:lnSpc>
                 <a:spcPct val="100000"/>
@@ -2001,37 +1661,37 @@
       <p:sp>
         <p:nvSpPr>
           <p:cNvPr id="16" name="model">
-            <a:extLst xmlns:a="http://schemas.openxmlformats.org/drawingml/2006/main">
+            <a:extLst>
               <a:ext uri="{FF2B5EF4-FFF2-40B4-BE49-F238E27FC236}">
                 <a16:creationId xmlns:a16="http://schemas.microsoft.com/office/drawing/2014/main" id="{BD93B7B7-C6A1-4C6C-8B07-9664A884A221}"/>
               </a:ext>
             </a:extLst>
           </p:cNvPr>
           <p:cNvSpPr>
-            <a:spLocks xmlns:a="http://schemas.openxmlformats.org/drawingml/2006/main" noGrp="1"/>
+            <a:spLocks noGrp="1"/>
           </p:cNvSpPr>
           <p:nvPr/>
         </p:nvSpPr>
         <p:spPr>
-          <a:xfrm xmlns:a="http://schemas.openxmlformats.org/drawingml/2006/main">
+          <a:xfrm>
             <a:off x="1333500" y="15906750"/>
             <a:ext cx="11049000" cy="3333750"/>
           </a:xfrm>
-          <a:prstGeom xmlns:a="http://schemas.openxmlformats.org/drawingml/2006/main" prst="rect">
-            <a:avLst/>
-          </a:prstGeom>
-          <a:noFill xmlns:a="http://schemas.openxmlformats.org/drawingml/2006/main"/>
-          <a:ln xmlns:a="http://schemas.openxmlformats.org/drawingml/2006/main" w="0">
+          <a:prstGeom prst="rect">
+            <a:avLst/>
+          </a:prstGeom>
+          <a:noFill/>
+          <a:ln w="0">
             <a:noFill/>
             <a:prstDash val="solid"/>
           </a:ln>
         </p:spPr>
         <p:txBody>
-          <a:bodyPr xmlns:a="http://schemas.openxmlformats.org/drawingml/2006/main" wrap="square" anchor="t">
+          <a:bodyPr wrap="square" anchor="t">
             <a:noAutofit/>
           </a:bodyPr>
-          <a:lstStyle xmlns:a="http://schemas.openxmlformats.org/drawingml/2006/main"/>
-          <a:p xmlns:a="http://schemas.openxmlformats.org/drawingml/2006/main">
+          <a:lstStyle/>
+          <a:p>
             <a:pPr algn="l">
               <a:lnSpc>
                 <a:spcPct val="100000"/>
@@ -2070,7 +1730,7 @@
               <a:t>N firms each choose sourcing (imitate or innovate) and release (secrecy or openness).</a:t>
             </a:r>
           </a:p>
-          <a:p xmlns:a="http://schemas.openxmlformats.org/drawingml/2006/main">
+          <a:p>
             <a:pPr algn="l">
               <a:lnSpc>
                 <a:spcPct val="100000"/>
@@ -2109,7 +1769,7 @@
               <a:t>four cells (Figure 1): secrecy keeps the monopoly profit; a release earns a prize on its compute and loses the edge.</a:t>
             </a:r>
           </a:p>
-          <a:p xmlns:a="http://schemas.openxmlformats.org/drawingml/2006/main">
+          <a:p>
             <a:pPr algn="l">
               <a:lnSpc>
                 <a:spcPct val="100000"/>
@@ -2148,7 +1808,7 @@
               <a:t>Nash equilibrium, set against society's ranking.</a:t>
             </a:r>
           </a:p>
-          <a:p xmlns:a="http://schemas.openxmlformats.org/drawingml/2006/main">
+          <a:p>
             <a:pPr algn="l">
               <a:lnSpc>
                 <a:spcPct val="100000"/>
@@ -2187,7 +1847,7 @@
               <a:t>innovation costs more and uses more compute than imitation; the prize rate k is paid per unit of compute E.</a:t>
             </a:r>
           </a:p>
-          <a:p xmlns:a="http://schemas.openxmlformats.org/drawingml/2006/main">
+          <a:p>
             <a:pPr algn="l">
               <a:lnSpc>
                 <a:spcPct val="100000"/>
@@ -2303,37 +1963,37 @@
       <p:sp>
         <p:nvSpPr>
           <p:cNvPr id="17" name="lenses-heading">
-            <a:extLst xmlns:a="http://schemas.openxmlformats.org/drawingml/2006/main">
+            <a:extLst>
               <a:ext uri="{FF2B5EF4-FFF2-40B4-BE49-F238E27FC236}">
                 <a16:creationId xmlns:a16="http://schemas.microsoft.com/office/drawing/2014/main" id="{DAFBC93E-B2F0-417F-9381-A98FDF506C48}"/>
               </a:ext>
             </a:extLst>
           </p:cNvPr>
           <p:cNvSpPr>
-            <a:spLocks xmlns:a="http://schemas.openxmlformats.org/drawingml/2006/main" noGrp="1"/>
+            <a:spLocks noGrp="1"/>
           </p:cNvSpPr>
           <p:nvPr/>
         </p:nvSpPr>
         <p:spPr>
-          <a:xfrm xmlns:a="http://schemas.openxmlformats.org/drawingml/2006/main">
+          <a:xfrm>
             <a:off x="1333500" y="19526250"/>
             <a:ext cx="11049000" cy="666750"/>
           </a:xfrm>
-          <a:prstGeom xmlns:a="http://schemas.openxmlformats.org/drawingml/2006/main" prst="rect">
-            <a:avLst/>
-          </a:prstGeom>
-          <a:noFill xmlns:a="http://schemas.openxmlformats.org/drawingml/2006/main"/>
-          <a:ln xmlns:a="http://schemas.openxmlformats.org/drawingml/2006/main" w="0">
+          <a:prstGeom prst="rect">
+            <a:avLst/>
+          </a:prstGeom>
+          <a:noFill/>
+          <a:ln w="0">
             <a:noFill/>
             <a:prstDash val="solid"/>
           </a:ln>
         </p:spPr>
         <p:txBody>
-          <a:bodyPr xmlns:a="http://schemas.openxmlformats.org/drawingml/2006/main" wrap="square" anchor="t">
+          <a:bodyPr wrap="square" anchor="t">
             <a:noAutofit/>
           </a:bodyPr>
-          <a:lstStyle xmlns:a="http://schemas.openxmlformats.org/drawingml/2006/main"/>
-          <a:p xmlns:a="http://schemas.openxmlformats.org/drawingml/2006/main">
+          <a:lstStyle/>
+          <a:p>
             <a:pPr algn="l">
               <a:lnSpc>
                 <a:spcPct val="100000"/>
@@ -2368,37 +2028,37 @@
       <p:sp>
         <p:nvSpPr>
           <p:cNvPr id="18" name="lenses">
-            <a:extLst xmlns:a="http://schemas.openxmlformats.org/drawingml/2006/main">
+            <a:extLst>
               <a:ext uri="{FF2B5EF4-FFF2-40B4-BE49-F238E27FC236}">
                 <a16:creationId xmlns:a16="http://schemas.microsoft.com/office/drawing/2014/main" id="{E2BAF178-74E4-4DFF-A2BB-763467E733E6}"/>
               </a:ext>
             </a:extLst>
           </p:cNvPr>
           <p:cNvSpPr>
-            <a:spLocks xmlns:a="http://schemas.openxmlformats.org/drawingml/2006/main" noGrp="1"/>
+            <a:spLocks noGrp="1"/>
           </p:cNvSpPr>
           <p:nvPr/>
         </p:nvSpPr>
         <p:spPr>
-          <a:xfrm xmlns:a="http://schemas.openxmlformats.org/drawingml/2006/main">
+          <a:xfrm>
             <a:off x="1333500" y="20288250"/>
             <a:ext cx="11049000" cy="2762250"/>
           </a:xfrm>
-          <a:prstGeom xmlns:a="http://schemas.openxmlformats.org/drawingml/2006/main" prst="rect">
-            <a:avLst/>
-          </a:prstGeom>
-          <a:noFill xmlns:a="http://schemas.openxmlformats.org/drawingml/2006/main"/>
-          <a:ln xmlns:a="http://schemas.openxmlformats.org/drawingml/2006/main" w="0">
+          <a:prstGeom prst="rect">
+            <a:avLst/>
+          </a:prstGeom>
+          <a:noFill/>
+          <a:ln w="0">
             <a:noFill/>
             <a:prstDash val="solid"/>
           </a:ln>
         </p:spPr>
         <p:txBody>
-          <a:bodyPr xmlns:a="http://schemas.openxmlformats.org/drawingml/2006/main" wrap="square" anchor="t">
+          <a:bodyPr wrap="square" anchor="t">
             <a:noAutofit/>
           </a:bodyPr>
-          <a:lstStyle xmlns:a="http://schemas.openxmlformats.org/drawingml/2006/main"/>
-          <a:p xmlns:a="http://schemas.openxmlformats.org/drawingml/2006/main">
+          <a:lstStyle/>
+          <a:p>
             <a:pPr algn="l">
               <a:lnSpc>
                 <a:spcPct val="100000"/>
@@ -2437,7 +2097,7 @@
               <a:t>left alone, the best response is secrecy plus imitation — the cheap way to keep the monopoly price.</a:t>
             </a:r>
           </a:p>
-          <a:p xmlns:a="http://schemas.openxmlformats.org/drawingml/2006/main">
+          <a:p>
             <a:pPr algn="l">
               <a:lnSpc>
                 <a:spcPct val="100000"/>
@@ -2476,7 +2136,7 @@
               <a:t>society ranks openness plus innovation best and secrecy plus imitation worst; the two orders are exact reverses.</a:t>
             </a:r>
           </a:p>
-          <a:p xmlns:a="http://schemas.openxmlformats.org/drawingml/2006/main">
+          <a:p>
             <a:pPr algn="l">
               <a:lnSpc>
                 <a:spcPct val="100000"/>
@@ -2520,37 +2180,37 @@
       <p:sp>
         <p:nvSpPr>
           <p:cNvPr id="19" name="auction-heading">
-            <a:extLst xmlns:a="http://schemas.openxmlformats.org/drawingml/2006/main">
+            <a:extLst>
               <a:ext uri="{FF2B5EF4-FFF2-40B4-BE49-F238E27FC236}">
                 <a16:creationId xmlns:a16="http://schemas.microsoft.com/office/drawing/2014/main" id="{0A85FF4E-C110-48A1-8567-A06DAC93CC6E}"/>
               </a:ext>
             </a:extLst>
           </p:cNvPr>
           <p:cNvSpPr>
-            <a:spLocks xmlns:a="http://schemas.openxmlformats.org/drawingml/2006/main" noGrp="1"/>
+            <a:spLocks noGrp="1"/>
           </p:cNvSpPr>
           <p:nvPr/>
         </p:nvSpPr>
         <p:spPr>
-          <a:xfrm xmlns:a="http://schemas.openxmlformats.org/drawingml/2006/main">
+          <a:xfrm>
             <a:off x="1333500" y="22904450"/>
             <a:ext cx="11049000" cy="666750"/>
           </a:xfrm>
-          <a:prstGeom xmlns:a="http://schemas.openxmlformats.org/drawingml/2006/main" prst="rect">
-            <a:avLst/>
-          </a:prstGeom>
-          <a:noFill xmlns:a="http://schemas.openxmlformats.org/drawingml/2006/main"/>
-          <a:ln xmlns:a="http://schemas.openxmlformats.org/drawingml/2006/main" w="0">
+          <a:prstGeom prst="rect">
+            <a:avLst/>
+          </a:prstGeom>
+          <a:noFill/>
+          <a:ln w="0">
             <a:noFill/>
             <a:prstDash val="solid"/>
           </a:ln>
         </p:spPr>
         <p:txBody>
-          <a:bodyPr xmlns:a="http://schemas.openxmlformats.org/drawingml/2006/main" wrap="square" anchor="t">
+          <a:bodyPr wrap="square" anchor="t">
             <a:noAutofit/>
           </a:bodyPr>
-          <a:lstStyle xmlns:a="http://schemas.openxmlformats.org/drawingml/2006/main"/>
-          <a:p xmlns:a="http://schemas.openxmlformats.org/drawingml/2006/main">
+          <a:lstStyle/>
+          <a:p>
             <a:r>
               <a:rPr sz="3375" b="1"/>
               <a:t>Implemented payment rule &amp; auction analogy</a:t>
@@ -2561,49 +2221,49 @@
       <p:sp>
         <p:nvSpPr>
           <p:cNvPr id="20" name="auction">
-            <a:extLst xmlns:a="http://schemas.openxmlformats.org/drawingml/2006/main">
+            <a:extLst>
               <a:ext uri="{FF2B5EF4-FFF2-40B4-BE49-F238E27FC236}">
                 <a16:creationId xmlns:a16="http://schemas.microsoft.com/office/drawing/2014/main" id="{182900A4-D41C-4FC8-8D3B-A44A8758AC89}"/>
               </a:ext>
             </a:extLst>
           </p:cNvPr>
           <p:cNvSpPr>
-            <a:spLocks xmlns:a="http://schemas.openxmlformats.org/drawingml/2006/main" noGrp="1"/>
+            <a:spLocks noGrp="1"/>
           </p:cNvSpPr>
           <p:nvPr/>
         </p:nvSpPr>
         <p:spPr>
-          <a:xfrm xmlns:a="http://schemas.openxmlformats.org/drawingml/2006/main">
+          <a:xfrm>
             <a:off x="1333500" y="23666450"/>
             <a:ext cx="11049000" cy="2762250"/>
           </a:xfrm>
-          <a:prstGeom xmlns:a="http://schemas.openxmlformats.org/drawingml/2006/main" prst="rect">
-            <a:avLst/>
-          </a:prstGeom>
-          <a:noFill xmlns:a="http://schemas.openxmlformats.org/drawingml/2006/main"/>
-          <a:ln xmlns:a="http://schemas.openxmlformats.org/drawingml/2006/main" w="0">
+          <a:prstGeom prst="rect">
+            <a:avLst/>
+          </a:prstGeom>
+          <a:noFill/>
+          <a:ln w="0">
             <a:noFill/>
             <a:prstDash val="solid"/>
           </a:ln>
         </p:spPr>
         <p:txBody>
-          <a:bodyPr xmlns:a="http://schemas.openxmlformats.org/drawingml/2006/main" wrap="square" anchor="t">
+          <a:bodyPr wrap="square" anchor="t">
             <a:noAutofit/>
           </a:bodyPr>
-          <a:lstStyle xmlns:a="http://schemas.openxmlformats.org/drawingml/2006/main"/>
-          <a:p xmlns:a="http://schemas.openxmlformats.org/drawingml/2006/main">
+          <a:lstStyle/>
+          <a:p>
             <a:r>
               <a:rPr sz="2060" b="0"/>
               <a:t>Implemented rule: proportional kE subsidy — each open release is paid k per unit of audited training compute E.</a:t>
             </a:r>
           </a:p>
-          <a:p xmlns:a="http://schemas.openxmlformats.org/drawingml/2006/main">
+          <a:p>
             <a:r>
               <a:rPr sz="2060" b="0"/>
               <a:t>Flat and capped rewards are counterfactual designs, not this institution.</a:t>
             </a:r>
           </a:p>
-          <a:p xmlns:a="http://schemas.openxmlformats.org/drawingml/2006/main">
+          <a:p>
             <a:r>
               <a:rPr sz="2060" b="0"/>
               <a:t>All-pay reading (Baye et al. 1996) is an analogy only: every firm pays its sunk training cost.</a:t>
@@ -2614,37 +2274,37 @@
       <p:sp>
         <p:nvSpPr>
           <p:cNvPr id="21" name="design-evidence-title">
-            <a:extLst xmlns:a="http://schemas.openxmlformats.org/drawingml/2006/main">
+            <a:extLst>
               <a:ext uri="{FF2B5EF4-FFF2-40B4-BE49-F238E27FC236}">
                 <a16:creationId xmlns:a16="http://schemas.microsoft.com/office/drawing/2014/main" id="{5BD8C5A5-8D38-4D0E-9168-5677F645D725}"/>
               </a:ext>
             </a:extLst>
           </p:cNvPr>
           <p:cNvSpPr>
-            <a:spLocks xmlns:a="http://schemas.openxmlformats.org/drawingml/2006/main" noGrp="1"/>
+            <a:spLocks noGrp="1"/>
           </p:cNvSpPr>
           <p:nvPr/>
         </p:nvSpPr>
         <p:spPr>
-          <a:xfrm xmlns:a="http://schemas.openxmlformats.org/drawingml/2006/main">
+          <a:xfrm>
             <a:off x="13335000" y="9525000"/>
             <a:ext cx="16134000" cy="809625"/>
           </a:xfrm>
-          <a:prstGeom xmlns:a="http://schemas.openxmlformats.org/drawingml/2006/main" prst="rect">
-            <a:avLst/>
-          </a:prstGeom>
-          <a:noFill xmlns:a="http://schemas.openxmlformats.org/drawingml/2006/main"/>
-          <a:ln xmlns:a="http://schemas.openxmlformats.org/drawingml/2006/main" w="0">
+          <a:prstGeom prst="rect">
+            <a:avLst/>
+          </a:prstGeom>
+          <a:noFill/>
+          <a:ln w="0">
             <a:noFill/>
             <a:prstDash val="solid"/>
           </a:ln>
         </p:spPr>
         <p:txBody>
-          <a:bodyPr xmlns:a="http://schemas.openxmlformats.org/drawingml/2006/main" wrap="square" anchor="t">
+          <a:bodyPr wrap="square" anchor="t">
             <a:noAutofit/>
           </a:bodyPr>
-          <a:lstStyle xmlns:a="http://schemas.openxmlformats.org/drawingml/2006/main"/>
-          <a:p xmlns:a="http://schemas.openxmlformats.org/drawingml/2006/main">
+          <a:lstStyle/>
+          <a:p>
             <a:pPr algn="l">
               <a:lnSpc>
                 <a:spcPct val="100000"/>
@@ -2679,29 +2339,29 @@
       <p:sp>
         <p:nvSpPr>
           <p:cNvPr id="22" name="design-evidence-title-rule">
-            <a:extLst xmlns:a="http://schemas.openxmlformats.org/drawingml/2006/main">
+            <a:extLst>
               <a:ext uri="{FF2B5EF4-FFF2-40B4-BE49-F238E27FC236}">
                 <a16:creationId xmlns:a16="http://schemas.microsoft.com/office/drawing/2014/main" id="{3074EA74-1821-4014-8E91-ECC3F7A887C1}"/>
               </a:ext>
             </a:extLst>
           </p:cNvPr>
           <p:cNvSpPr>
-            <a:spLocks xmlns:a="http://schemas.openxmlformats.org/drawingml/2006/main" noGrp="1"/>
+            <a:spLocks noGrp="1"/>
           </p:cNvSpPr>
           <p:nvPr/>
         </p:nvSpPr>
         <p:spPr>
-          <a:xfrm xmlns:a="http://schemas.openxmlformats.org/drawingml/2006/main">
+          <a:xfrm>
             <a:off x="13335000" y="10506075"/>
             <a:ext cx="16134000" cy="47625"/>
           </a:xfrm>
-          <a:prstGeom xmlns:a="http://schemas.openxmlformats.org/drawingml/2006/main" prst="rect">
-            <a:avLst/>
-          </a:prstGeom>
-          <a:solidFill xmlns:a="http://schemas.openxmlformats.org/drawingml/2006/main">
+          <a:prstGeom prst="rect">
+            <a:avLst/>
+          </a:prstGeom>
+          <a:solidFill>
             <a:srgbClr val="006633"/>
           </a:solidFill>
-          <a:ln xmlns:a="http://schemas.openxmlformats.org/drawingml/2006/main" w="0">
+          <a:ln w="0">
             <a:noFill/>
             <a:prstDash val="solid"/>
           </a:ln>
@@ -2710,29 +2370,29 @@
       <p:sp>
         <p:nvSpPr>
           <p:cNvPr id="23" name="research-design-area">
-            <a:extLst xmlns:a="http://schemas.openxmlformats.org/drawingml/2006/main">
+            <a:extLst>
               <a:ext uri="{FF2B5EF4-FFF2-40B4-BE49-F238E27FC236}">
                 <a16:creationId xmlns:a16="http://schemas.microsoft.com/office/drawing/2014/main" id="{6BFB0873-E93B-425C-B20A-BE7D9281AAB2}"/>
               </a:ext>
             </a:extLst>
           </p:cNvPr>
           <p:cNvSpPr>
-            <a:spLocks xmlns:a="http://schemas.openxmlformats.org/drawingml/2006/main" noGrp="1"/>
+            <a:spLocks noGrp="1"/>
           </p:cNvSpPr>
           <p:nvPr/>
         </p:nvSpPr>
         <p:spPr>
-          <a:xfrm xmlns:a="http://schemas.openxmlformats.org/drawingml/2006/main">
+          <a:xfrm>
             <a:off x="13335000" y="11144250"/>
             <a:ext cx="16134000" cy="4667250"/>
           </a:xfrm>
-          <a:prstGeom xmlns:a="http://schemas.openxmlformats.org/drawingml/2006/main" prst="rect">
-            <a:avLst/>
-          </a:prstGeom>
-          <a:solidFill xmlns:a="http://schemas.openxmlformats.org/drawingml/2006/main">
+          <a:prstGeom prst="rect">
+            <a:avLst/>
+          </a:prstGeom>
+          <a:solidFill>
             <a:srgbClr val="F4F6F7"/>
           </a:solidFill>
-          <a:ln xmlns:a="http://schemas.openxmlformats.org/drawingml/2006/main" w="19050">
+          <a:ln w="19050">
             <a:solidFill>
               <a:srgbClr val="CFD5D9"/>
             </a:solidFill>
@@ -2743,37 +2403,37 @@
       <p:sp>
         <p:nvSpPr>
           <p:cNvPr id="24" name="research-design-label">
-            <a:extLst xmlns:a="http://schemas.openxmlformats.org/drawingml/2006/main">
+            <a:extLst>
               <a:ext uri="{FF2B5EF4-FFF2-40B4-BE49-F238E27FC236}">
                 <a16:creationId xmlns:a16="http://schemas.microsoft.com/office/drawing/2014/main" id="{8126654C-9B1A-4166-BD33-50CD41EA22A1}"/>
               </a:ext>
             </a:extLst>
           </p:cNvPr>
           <p:cNvSpPr>
-            <a:spLocks xmlns:a="http://schemas.openxmlformats.org/drawingml/2006/main" noGrp="1"/>
+            <a:spLocks noGrp="1"/>
           </p:cNvSpPr>
           <p:nvPr/>
         </p:nvSpPr>
         <p:spPr>
-          <a:xfrm xmlns:a="http://schemas.openxmlformats.org/drawingml/2006/main">
+          <a:xfrm>
             <a:off x="13680000" y="11268000"/>
             <a:ext cx="14895720" cy="522000"/>
           </a:xfrm>
-          <a:prstGeom xmlns:a="http://schemas.openxmlformats.org/drawingml/2006/main" prst="rect">
-            <a:avLst/>
-          </a:prstGeom>
-          <a:noFill xmlns:a="http://schemas.openxmlformats.org/drawingml/2006/main"/>
-          <a:ln xmlns:a="http://schemas.openxmlformats.org/drawingml/2006/main" w="0">
+          <a:prstGeom prst="rect">
+            <a:avLst/>
+          </a:prstGeom>
+          <a:noFill/>
+          <a:ln w="0">
             <a:noFill/>
             <a:prstDash val="solid"/>
           </a:ln>
         </p:spPr>
         <p:txBody>
-          <a:bodyPr xmlns:a="http://schemas.openxmlformats.org/drawingml/2006/main" wrap="square" anchor="t">
+          <a:bodyPr wrap="square" anchor="t">
             <a:noAutofit/>
           </a:bodyPr>
-          <a:lstStyle xmlns:a="http://schemas.openxmlformats.org/drawingml/2006/main"/>
-          <a:p xmlns:a="http://schemas.openxmlformats.org/drawingml/2006/main">
+          <a:lstStyle/>
+          <a:p>
             <a:pPr algn="l">
               <a:lnSpc>
                 <a:spcPct val="100000"/>
@@ -2808,37 +2468,37 @@
       <p:sp>
         <p:nvSpPr>
           <p:cNvPr id="26" name="design-caption">
-            <a:extLst xmlns:a="http://schemas.openxmlformats.org/drawingml/2006/main">
+            <a:extLst>
               <a:ext uri="{FF2B5EF4-FFF2-40B4-BE49-F238E27FC236}">
                 <a16:creationId xmlns:a16="http://schemas.microsoft.com/office/drawing/2014/main" id="{70CF347C-1901-4936-A975-9657C3531241}"/>
               </a:ext>
             </a:extLst>
           </p:cNvPr>
           <p:cNvSpPr>
-            <a:spLocks xmlns:a="http://schemas.openxmlformats.org/drawingml/2006/main" noGrp="1"/>
+            <a:spLocks noGrp="1"/>
           </p:cNvSpPr>
           <p:nvPr/>
         </p:nvSpPr>
         <p:spPr>
-          <a:xfrm xmlns:a="http://schemas.openxmlformats.org/drawingml/2006/main">
+          <a:xfrm>
             <a:off x="13335000" y="16097250"/>
             <a:ext cx="16134000" cy="1190625"/>
           </a:xfrm>
-          <a:prstGeom xmlns:a="http://schemas.openxmlformats.org/drawingml/2006/main" prst="rect">
-            <a:avLst/>
-          </a:prstGeom>
-          <a:noFill xmlns:a="http://schemas.openxmlformats.org/drawingml/2006/main"/>
-          <a:ln xmlns:a="http://schemas.openxmlformats.org/drawingml/2006/main" w="0">
+          <a:prstGeom prst="rect">
+            <a:avLst/>
+          </a:prstGeom>
+          <a:noFill/>
+          <a:ln w="0">
             <a:noFill/>
             <a:prstDash val="solid"/>
           </a:ln>
         </p:spPr>
         <p:txBody>
-          <a:bodyPr xmlns:a="http://schemas.openxmlformats.org/drawingml/2006/main" wrap="square" anchor="t">
+          <a:bodyPr wrap="square" anchor="t">
             <a:noAutofit/>
           </a:bodyPr>
-          <a:lstStyle xmlns:a="http://schemas.openxmlformats.org/drawingml/2006/main"/>
-          <a:p xmlns:a="http://schemas.openxmlformats.org/drawingml/2006/main">
+          <a:lstStyle/>
+          <a:p>
             <a:pPr algn="l">
               <a:lnSpc>
                 <a:spcPct val="102000"/>
@@ -2892,16 +2552,7 @@
                 </a:solidFill>
                 <a:latin typeface="Calibri"/>
               </a:rPr>
-              <a:t>.</a:t>
-            </a:r>
-            <a:r>
-              <a:rPr sz="1900" b="0">
-                <a:solidFill>
-                  <a:srgbClr val="56616B"/>
-                </a:solidFill>
-                <a:latin typeface="Calibri"/>
-              </a:rPr>
-              <a:t> An open release also keeps the future market share it buys, βφK·m/(m+m₀) — the discounted value of the external contributions an open model attracts.</a:t>
+              <a:t>. An open release also keeps the future market share it buys, βφK·m/(m+m₀) — the discounted value of the external contributions an open model attracts.</a:t>
             </a:r>
           </a:p>
         </p:txBody>
@@ -2909,29 +2560,29 @@
       <p:sp>
         <p:nvSpPr>
           <p:cNvPr id="27" name="main-result-area">
-            <a:extLst xmlns:a="http://schemas.openxmlformats.org/drawingml/2006/main">
+            <a:extLst>
               <a:ext uri="{FF2B5EF4-FFF2-40B4-BE49-F238E27FC236}">
                 <a16:creationId xmlns:a16="http://schemas.microsoft.com/office/drawing/2014/main" id="{AF352E9D-B9F1-4E49-9DC0-059C3E7F7E02}"/>
               </a:ext>
             </a:extLst>
           </p:cNvPr>
           <p:cNvSpPr>
-            <a:spLocks xmlns:a="http://schemas.openxmlformats.org/drawingml/2006/main" noGrp="1"/>
+            <a:spLocks noGrp="1"/>
           </p:cNvSpPr>
           <p:nvPr/>
         </p:nvSpPr>
         <p:spPr>
-          <a:xfrm xmlns:a="http://schemas.openxmlformats.org/drawingml/2006/main">
+          <a:xfrm>
             <a:off x="13335000" y="17621250"/>
             <a:ext cx="16134000" cy="6286500"/>
           </a:xfrm>
-          <a:prstGeom xmlns:a="http://schemas.openxmlformats.org/drawingml/2006/main" prst="rect">
-            <a:avLst/>
-          </a:prstGeom>
-          <a:solidFill xmlns:a="http://schemas.openxmlformats.org/drawingml/2006/main">
+          <a:prstGeom prst="rect">
+            <a:avLst/>
+          </a:prstGeom>
+          <a:solidFill>
             <a:srgbClr val="F4F6F7"/>
           </a:solidFill>
-          <a:ln xmlns:a="http://schemas.openxmlformats.org/drawingml/2006/main" w="19050">
+          <a:ln w="19050">
             <a:solidFill>
               <a:srgbClr val="CFD5D9"/>
             </a:solidFill>
@@ -2942,37 +2593,37 @@
       <p:sp>
         <p:nvSpPr>
           <p:cNvPr id="28" name="main-result-label">
-            <a:extLst xmlns:a="http://schemas.openxmlformats.org/drawingml/2006/main">
+            <a:extLst>
               <a:ext uri="{FF2B5EF4-FFF2-40B4-BE49-F238E27FC236}">
                 <a16:creationId xmlns:a16="http://schemas.microsoft.com/office/drawing/2014/main" id="{A95FDDB5-DC34-4CBB-B5F4-3B143142A5A8}"/>
               </a:ext>
             </a:extLst>
           </p:cNvPr>
           <p:cNvSpPr>
-            <a:spLocks xmlns:a="http://schemas.openxmlformats.org/drawingml/2006/main" noGrp="1"/>
+            <a:spLocks noGrp="1"/>
           </p:cNvSpPr>
           <p:nvPr/>
         </p:nvSpPr>
         <p:spPr>
-          <a:xfrm xmlns:a="http://schemas.openxmlformats.org/drawingml/2006/main">
+          <a:xfrm>
             <a:off x="13680000" y="17640000"/>
             <a:ext cx="15552000" cy="468000"/>
           </a:xfrm>
-          <a:prstGeom xmlns:a="http://schemas.openxmlformats.org/drawingml/2006/main" prst="rect">
-            <a:avLst/>
-          </a:prstGeom>
-          <a:noFill xmlns:a="http://schemas.openxmlformats.org/drawingml/2006/main"/>
-          <a:ln xmlns:a="http://schemas.openxmlformats.org/drawingml/2006/main" w="0">
+          <a:prstGeom prst="rect">
+            <a:avLst/>
+          </a:prstGeom>
+          <a:noFill/>
+          <a:ln w="0">
             <a:noFill/>
             <a:prstDash val="solid"/>
           </a:ln>
         </p:spPr>
         <p:txBody>
-          <a:bodyPr xmlns:a="http://schemas.openxmlformats.org/drawingml/2006/main" wrap="square" anchor="t">
+          <a:bodyPr wrap="square" anchor="t">
             <a:noAutofit/>
           </a:bodyPr>
-          <a:lstStyle xmlns:a="http://schemas.openxmlformats.org/drawingml/2006/main"/>
-          <a:p xmlns:a="http://schemas.openxmlformats.org/drawingml/2006/main">
+          <a:lstStyle/>
+          <a:p>
             <a:pPr algn="l">
               <a:lnSpc>
                 <a:spcPct val="100000"/>
@@ -3007,37 +2658,37 @@
       <p:sp>
         <p:nvSpPr>
           <p:cNvPr id="30" name="result-caption">
-            <a:extLst xmlns:a="http://schemas.openxmlformats.org/drawingml/2006/main">
+            <a:extLst>
               <a:ext uri="{FF2B5EF4-FFF2-40B4-BE49-F238E27FC236}">
                 <a16:creationId xmlns:a16="http://schemas.microsoft.com/office/drawing/2014/main" id="{C7A388AE-9A9C-4C69-A215-69F12E632900}"/>
               </a:ext>
             </a:extLst>
           </p:cNvPr>
           <p:cNvSpPr>
-            <a:spLocks xmlns:a="http://schemas.openxmlformats.org/drawingml/2006/main" noGrp="1"/>
+            <a:spLocks noGrp="1"/>
           </p:cNvSpPr>
           <p:nvPr/>
         </p:nvSpPr>
         <p:spPr>
-          <a:xfrm xmlns:a="http://schemas.openxmlformats.org/drawingml/2006/main">
+          <a:xfrm>
             <a:off x="13335000" y="24241125"/>
             <a:ext cx="16134000" cy="2714625"/>
           </a:xfrm>
-          <a:prstGeom xmlns:a="http://schemas.openxmlformats.org/drawingml/2006/main" prst="rect">
-            <a:avLst/>
-          </a:prstGeom>
-          <a:noFill xmlns:a="http://schemas.openxmlformats.org/drawingml/2006/main"/>
-          <a:ln xmlns:a="http://schemas.openxmlformats.org/drawingml/2006/main" w="0">
+          <a:prstGeom prst="rect">
+            <a:avLst/>
+          </a:prstGeom>
+          <a:noFill/>
+          <a:ln w="0">
             <a:noFill/>
             <a:prstDash val="solid"/>
           </a:ln>
         </p:spPr>
         <p:txBody>
-          <a:bodyPr xmlns:a="http://schemas.openxmlformats.org/drawingml/2006/main" wrap="square" anchor="t">
+          <a:bodyPr wrap="square" anchor="t">
             <a:noAutofit/>
           </a:bodyPr>
-          <a:lstStyle xmlns:a="http://schemas.openxmlformats.org/drawingml/2006/main"/>
-          <a:p xmlns:a="http://schemas.openxmlformats.org/drawingml/2006/main">
+          <a:lstStyle/>
+          <a:p>
             <a:pPr algn="l">
               <a:lnSpc>
                 <a:spcPct val="100000"/>
@@ -3076,7 +2727,7 @@
               <a:t>The private order (①&gt; ③&gt; ②&gt; ④) and the social order (④&gt; ②&gt; ③&gt; ①) are exact mirror images: the developer's favourite is society's least wanted. The private order holds while π + L − βφK &gt; C</a:t>
             </a:r>
             <a:r>
-              <a:rPr baseline="-25000" sz="2000" b="0">
+              <a:rPr sz="2000" b="0" baseline="-25000">
                 <a:solidFill>
                   <a:srgbClr val="212A33"/>
                 </a:solidFill>
@@ -3094,7 +2745,7 @@
               <a:t> − C</a:t>
             </a:r>
             <a:r>
-              <a:rPr baseline="-25000" sz="2000" b="0">
+              <a:rPr sz="2000" b="0" baseline="-25000">
                 <a:solidFill>
                   <a:srgbClr val="212A33"/>
                 </a:solidFill>
@@ -3112,7 +2763,7 @@
               <a:t>, i.e. while the future-share motive is weak; with a strong motive openness wins even at k = 0 (panel b).</a:t>
             </a:r>
           </a:p>
-          <a:p xmlns:a="http://schemas.openxmlformats.org/drawingml/2006/main">
+          <a:p>
             <a:pPr algn="l">
               <a:lnSpc>
                 <a:spcPct val="100000"/>
@@ -3151,7 +2802,7 @@
               <a:t>A prize too small buys no disclosure; one that pays for openness but not for cost buys copies, not capability; only a prize covering both keeps a live source.</a:t>
             </a:r>
           </a:p>
-          <a:p xmlns:a="http://schemas.openxmlformats.org/drawingml/2006/main">
+          <a:p>
             <a:pPr algn="l">
               <a:lnSpc>
                 <a:spcPct val="100000"/>
@@ -3190,7 +2841,7 @@
               <a:t>Cells and states are recomputed from scratch in the checker, independently of the symbolic derivation; an interactive page lets a reader move the parameters and watch the winning cell flip.</a:t>
             </a:r>
           </a:p>
-          <a:p xmlns:a="http://schemas.openxmlformats.org/drawingml/2006/main">
+          <a:p>
             <a:pPr algn="l">
               <a:lnSpc>
                 <a:spcPct val="100000"/>
@@ -3234,37 +2885,37 @@
       <p:sp>
         <p:nvSpPr>
           <p:cNvPr id="31" name="impact-title">
-            <a:extLst xmlns:a="http://schemas.openxmlformats.org/drawingml/2006/main">
+            <a:extLst>
               <a:ext uri="{FF2B5EF4-FFF2-40B4-BE49-F238E27FC236}">
                 <a16:creationId xmlns:a16="http://schemas.microsoft.com/office/drawing/2014/main" id="{7974BDE9-47C8-4976-9EB0-1D99D2AD436D}"/>
               </a:ext>
             </a:extLst>
           </p:cNvPr>
           <p:cNvSpPr>
-            <a:spLocks xmlns:a="http://schemas.openxmlformats.org/drawingml/2006/main" noGrp="1"/>
+            <a:spLocks noGrp="1"/>
           </p:cNvSpPr>
           <p:nvPr/>
         </p:nvSpPr>
         <p:spPr>
-          <a:xfrm xmlns:a="http://schemas.openxmlformats.org/drawingml/2006/main">
+          <a:xfrm>
             <a:off x="30421500" y="9525000"/>
             <a:ext cx="11049000" cy="809625"/>
           </a:xfrm>
-          <a:prstGeom xmlns:a="http://schemas.openxmlformats.org/drawingml/2006/main" prst="rect">
-            <a:avLst/>
-          </a:prstGeom>
-          <a:noFill xmlns:a="http://schemas.openxmlformats.org/drawingml/2006/main"/>
-          <a:ln xmlns:a="http://schemas.openxmlformats.org/drawingml/2006/main" w="0">
+          <a:prstGeom prst="rect">
+            <a:avLst/>
+          </a:prstGeom>
+          <a:noFill/>
+          <a:ln w="0">
             <a:noFill/>
             <a:prstDash val="solid"/>
           </a:ln>
         </p:spPr>
         <p:txBody>
-          <a:bodyPr xmlns:a="http://schemas.openxmlformats.org/drawingml/2006/main" wrap="square" anchor="t">
+          <a:bodyPr wrap="square" anchor="t">
             <a:noAutofit/>
           </a:bodyPr>
-          <a:lstStyle xmlns:a="http://schemas.openxmlformats.org/drawingml/2006/main"/>
-          <a:p xmlns:a="http://schemas.openxmlformats.org/drawingml/2006/main">
+          <a:lstStyle/>
+          <a:p>
             <a:r>
               <a:rPr sz="4650" b="1"/>
               <a:t>03   Merits · Impacts · Roadmap</a:t>
@@ -3275,29 +2926,29 @@
       <p:sp>
         <p:nvSpPr>
           <p:cNvPr id="32" name="impact-title-rule">
-            <a:extLst xmlns:a="http://schemas.openxmlformats.org/drawingml/2006/main">
+            <a:extLst>
               <a:ext uri="{FF2B5EF4-FFF2-40B4-BE49-F238E27FC236}">
                 <a16:creationId xmlns:a16="http://schemas.microsoft.com/office/drawing/2014/main" id="{92EF0681-32CB-4E92-B477-91FDD7DB084E}"/>
               </a:ext>
             </a:extLst>
           </p:cNvPr>
           <p:cNvSpPr>
-            <a:spLocks xmlns:a="http://schemas.openxmlformats.org/drawingml/2006/main" noGrp="1"/>
+            <a:spLocks noGrp="1"/>
           </p:cNvSpPr>
           <p:nvPr/>
         </p:nvSpPr>
         <p:spPr>
-          <a:xfrm xmlns:a="http://schemas.openxmlformats.org/drawingml/2006/main">
+          <a:xfrm>
             <a:off x="30421500" y="10506075"/>
             <a:ext cx="11049000" cy="47625"/>
           </a:xfrm>
-          <a:prstGeom xmlns:a="http://schemas.openxmlformats.org/drawingml/2006/main" prst="rect">
-            <a:avLst/>
-          </a:prstGeom>
-          <a:solidFill xmlns:a="http://schemas.openxmlformats.org/drawingml/2006/main">
+          <a:prstGeom prst="rect">
+            <a:avLst/>
+          </a:prstGeom>
+          <a:solidFill>
             <a:srgbClr val="006633"/>
           </a:solidFill>
-          <a:ln xmlns:a="http://schemas.openxmlformats.org/drawingml/2006/main" w="0">
+          <a:ln w="0">
             <a:noFill/>
             <a:prstDash val="solid"/>
           </a:ln>
@@ -3306,37 +2957,37 @@
       <p:sp>
         <p:nvSpPr>
           <p:cNvPr id="33" name="real-world-heading">
-            <a:extLst xmlns:a="http://schemas.openxmlformats.org/drawingml/2006/main">
+            <a:extLst>
               <a:ext uri="{FF2B5EF4-FFF2-40B4-BE49-F238E27FC236}">
                 <a16:creationId xmlns:a16="http://schemas.microsoft.com/office/drawing/2014/main" id="{8D7A544D-17E0-43AC-A769-0DC992E2E072}"/>
               </a:ext>
             </a:extLst>
           </p:cNvPr>
           <p:cNvSpPr>
-            <a:spLocks xmlns:a="http://schemas.openxmlformats.org/drawingml/2006/main" noGrp="1"/>
+            <a:spLocks noGrp="1"/>
           </p:cNvSpPr>
           <p:nvPr/>
         </p:nvSpPr>
         <p:spPr>
-          <a:xfrm xmlns:a="http://schemas.openxmlformats.org/drawingml/2006/main">
+          <a:xfrm>
             <a:off x="30421500" y="11144250"/>
             <a:ext cx="11049000" cy="666750"/>
           </a:xfrm>
-          <a:prstGeom xmlns:a="http://schemas.openxmlformats.org/drawingml/2006/main" prst="rect">
-            <a:avLst/>
-          </a:prstGeom>
-          <a:noFill xmlns:a="http://schemas.openxmlformats.org/drawingml/2006/main"/>
-          <a:ln xmlns:a="http://schemas.openxmlformats.org/drawingml/2006/main" w="0">
+          <a:prstGeom prst="rect">
+            <a:avLst/>
+          </a:prstGeom>
+          <a:noFill/>
+          <a:ln w="0">
             <a:noFill/>
             <a:prstDash val="solid"/>
           </a:ln>
         </p:spPr>
         <p:txBody>
-          <a:bodyPr xmlns:a="http://schemas.openxmlformats.org/drawingml/2006/main" wrap="square" anchor="t">
+          <a:bodyPr wrap="square" anchor="t">
             <a:noAutofit/>
           </a:bodyPr>
-          <a:lstStyle xmlns:a="http://schemas.openxmlformats.org/drawingml/2006/main"/>
-          <a:p xmlns:a="http://schemas.openxmlformats.org/drawingml/2006/main">
+          <a:lstStyle/>
+          <a:p>
             <a:r>
               <a:rPr sz="3375" b="1"/>
               <a:t>Intellectual Merits — three closest papers</a:t>
@@ -3347,55 +2998,55 @@
       <p:sp>
         <p:nvSpPr>
           <p:cNvPr id="34" name="real-world">
-            <a:extLst xmlns:a="http://schemas.openxmlformats.org/drawingml/2006/main">
+            <a:extLst>
               <a:ext uri="{FF2B5EF4-FFF2-40B4-BE49-F238E27FC236}">
                 <a16:creationId xmlns:a16="http://schemas.microsoft.com/office/drawing/2014/main" id="{2199F087-3016-48E4-80F0-4F875A71FCDD}"/>
               </a:ext>
             </a:extLst>
           </p:cNvPr>
           <p:cNvSpPr>
-            <a:spLocks xmlns:a="http://schemas.openxmlformats.org/drawingml/2006/main" noGrp="1"/>
+            <a:spLocks noGrp="1"/>
           </p:cNvSpPr>
           <p:nvPr/>
         </p:nvSpPr>
         <p:spPr>
-          <a:xfrm xmlns:a="http://schemas.openxmlformats.org/drawingml/2006/main">
+          <a:xfrm>
             <a:off x="30421500" y="11906250"/>
             <a:ext cx="11049000" cy="3571875"/>
           </a:xfrm>
-          <a:prstGeom xmlns:a="http://schemas.openxmlformats.org/drawingml/2006/main" prst="rect">
-            <a:avLst/>
-          </a:prstGeom>
-          <a:noFill xmlns:a="http://schemas.openxmlformats.org/drawingml/2006/main"/>
-          <a:ln xmlns:a="http://schemas.openxmlformats.org/drawingml/2006/main" w="0">
+          <a:prstGeom prst="rect">
+            <a:avLst/>
+          </a:prstGeom>
+          <a:noFill/>
+          <a:ln w="0">
             <a:noFill/>
             <a:prstDash val="solid"/>
           </a:ln>
         </p:spPr>
         <p:txBody>
-          <a:bodyPr xmlns:a="http://schemas.openxmlformats.org/drawingml/2006/main" wrap="square" anchor="t">
+          <a:bodyPr wrap="square" anchor="t">
             <a:noAutofit/>
           </a:bodyPr>
-          <a:lstStyle xmlns:a="http://schemas.openxmlformats.org/drawingml/2006/main"/>
-          <a:p xmlns:a="http://schemas.openxmlformats.org/drawingml/2006/main">
+          <a:lstStyle/>
+          <a:p>
             <a:r>
               <a:rPr sz="2120" b="1"/>
               <a:t>Qiu et al. (2025) — openness regulation; we inherit openness as a strategic choice but separate original training from distillation.</a:t>
             </a:r>
           </a:p>
-          <a:p xmlns:a="http://schemas.openxmlformats.org/drawingml/2006/main">
+          <a:p>
             <a:r>
               <a:rPr sz="2120" b="1"/>
               <a:t>Xu et al. (2025) — openness, competition, governance; we inherit the subsidy framing but index the reward to compute.</a:t>
             </a:r>
           </a:p>
-          <a:p xmlns:a="http://schemas.openxmlformats.org/drawingml/2006/main">
+          <a:p>
             <a:r>
               <a:rPr sz="2120" b="1"/>
               <a:t>Habibi (2025) — why firms open-source; we inherit the future-share F(m) but compare flat vs. compute-indexed rewards.</a:t>
             </a:r>
           </a:p>
-          <a:p xmlns:a="http://schemas.openxmlformats.org/drawingml/2006/main">
+          <a:p>
             <a:r>
               <a:rPr sz="2120" b="1"/>
               <a:t>Distinct: the four-decision structure, the compute index, the three market states. Evidence: analytical + simulation. Model-based findings, not real-firm effects.</a:t>
@@ -3406,37 +3057,37 @@
       <p:sp>
         <p:nvSpPr>
           <p:cNvPr id="35" name="interdisciplinary-heading">
-            <a:extLst xmlns:a="http://schemas.openxmlformats.org/drawingml/2006/main">
+            <a:extLst>
               <a:ext uri="{FF2B5EF4-FFF2-40B4-BE49-F238E27FC236}">
                 <a16:creationId xmlns:a16="http://schemas.microsoft.com/office/drawing/2014/main" id="{1E996ED0-A32A-4617-8E65-E6ED026E62D8}"/>
               </a:ext>
             </a:extLst>
           </p:cNvPr>
           <p:cNvSpPr>
-            <a:spLocks xmlns:a="http://schemas.openxmlformats.org/drawingml/2006/main" noGrp="1"/>
+            <a:spLocks noGrp="1"/>
           </p:cNvSpPr>
           <p:nvPr/>
         </p:nvSpPr>
         <p:spPr>
-          <a:xfrm xmlns:a="http://schemas.openxmlformats.org/drawingml/2006/main">
+          <a:xfrm>
             <a:off x="30421500" y="15811500"/>
             <a:ext cx="11049000" cy="666750"/>
           </a:xfrm>
-          <a:prstGeom xmlns:a="http://schemas.openxmlformats.org/drawingml/2006/main" prst="rect">
-            <a:avLst/>
-          </a:prstGeom>
-          <a:noFill xmlns:a="http://schemas.openxmlformats.org/drawingml/2006/main"/>
-          <a:ln xmlns:a="http://schemas.openxmlformats.org/drawingml/2006/main" w="0">
+          <a:prstGeom prst="rect">
+            <a:avLst/>
+          </a:prstGeom>
+          <a:noFill/>
+          <a:ln w="0">
             <a:noFill/>
             <a:prstDash val="solid"/>
           </a:ln>
         </p:spPr>
         <p:txBody>
-          <a:bodyPr xmlns:a="http://schemas.openxmlformats.org/drawingml/2006/main" wrap="square" anchor="t">
+          <a:bodyPr wrap="square" anchor="t">
             <a:noAutofit/>
           </a:bodyPr>
-          <a:lstStyle xmlns:a="http://schemas.openxmlformats.org/drawingml/2006/main"/>
-          <a:p xmlns:a="http://schemas.openxmlformats.org/drawingml/2006/main">
+          <a:lstStyle/>
+          <a:p>
             <a:r>
               <a:rPr sz="3375" b="1"/>
               <a:t>Practical Impacts — SDG 9.5 · 10.2</a:t>
@@ -3447,79 +3098,79 @@
       <p:sp>
         <p:nvSpPr>
           <p:cNvPr id="36" name="interdisciplinary">
-            <a:extLst xmlns:a="http://schemas.openxmlformats.org/drawingml/2006/main">
+            <a:extLst>
               <a:ext uri="{FF2B5EF4-FFF2-40B4-BE49-F238E27FC236}">
                 <a16:creationId xmlns:a16="http://schemas.microsoft.com/office/drawing/2014/main" id="{91D1D813-AECB-4965-9667-285D2DDCB3E4}"/>
               </a:ext>
             </a:extLst>
           </p:cNvPr>
           <p:cNvSpPr>
-            <a:spLocks xmlns:a="http://schemas.openxmlformats.org/drawingml/2006/main" noGrp="1"/>
+            <a:spLocks noGrp="1"/>
           </p:cNvSpPr>
           <p:nvPr/>
         </p:nvSpPr>
         <p:spPr>
-          <a:xfrm xmlns:a="http://schemas.openxmlformats.org/drawingml/2006/main">
+          <a:xfrm>
             <a:off x="30421500" y="16573500"/>
             <a:ext cx="11049000" cy="5238750"/>
           </a:xfrm>
-          <a:prstGeom xmlns:a="http://schemas.openxmlformats.org/drawingml/2006/main" prst="rect">
-            <a:avLst/>
-          </a:prstGeom>
-          <a:noFill xmlns:a="http://schemas.openxmlformats.org/drawingml/2006/main"/>
-          <a:ln xmlns:a="http://schemas.openxmlformats.org/drawingml/2006/main" w="0">
+          <a:prstGeom prst="rect">
+            <a:avLst/>
+          </a:prstGeom>
+          <a:noFill/>
+          <a:ln w="0">
             <a:noFill/>
             <a:prstDash val="solid"/>
           </a:ln>
         </p:spPr>
         <p:txBody>
-          <a:bodyPr xmlns:a="http://schemas.openxmlformats.org/drawingml/2006/main" wrap="square" anchor="t">
+          <a:bodyPr wrap="square" anchor="t">
             <a:noAutofit/>
           </a:bodyPr>
-          <a:lstStyle xmlns:a="http://schemas.openxmlformats.org/drawingml/2006/main"/>
-          <a:p xmlns:a="http://schemas.openxmlformats.org/drawingml/2006/main">
+          <a:lstStyle/>
+          <a:p>
             <a:r>
               <a:rPr sz="2200" b="1"/>
               <a:t>Mechanism: tie open-model subsidies to audited training compute.</a:t>
             </a:r>
           </a:p>
-          <a:p xmlns:a="http://schemas.openxmlformats.org/drawingml/2006/main">
+          <a:p>
             <a:r>
               <a:rPr sz="2200" b="1"/>
               <a:t>Stakeholders: labs, smaller developers, users, taxpayers, the agency.</a:t>
             </a:r>
           </a:p>
-          <a:p xmlns:a="http://schemas.openxmlformats.org/drawingml/2006/main">
+          <a:p>
             <a:r>
               <a:rPr sz="2200" b="1"/>
               <a:t>Indicator: original-source releases per unit of public spending.</a:t>
             </a:r>
           </a:p>
-          <a:p xmlns:a="http://schemas.openxmlformats.org/drawingml/2006/main">
+          <a:p>
             <a:r>
               <a:rPr sz="2200" b="1"/>
               <a:t>Baseline (simulated): flat reward → 4% of prize reaches sources (484/source); indexed → 98% (18.6/source).</a:t>
             </a:r>
           </a:p>
-          <a:p xmlns:a="http://schemas.openxmlformats.org/drawingml/2006/main">
+          <a:p>
             <a:r>
               <a:rPr sz="2200" b="1"/>
               <a:t>Payment (k=4): imitator cost C_d=1.44 → reward kE_d=3.94; innovator cost C_n=5.67 → reward kE_n=18.52; total public spending ≈ 354,763.</a:t>
             </a:r>
           </a:p>
-          <a:p xmlns:a="http://schemas.openxmlformats.org/drawingml/2006/main">
+          <a:p>
             <a:r>
               <a:rPr sz="2200" b="1"/>
               <a:t>Risks: misreported compute, duplication, crowding out distillation.</a:t>
             </a:r>
           </a:p>
-          <a:p xmlns:a="http://schemas.openxmlformats.org/drawingml/2006/main">
+          <a:p>
             <a:r>
               <a:rPr sz="2200" b="1"/>
               <a:t>Safeguards: audit, capped pilot, publish results, revise or stop.</a:t>
             </a:r>
           </a:p>
-          <a:p xmlns:a="http://schemas.openxmlformats.org/drawingml/2006/main">
+          <a:p>
             <a:r>
               <a:rPr sz="2200" b="1"/>
               <a:t>Intended benefit, not yet demonstrated.</a:t>
@@ -3530,37 +3181,37 @@
       <p:sp>
         <p:nvSpPr>
           <p:cNvPr id="37" name="limits-heading">
-            <a:extLst xmlns:a="http://schemas.openxmlformats.org/drawingml/2006/main">
+            <a:extLst>
               <a:ext uri="{FF2B5EF4-FFF2-40B4-BE49-F238E27FC236}">
                 <a16:creationId xmlns:a16="http://schemas.microsoft.com/office/drawing/2014/main" id="{68ADFBED-634F-4EFD-A437-EF921500A3B3}"/>
               </a:ext>
             </a:extLst>
           </p:cNvPr>
           <p:cNvSpPr>
-            <a:spLocks xmlns:a="http://schemas.openxmlformats.org/drawingml/2006/main" noGrp="1"/>
+            <a:spLocks noGrp="1"/>
           </p:cNvSpPr>
           <p:nvPr/>
         </p:nvSpPr>
         <p:spPr>
-          <a:xfrm xmlns:a="http://schemas.openxmlformats.org/drawingml/2006/main">
+          <a:xfrm>
             <a:off x="30421500" y="22193250"/>
             <a:ext cx="11049000" cy="666750"/>
           </a:xfrm>
-          <a:prstGeom xmlns:a="http://schemas.openxmlformats.org/drawingml/2006/main" prst="rect">
-            <a:avLst/>
-          </a:prstGeom>
-          <a:noFill xmlns:a="http://schemas.openxmlformats.org/drawingml/2006/main"/>
-          <a:ln xmlns:a="http://schemas.openxmlformats.org/drawingml/2006/main" w="0">
+          <a:prstGeom prst="rect">
+            <a:avLst/>
+          </a:prstGeom>
+          <a:noFill/>
+          <a:ln w="0">
             <a:noFill/>
             <a:prstDash val="solid"/>
           </a:ln>
         </p:spPr>
         <p:txBody>
-          <a:bodyPr xmlns:a="http://schemas.openxmlformats.org/drawingml/2006/main" wrap="square" anchor="t">
+          <a:bodyPr wrap="square" anchor="t">
             <a:noAutofit/>
           </a:bodyPr>
-          <a:lstStyle xmlns:a="http://schemas.openxmlformats.org/drawingml/2006/main"/>
-          <a:p xmlns:a="http://schemas.openxmlformats.org/drawingml/2006/main">
+          <a:lstStyle/>
+          <a:p>
             <a:r>
               <a:rPr sz="3375" b="1"/>
               <a:t>Future Research Roadmap</a:t>
@@ -3571,61 +3222,61 @@
       <p:sp>
         <p:nvSpPr>
           <p:cNvPr id="38" name="limits">
-            <a:extLst xmlns:a="http://schemas.openxmlformats.org/drawingml/2006/main">
+            <a:extLst>
               <a:ext uri="{FF2B5EF4-FFF2-40B4-BE49-F238E27FC236}">
                 <a16:creationId xmlns:a16="http://schemas.microsoft.com/office/drawing/2014/main" id="{B297720D-E873-4F17-88AF-AF30E5F69FD6}"/>
               </a:ext>
             </a:extLst>
           </p:cNvPr>
           <p:cNvSpPr>
-            <a:spLocks xmlns:a="http://schemas.openxmlformats.org/drawingml/2006/main" noGrp="1"/>
+            <a:spLocks noGrp="1"/>
           </p:cNvSpPr>
           <p:nvPr/>
         </p:nvSpPr>
         <p:spPr>
-          <a:xfrm xmlns:a="http://schemas.openxmlformats.org/drawingml/2006/main">
+          <a:xfrm>
             <a:off x="30421500" y="22955250"/>
             <a:ext cx="11049000" cy="2619375"/>
           </a:xfrm>
-          <a:prstGeom xmlns:a="http://schemas.openxmlformats.org/drawingml/2006/main" prst="rect">
-            <a:avLst/>
-          </a:prstGeom>
-          <a:noFill xmlns:a="http://schemas.openxmlformats.org/drawingml/2006/main"/>
-          <a:ln xmlns:a="http://schemas.openxmlformats.org/drawingml/2006/main" w="0">
+          <a:prstGeom prst="rect">
+            <a:avLst/>
+          </a:prstGeom>
+          <a:noFill/>
+          <a:ln w="0">
             <a:noFill/>
             <a:prstDash val="solid"/>
           </a:ln>
         </p:spPr>
         <p:txBody>
-          <a:bodyPr xmlns:a="http://schemas.openxmlformats.org/drawingml/2006/main" wrap="square" anchor="t">
+          <a:bodyPr wrap="square" anchor="t">
             <a:noAutofit/>
           </a:bodyPr>
-          <a:lstStyle xmlns:a="http://schemas.openxmlformats.org/drawingml/2006/main"/>
-          <a:p xmlns:a="http://schemas.openxmlformats.org/drawingml/2006/main">
+          <a:lstStyle/>
+          <a:p>
             <a:r>
               <a:rPr sz="2200" b="1"/>
               <a:t>Limitation: illustrative parameters, simulated firms, manipulable compute.</a:t>
             </a:r>
           </a:p>
-          <a:p xmlns:a="http://schemas.openxmlformats.org/drawingml/2006/main">
+          <a:p>
             <a:r>
               <a:rPr sz="2200" b="1"/>
               <a:t>Economics: which reward raises sources/$? — preregistered policy pilot.</a:t>
             </a:r>
           </a:p>
-          <a:p xmlns:a="http://schemas.openxmlformats.org/drawingml/2006/main">
+          <a:p>
             <a:r>
               <a:rPr sz="2200" b="1"/>
               <a:t>Computer science: can original compute be verified? — provenance logs + adversarial benchmarks.</a:t>
             </a:r>
           </a:p>
-          <a:p xmlns:a="http://schemas.openxmlformats.org/drawingml/2006/main">
+          <a:p>
             <a:r>
               <a:rPr sz="2200" b="1"/>
               <a:t>Behavioral: how do firms adapt over rounds? — repeated-choice experiments.</a:t>
             </a:r>
           </a:p>
-          <a:p xmlns:a="http://schemas.openxmlformats.org/drawingml/2006/main">
+          <a:p>
             <a:r>
               <a:rPr sz="2200" b="1"/>
               <a:t>First task: an auditable training measure.</a:t>
@@ -3636,37 +3287,37 @@
       <p:sp>
         <p:nvSpPr>
           <p:cNvPr id="39" name="dates">
-            <a:extLst xmlns:a="http://schemas.openxmlformats.org/drawingml/2006/main">
+            <a:extLst>
               <a:ext uri="{FF2B5EF4-FFF2-40B4-BE49-F238E27FC236}">
                 <a16:creationId xmlns:a16="http://schemas.microsoft.com/office/drawing/2014/main" id="{EA157D18-CC9B-4A0B-91A5-3BE26B8F384A}"/>
               </a:ext>
             </a:extLst>
           </p:cNvPr>
           <p:cNvSpPr>
-            <a:spLocks xmlns:a="http://schemas.openxmlformats.org/drawingml/2006/main" noGrp="1"/>
+            <a:spLocks noGrp="1"/>
           </p:cNvSpPr>
           <p:nvPr/>
         </p:nvSpPr>
         <p:spPr>
-          <a:xfrm xmlns:a="http://schemas.openxmlformats.org/drawingml/2006/main">
+          <a:xfrm>
             <a:off x="30421500" y="25812750"/>
             <a:ext cx="11049000" cy="1143000"/>
           </a:xfrm>
-          <a:prstGeom xmlns:a="http://schemas.openxmlformats.org/drawingml/2006/main" prst="rect">
-            <a:avLst/>
-          </a:prstGeom>
-          <a:noFill xmlns:a="http://schemas.openxmlformats.org/drawingml/2006/main"/>
-          <a:ln xmlns:a="http://schemas.openxmlformats.org/drawingml/2006/main" w="0">
+          <a:prstGeom prst="rect">
+            <a:avLst/>
+          </a:prstGeom>
+          <a:noFill/>
+          <a:ln w="0">
             <a:noFill/>
             <a:prstDash val="solid"/>
           </a:ln>
         </p:spPr>
         <p:txBody>
-          <a:bodyPr xmlns:a="http://schemas.openxmlformats.org/drawingml/2006/main" wrap="square" anchor="t">
+          <a:bodyPr wrap="square" anchor="t">
             <a:noAutofit/>
           </a:bodyPr>
-          <a:lstStyle xmlns:a="http://schemas.openxmlformats.org/drawingml/2006/main"/>
-          <a:p xmlns:a="http://schemas.openxmlformats.org/drawingml/2006/main">
+          <a:lstStyle/>
+          <a:p>
             <a:r>
               <a:rPr sz="2550" b="1"/>
               <a:t>OCT 12  duet defense ·  OCT 14  roundtable ·  OCT 21  final</a:t>
@@ -3677,29 +3328,29 @@
       <p:sp>
         <p:nvSpPr>
           <p:cNvPr id="40" name="footer-rule">
-            <a:extLst xmlns:a="http://schemas.openxmlformats.org/drawingml/2006/main">
+            <a:extLst>
               <a:ext uri="{FF2B5EF4-FFF2-40B4-BE49-F238E27FC236}">
                 <a16:creationId xmlns:a16="http://schemas.microsoft.com/office/drawing/2014/main" id="{24CE48EC-E121-4C2A-81BE-8C70F6F42833}"/>
               </a:ext>
             </a:extLst>
           </p:cNvPr>
           <p:cNvSpPr>
-            <a:spLocks xmlns:a="http://schemas.openxmlformats.org/drawingml/2006/main" noGrp="1"/>
+            <a:spLocks noGrp="1"/>
           </p:cNvSpPr>
           <p:nvPr/>
         </p:nvSpPr>
         <p:spPr>
-          <a:xfrm xmlns:a="http://schemas.openxmlformats.org/drawingml/2006/main">
+          <a:xfrm>
             <a:off x="1333500" y="27527250"/>
             <a:ext cx="40137000" cy="47625"/>
           </a:xfrm>
-          <a:prstGeom xmlns:a="http://schemas.openxmlformats.org/drawingml/2006/main" prst="rect">
-            <a:avLst/>
-          </a:prstGeom>
-          <a:solidFill xmlns:a="http://schemas.openxmlformats.org/drawingml/2006/main">
+          <a:prstGeom prst="rect">
+            <a:avLst/>
+          </a:prstGeom>
+          <a:solidFill>
             <a:srgbClr val="006633"/>
           </a:solidFill>
-          <a:ln xmlns:a="http://schemas.openxmlformats.org/drawingml/2006/main" w="0">
+          <a:ln w="0">
             <a:noFill/>
             <a:prstDash val="solid"/>
           </a:ln>
@@ -3708,37 +3359,37 @@
       <p:sp>
         <p:nvSpPr>
           <p:cNvPr id="41" name="ack-heading">
-            <a:extLst xmlns:a="http://schemas.openxmlformats.org/drawingml/2006/main">
+            <a:extLst>
               <a:ext uri="{FF2B5EF4-FFF2-40B4-BE49-F238E27FC236}">
                 <a16:creationId xmlns:a16="http://schemas.microsoft.com/office/drawing/2014/main" id="{CC1B0A45-EEBC-4636-8C8B-F880435533DE}"/>
               </a:ext>
             </a:extLst>
           </p:cNvPr>
           <p:cNvSpPr>
-            <a:spLocks xmlns:a="http://schemas.openxmlformats.org/drawingml/2006/main" noGrp="1"/>
+            <a:spLocks noGrp="1"/>
           </p:cNvSpPr>
           <p:nvPr/>
         </p:nvSpPr>
         <p:spPr>
-          <a:xfrm xmlns:a="http://schemas.openxmlformats.org/drawingml/2006/main">
+          <a:xfrm>
             <a:off x="1333500" y="27813000"/>
             <a:ext cx="11049000" cy="666750"/>
           </a:xfrm>
-          <a:prstGeom xmlns:a="http://schemas.openxmlformats.org/drawingml/2006/main" prst="rect">
-            <a:avLst/>
-          </a:prstGeom>
-          <a:noFill xmlns:a="http://schemas.openxmlformats.org/drawingml/2006/main"/>
-          <a:ln xmlns:a="http://schemas.openxmlformats.org/drawingml/2006/main" w="0">
+          <a:prstGeom prst="rect">
+            <a:avLst/>
+          </a:prstGeom>
+          <a:noFill/>
+          <a:ln w="0">
             <a:noFill/>
             <a:prstDash val="solid"/>
           </a:ln>
         </p:spPr>
         <p:txBody>
-          <a:bodyPr xmlns:a="http://schemas.openxmlformats.org/drawingml/2006/main">
+          <a:bodyPr>
             <a:noAutofit/>
           </a:bodyPr>
-          <a:lstStyle xmlns:a="http://schemas.openxmlformats.org/drawingml/2006/main"/>
-          <a:p xmlns:a="http://schemas.openxmlformats.org/drawingml/2006/main">
+          <a:lstStyle/>
+          <a:p>
             <a:r>
               <a:rPr sz="3375" b="1"/>
               <a:t>Acknowledgments &amp; contributions</a:t>
@@ -3749,43 +3400,43 @@
       <p:sp>
         <p:nvSpPr>
           <p:cNvPr id="42" name="ack">
-            <a:extLst xmlns:a="http://schemas.openxmlformats.org/drawingml/2006/main">
+            <a:extLst>
               <a:ext uri="{FF2B5EF4-FFF2-40B4-BE49-F238E27FC236}">
                 <a16:creationId xmlns:a16="http://schemas.microsoft.com/office/drawing/2014/main" id="{1C589FA2-42B8-4C7A-9C87-A446B7866781}"/>
               </a:ext>
             </a:extLst>
           </p:cNvPr>
           <p:cNvSpPr>
-            <a:spLocks xmlns:a="http://schemas.openxmlformats.org/drawingml/2006/main" noGrp="1"/>
+            <a:spLocks noGrp="1"/>
           </p:cNvSpPr>
           <p:nvPr/>
         </p:nvSpPr>
         <p:spPr>
-          <a:xfrm xmlns:a="http://schemas.openxmlformats.org/drawingml/2006/main">
+          <a:xfrm>
             <a:off x="1333500" y="28479750"/>
             <a:ext cx="11049000" cy="1285875"/>
           </a:xfrm>
-          <a:prstGeom xmlns:a="http://schemas.openxmlformats.org/drawingml/2006/main" prst="rect">
-            <a:avLst/>
-          </a:prstGeom>
-          <a:noFill xmlns:a="http://schemas.openxmlformats.org/drawingml/2006/main"/>
-          <a:ln xmlns:a="http://schemas.openxmlformats.org/drawingml/2006/main" w="0">
+          <a:prstGeom prst="rect">
+            <a:avLst/>
+          </a:prstGeom>
+          <a:noFill/>
+          <a:ln w="0">
             <a:noFill/>
             <a:prstDash val="solid"/>
           </a:ln>
         </p:spPr>
         <p:txBody>
-          <a:bodyPr xmlns:a="http://schemas.openxmlformats.org/drawingml/2006/main" wrap="square" anchor="t">
+          <a:bodyPr wrap="square" anchor="t">
             <a:noAutofit/>
           </a:bodyPr>
-          <a:lstStyle xmlns:a="http://schemas.openxmlformats.org/drawingml/2006/main"/>
-          <a:p xmlns:a="http://schemas.openxmlformats.org/drawingml/2006/main">
+          <a:lstStyle/>
+          <a:p>
             <a:r>
               <a:rPr sz="800" b="0"/>
               <a:t>Thanks to Prof. Luyao Zhang; Prof. Kenneth S. (Ken) Rogerson (Sept 7, 2026 workshop discussant); Han Zhang; reviewers Mustafa Ayub Khan, Jiayang Sun, Temur Akhtamjonov, Xuantong Fu, Feiyu Li; Tencent's Shanghai office; the Shanghai Science and Technology Museum; and the COMSCI/ECON 206 community.</a:t>
             </a:r>
           </a:p>
-          <a:p xmlns:a="http://schemas.openxmlformats.org/drawingml/2006/main">
+          <a:p>
             <a:r>
               <a:rPr sz="800" b="0"/>
               <a:t>Zhengjun He: compute-indexed reward idea, market-competition model, simulation and verification. Yichen Shen: three-question framing, Hugging Face Space, paper/poster consistency. AI assistance disclosed in the paper.</a:t>
@@ -3796,37 +3447,37 @@
       <p:sp>
         <p:nvSpPr>
           <p:cNvPr id="43" name="references-heading">
-            <a:extLst xmlns:a="http://schemas.openxmlformats.org/drawingml/2006/main">
+            <a:extLst>
               <a:ext uri="{FF2B5EF4-FFF2-40B4-BE49-F238E27FC236}">
                 <a16:creationId xmlns:a16="http://schemas.microsoft.com/office/drawing/2014/main" id="{E7EA3AAE-744F-4F03-A737-D3056A093795}"/>
               </a:ext>
             </a:extLst>
           </p:cNvPr>
           <p:cNvSpPr>
-            <a:spLocks xmlns:a="http://schemas.openxmlformats.org/drawingml/2006/main" noGrp="1"/>
+            <a:spLocks noGrp="1"/>
           </p:cNvSpPr>
           <p:nvPr/>
         </p:nvSpPr>
         <p:spPr>
-          <a:xfrm xmlns:a="http://schemas.openxmlformats.org/drawingml/2006/main">
+          <a:xfrm>
             <a:off x="13335000" y="27813000"/>
             <a:ext cx="14192250" cy="666750"/>
           </a:xfrm>
-          <a:prstGeom xmlns:a="http://schemas.openxmlformats.org/drawingml/2006/main" prst="rect">
-            <a:avLst/>
-          </a:prstGeom>
-          <a:noFill xmlns:a="http://schemas.openxmlformats.org/drawingml/2006/main"/>
-          <a:ln xmlns:a="http://schemas.openxmlformats.org/drawingml/2006/main" w="0">
+          <a:prstGeom prst="rect">
+            <a:avLst/>
+          </a:prstGeom>
+          <a:noFill/>
+          <a:ln w="0">
             <a:noFill/>
             <a:prstDash val="solid"/>
           </a:ln>
         </p:spPr>
         <p:txBody>
-          <a:bodyPr xmlns:a="http://schemas.openxmlformats.org/drawingml/2006/main">
+          <a:bodyPr>
             <a:noAutofit/>
           </a:bodyPr>
-          <a:lstStyle xmlns:a="http://schemas.openxmlformats.org/drawingml/2006/main"/>
-          <a:p xmlns:a="http://schemas.openxmlformats.org/drawingml/2006/main">
+          <a:lstStyle/>
+          <a:p>
             <a:pPr algn="l">
               <a:defRPr sz="3375" b="1">
                 <a:solidFill>
@@ -3854,49 +3505,49 @@
       <p:sp>
         <p:nvSpPr>
           <p:cNvPr id="44" name="references">
-            <a:extLst xmlns:a="http://schemas.openxmlformats.org/drawingml/2006/main">
+            <a:extLst>
               <a:ext uri="{FF2B5EF4-FFF2-40B4-BE49-F238E27FC236}">
                 <a16:creationId xmlns:a16="http://schemas.microsoft.com/office/drawing/2014/main" id="{0ECEF328-5F03-4179-A929-2458DB1F400F}"/>
               </a:ext>
             </a:extLst>
           </p:cNvPr>
           <p:cNvSpPr>
-            <a:spLocks xmlns:a="http://schemas.openxmlformats.org/drawingml/2006/main" noGrp="1"/>
+            <a:spLocks noGrp="1"/>
           </p:cNvSpPr>
           <p:nvPr/>
         </p:nvSpPr>
         <p:spPr>
-          <a:xfrm xmlns:a="http://schemas.openxmlformats.org/drawingml/2006/main">
+          <a:xfrm>
             <a:off x="13335120" y="28479600"/>
             <a:ext cx="16704000" cy="1285920"/>
           </a:xfrm>
-          <a:prstGeom xmlns:a="http://schemas.openxmlformats.org/drawingml/2006/main" prst="rect">
-            <a:avLst/>
-          </a:prstGeom>
-          <a:noFill xmlns:a="http://schemas.openxmlformats.org/drawingml/2006/main"/>
-          <a:ln xmlns:a="http://schemas.openxmlformats.org/drawingml/2006/main" w="0">
+          <a:prstGeom prst="rect">
+            <a:avLst/>
+          </a:prstGeom>
+          <a:noFill/>
+          <a:ln w="0">
             <a:noFill/>
             <a:prstDash val="solid"/>
           </a:ln>
         </p:spPr>
         <p:txBody>
-          <a:bodyPr xmlns:a="http://schemas.openxmlformats.org/drawingml/2006/main" wrap="square" anchor="t">
+          <a:bodyPr wrap="square" anchor="t">
             <a:noAutofit/>
           </a:bodyPr>
-          <a:lstStyle xmlns:a="http://schemas.openxmlformats.org/drawingml/2006/main"/>
-          <a:p xmlns:a="http://schemas.openxmlformats.org/drawingml/2006/main">
+          <a:lstStyle/>
+          <a:p>
             <a:r>
               <a:rPr sz="900" b="1"/>
               <a:t>[1] Qiu, T., Laufer, B., Kleinberg, J. &amp; Heidari, H. (2025). Modeling the Economic Impacts of AI Openness Regulation. NeurIPS 2025. arXiv:2507.14193 · doi:10.52202/085713-1246</a:t>
             </a:r>
           </a:p>
-          <a:p xmlns:a="http://schemas.openxmlformats.org/drawingml/2006/main">
+          <a:p>
             <a:r>
               <a:rPr sz="900" b="1"/>
               <a:t>[2] Xu, F., Wang, X., Chen, W. &amp; Xie, K. (2025). The Economics of AI Foundation Models. arXiv:2510.15200 · doi:10.2139/ssrn.4999355</a:t>
             </a:r>
           </a:p>
-          <a:p xmlns:a="http://schemas.openxmlformats.org/drawingml/2006/main">
+          <a:p>
             <a:r>
               <a:rPr sz="900" b="1"/>
               <a:t>[3] Habibi, M. (2025). Open Sourcing GPTs. arXiv:2501.11581</a:t>
@@ -3907,37 +3558,37 @@
       <p:sp>
         <p:nvSpPr>
           <p:cNvPr id="45" name="access-heading">
-            <a:extLst xmlns:a="http://schemas.openxmlformats.org/drawingml/2006/main">
+            <a:extLst>
               <a:ext uri="{FF2B5EF4-FFF2-40B4-BE49-F238E27FC236}">
                 <a16:creationId xmlns:a16="http://schemas.microsoft.com/office/drawing/2014/main" id="{49F540C3-5DD7-4CE8-9BCD-20A72A498083}"/>
               </a:ext>
             </a:extLst>
           </p:cNvPr>
           <p:cNvSpPr>
-            <a:spLocks xmlns:a="http://schemas.openxmlformats.org/drawingml/2006/main" noGrp="1"/>
+            <a:spLocks noGrp="1"/>
           </p:cNvSpPr>
           <p:nvPr/>
         </p:nvSpPr>
         <p:spPr>
-          <a:xfrm xmlns:a="http://schemas.openxmlformats.org/drawingml/2006/main">
+          <a:xfrm>
             <a:off x="30421500" y="27813000"/>
             <a:ext cx="11049000" cy="476250"/>
           </a:xfrm>
-          <a:prstGeom xmlns:a="http://schemas.openxmlformats.org/drawingml/2006/main" prst="rect">
-            <a:avLst/>
-          </a:prstGeom>
-          <a:noFill xmlns:a="http://schemas.openxmlformats.org/drawingml/2006/main"/>
-          <a:ln xmlns:a="http://schemas.openxmlformats.org/drawingml/2006/main" w="0">
+          <a:prstGeom prst="rect">
+            <a:avLst/>
+          </a:prstGeom>
+          <a:noFill/>
+          <a:ln w="0">
             <a:noFill/>
             <a:prstDash val="solid"/>
           </a:ln>
         </p:spPr>
         <p:txBody>
-          <a:bodyPr xmlns:a="http://schemas.openxmlformats.org/drawingml/2006/main">
+          <a:bodyPr>
             <a:noAutofit/>
           </a:bodyPr>
-          <a:lstStyle xmlns:a="http://schemas.openxmlformats.org/drawingml/2006/main"/>
-          <a:p xmlns:a="http://schemas.openxmlformats.org/drawingml/2006/main">
+          <a:lstStyle/>
+          <a:p>
             <a:pPr algn="l">
               <a:defRPr sz="2400" b="1">
                 <a:solidFill>
@@ -3965,49 +3616,49 @@
       <p:sp>
         <p:nvSpPr>
           <p:cNvPr id="46" name="access-links">
-            <a:extLst xmlns:a="http://schemas.openxmlformats.org/drawingml/2006/main">
+            <a:extLst>
               <a:ext uri="{FF2B5EF4-FFF2-40B4-BE49-F238E27FC236}">
                 <a16:creationId xmlns:a16="http://schemas.microsoft.com/office/drawing/2014/main" id="{35C264DA-792D-48F7-AE3C-F21A5E9ADD8F}"/>
               </a:ext>
             </a:extLst>
           </p:cNvPr>
           <p:cNvSpPr>
-            <a:spLocks xmlns:a="http://schemas.openxmlformats.org/drawingml/2006/main" noGrp="1"/>
+            <a:spLocks noGrp="1"/>
           </p:cNvSpPr>
           <p:nvPr/>
         </p:nvSpPr>
         <p:spPr>
-          <a:xfrm xmlns:a="http://schemas.openxmlformats.org/drawingml/2006/main">
+          <a:xfrm>
             <a:off x="30421500" y="28384500"/>
             <a:ext cx="8096250" cy="1000125"/>
           </a:xfrm>
-          <a:prstGeom xmlns:a="http://schemas.openxmlformats.org/drawingml/2006/main" prst="rect">
-            <a:avLst/>
-          </a:prstGeom>
-          <a:noFill xmlns:a="http://schemas.openxmlformats.org/drawingml/2006/main"/>
-          <a:ln xmlns:a="http://schemas.openxmlformats.org/drawingml/2006/main" w="0">
+          <a:prstGeom prst="rect">
+            <a:avLst/>
+          </a:prstGeom>
+          <a:noFill/>
+          <a:ln w="0">
             <a:noFill/>
             <a:prstDash val="solid"/>
           </a:ln>
         </p:spPr>
         <p:txBody>
-          <a:bodyPr xmlns:a="http://schemas.openxmlformats.org/drawingml/2006/main" wrap="square" anchor="t">
+          <a:bodyPr wrap="square" anchor="t">
             <a:noAutofit/>
           </a:bodyPr>
-          <a:lstStyle xmlns:a="http://schemas.openxmlformats.org/drawingml/2006/main"/>
-          <a:p xmlns:a="http://schemas.openxmlformats.org/drawingml/2006/main">
+          <a:lstStyle/>
+          <a:p>
             <a:r>
               <a:rPr sz="900" b="1"/>
               <a:t>Hugging Face: huggingface.co/spaces/dku-comsci-econ206-2026/FP4_PS2</a:t>
             </a:r>
           </a:p>
-          <a:p xmlns:a="http://schemas.openxmlformats.org/drawingml/2006/main">
+          <a:p>
             <a:r>
               <a:rPr sz="900" b="1"/>
               <a:t>GitHub: github.com/dku-comsci-econ206-Autumn2026/PS2-FP4-CapabilityTransfer</a:t>
             </a:r>
           </a:p>
-          <a:p xmlns:a="http://schemas.openxmlformats.org/drawingml/2006/main">
+          <a:p>
             <a:r>
               <a:rPr sz="900" b="1"/>
               <a:t>Commit a38a684  ·  MIT licence</a:t>
@@ -4018,37 +3669,37 @@
       <p:sp>
         <p:nvSpPr>
           <p:cNvPr id="51" name="format-note">
-            <a:extLst xmlns:a="http://schemas.openxmlformats.org/drawingml/2006/main">
+            <a:extLst>
               <a:ext uri="{FF2B5EF4-FFF2-40B4-BE49-F238E27FC236}">
                 <a16:creationId xmlns:a16="http://schemas.microsoft.com/office/drawing/2014/main" id="{49DEC60E-E378-41A7-B1C9-EC4712C55A58}"/>
               </a:ext>
             </a:extLst>
           </p:cNvPr>
           <p:cNvSpPr>
-            <a:spLocks xmlns:a="http://schemas.openxmlformats.org/drawingml/2006/main" noGrp="1"/>
+            <a:spLocks noGrp="1"/>
           </p:cNvSpPr>
           <p:nvPr/>
         </p:nvSpPr>
         <p:spPr>
-          <a:xfrm xmlns:a="http://schemas.openxmlformats.org/drawingml/2006/main">
+          <a:xfrm>
             <a:off x="1333500" y="29813250"/>
             <a:ext cx="40137000" cy="400050"/>
           </a:xfrm>
-          <a:prstGeom xmlns:a="http://schemas.openxmlformats.org/drawingml/2006/main" prst="rect">
-            <a:avLst/>
-          </a:prstGeom>
-          <a:noFill xmlns:a="http://schemas.openxmlformats.org/drawingml/2006/main"/>
-          <a:ln xmlns:a="http://schemas.openxmlformats.org/drawingml/2006/main" w="0">
+          <a:prstGeom prst="rect">
+            <a:avLst/>
+          </a:prstGeom>
+          <a:noFill/>
+          <a:ln w="0">
             <a:noFill/>
             <a:prstDash val="solid"/>
           </a:ln>
         </p:spPr>
         <p:txBody>
-          <a:bodyPr xmlns:a="http://schemas.openxmlformats.org/drawingml/2006/main" wrap="square" anchor="t">
+          <a:bodyPr wrap="square" anchor="t">
             <a:noAutofit/>
           </a:bodyPr>
-          <a:lstStyle xmlns:a="http://schemas.openxmlformats.org/drawingml/2006/main"/>
-          <a:p xmlns:a="http://schemas.openxmlformats.org/drawingml/2006/main">
+          <a:lstStyle/>
+          <a:p>
             <a:r>
               <a:rPr sz="1950" b="0"/>
               <a:t>A0 landscape · editable PPTX + PDF · commit poster/final-poster.png and final-poster.pdf to GitHub root README</a:t>
@@ -4056,7 +3707,7 @@
           </a:p>
         </p:txBody>
       </p:sp>
-      <p:sp xmlns:a="http://schemas.openxmlformats.org/drawingml/2006/main">
+      <p:sp>
         <p:nvSpPr>
           <p:cNvPr id="59" name="fig1-colhdr-1"/>
           <p:cNvSpPr/>
@@ -4093,11 +3744,11 @@
           </a:fontRef>
         </p:style>
         <p:txBody>
-          <a:bodyPr rtlCol="0" anchor="ctr" wrap="square" lIns="72000" rIns="72000" tIns="43200" bIns="43200">
+          <a:bodyPr wrap="square" lIns="72000" tIns="43200" rIns="72000" bIns="43200" rtlCol="0" anchor="ctr">
             <a:noAutofit/>
           </a:bodyPr>
           <a:lstStyle/>
-          <a:p xmlns:a="http://schemas.openxmlformats.org/drawingml/2006/main">
+          <a:p>
             <a:pPr algn="ctr">
               <a:lnSpc>
                 <a:spcPct val="100000"/>
@@ -4157,7 +3808,7 @@
           </a:p>
         </p:txBody>
       </p:sp>
-      <p:sp xmlns:a="http://schemas.openxmlformats.org/drawingml/2006/main">
+      <p:sp>
         <p:nvSpPr>
           <p:cNvPr id="60" name="fig1-colhdr-2"/>
           <p:cNvSpPr/>
@@ -4194,11 +3845,11 @@
           </a:fontRef>
         </p:style>
         <p:txBody>
-          <a:bodyPr rtlCol="0" anchor="ctr" wrap="square" lIns="72000" rIns="72000" tIns="43200" bIns="43200">
+          <a:bodyPr wrap="square" lIns="72000" tIns="43200" rIns="72000" bIns="43200" rtlCol="0" anchor="ctr">
             <a:noAutofit/>
           </a:bodyPr>
           <a:lstStyle/>
-          <a:p xmlns:a="http://schemas.openxmlformats.org/drawingml/2006/main">
+          <a:p>
             <a:pPr algn="ctr">
               <a:lnSpc>
                 <a:spcPct val="100000"/>
@@ -4258,7 +3909,7 @@
           </a:p>
         </p:txBody>
       </p:sp>
-      <p:sp xmlns:a="http://schemas.openxmlformats.org/drawingml/2006/main">
+      <p:sp>
         <p:nvSpPr>
           <p:cNvPr id="61" name="fig1-rowhdr-0"/>
           <p:cNvSpPr/>
@@ -4295,7 +3946,7 @@
           </a:fontRef>
         </p:style>
         <p:txBody>
-          <a:bodyPr rtlCol="0" anchor="ctr" wrap="square" lIns="54000" rIns="54000" tIns="32400" bIns="32400">
+          <a:bodyPr wrap="square" lIns="54000" tIns="32400" rIns="54000" bIns="32400" rtlCol="0" anchor="ctr">
             <a:noAutofit/>
           </a:bodyPr>
           <a:lstStyle/>
@@ -4323,7 +3974,7 @@
           </a:p>
         </p:txBody>
       </p:sp>
-      <p:sp xmlns:a="http://schemas.openxmlformats.org/drawingml/2006/main">
+      <p:sp>
         <p:nvSpPr>
           <p:cNvPr id="62" name="fig1-rowhdr-1"/>
           <p:cNvSpPr/>
@@ -4360,7 +4011,7 @@
           </a:fontRef>
         </p:style>
         <p:txBody>
-          <a:bodyPr rtlCol="0" anchor="ctr" wrap="square" lIns="54000" rIns="54000" tIns="32400" bIns="32400">
+          <a:bodyPr wrap="square" lIns="54000" tIns="32400" rIns="54000" bIns="32400" rtlCol="0" anchor="ctr">
             <a:noAutofit/>
           </a:bodyPr>
           <a:lstStyle/>
@@ -4388,7 +4039,7 @@
           </a:p>
         </p:txBody>
       </p:sp>
-      <p:sp xmlns:a="http://schemas.openxmlformats.org/drawingml/2006/main">
+      <p:sp>
         <p:nvSpPr>
           <p:cNvPr id="63" name="fig1-cell-①"/>
           <p:cNvSpPr/>
@@ -4427,11 +4078,11 @@
           </a:fontRef>
         </p:style>
         <p:txBody>
-          <a:bodyPr rtlCol="0" anchor="ctr" wrap="square" lIns="151200" rIns="151200" tIns="90720" bIns="90720">
+          <a:bodyPr wrap="square" lIns="151200" tIns="90720" rIns="151200" bIns="90720" rtlCol="0" anchor="ctr">
             <a:noAutofit/>
           </a:bodyPr>
           <a:lstStyle/>
-          <a:p xmlns:a="http://schemas.openxmlformats.org/drawingml/2006/main">
+          <a:p>
             <a:pPr algn="l">
               <a:lnSpc>
                 <a:spcPct val="102000"/>
@@ -4450,19 +4101,10 @@
                 </a:solidFill>
                 <a:latin typeface="Calibri"/>
               </a:rPr>
-              <a:t>①  </a:t>
-            </a:r>
-            <a:r>
-              <a:rPr sz="2300" b="1">
-                <a:solidFill>
-                  <a:srgbClr val="212A33"/>
-                </a:solidFill>
-                <a:latin typeface="Calibri"/>
-              </a:rPr>
-              <a:t>Secrecy + imitation</a:t>
-            </a:r>
-          </a:p>
-          <a:p xmlns:a="http://schemas.openxmlformats.org/drawingml/2006/main">
+              <a:t>①  Secrecy + imitation</a:t>
+            </a:r>
+          </a:p>
+          <a:p>
             <a:pPr algn="l">
               <a:lnSpc>
                 <a:spcPct val="102000"/>
@@ -4493,7 +4135,7 @@
               <a:t> — takes, gives nothing</a:t>
             </a:r>
           </a:p>
-          <a:p xmlns:a="http://schemas.openxmlformats.org/drawingml/2006/main">
+          <a:p>
             <a:pPr algn="l">
               <a:lnSpc>
                 <a:spcPct val="102000"/>
@@ -4515,7 +4157,7 @@
               <a:t>π − C</a:t>
             </a:r>
             <a:r>
-              <a:rPr baseline="-25000" sz="2300" b="0">
+              <a:rPr sz="2300" b="0" baseline="-25000">
                 <a:solidFill>
                   <a:srgbClr val="212A33"/>
                 </a:solidFill>
@@ -4526,7 +4168,7 @@
           </a:p>
         </p:txBody>
       </p:sp>
-      <p:sp xmlns:a="http://schemas.openxmlformats.org/drawingml/2006/main">
+      <p:sp>
         <p:nvSpPr>
           <p:cNvPr id="64" name="fig1-cell-②"/>
           <p:cNvSpPr/>
@@ -4565,11 +4207,11 @@
           </a:fontRef>
         </p:style>
         <p:txBody>
-          <a:bodyPr rtlCol="0" anchor="ctr" wrap="square" lIns="151200" rIns="151200" tIns="90720" bIns="90720">
+          <a:bodyPr wrap="square" lIns="151200" tIns="90720" rIns="151200" bIns="90720" rtlCol="0" anchor="ctr">
             <a:noAutofit/>
           </a:bodyPr>
           <a:lstStyle/>
-          <a:p xmlns:a="http://schemas.openxmlformats.org/drawingml/2006/main">
+          <a:p>
             <a:pPr algn="l">
               <a:lnSpc>
                 <a:spcPct val="102000"/>
@@ -4588,19 +4230,10 @@
                 </a:solidFill>
                 <a:latin typeface="Calibri"/>
               </a:rPr>
-              <a:t>②  </a:t>
-            </a:r>
-            <a:r>
-              <a:rPr sz="2300" b="1">
-                <a:solidFill>
-                  <a:srgbClr val="212A33"/>
-                </a:solidFill>
-                <a:latin typeface="Calibri"/>
-              </a:rPr>
-              <a:t>Openness + imitation</a:t>
-            </a:r>
-          </a:p>
-          <a:p xmlns:a="http://schemas.openxmlformats.org/drawingml/2006/main">
+              <a:t>②  Openness + imitation</a:t>
+            </a:r>
+          </a:p>
+          <a:p>
             <a:pPr algn="l">
               <a:lnSpc>
                 <a:spcPct val="102000"/>
@@ -4631,7 +4264,7 @@
               <a:t> — takes and gives back</a:t>
             </a:r>
           </a:p>
-          <a:p xmlns:a="http://schemas.openxmlformats.org/drawingml/2006/main">
+          <a:p>
             <a:pPr algn="l">
               <a:lnSpc>
                 <a:spcPct val="102000"/>
@@ -4686,21 +4319,12 @@
                 </a:solidFill>
                 <a:latin typeface="Calibri"/>
               </a:rPr>
-              <a:t> − L</a:t>
-            </a:r>
-            <a:r>
-              <a:rPr sz="2300" b="1">
-                <a:solidFill>
-                  <a:srgbClr val="212A33"/>
-                </a:solidFill>
-                <a:latin typeface="Calibri"/>
-              </a:rPr>
-              <a:t> + βφK·m/(m+m₀)</a:t>
-            </a:r>
-          </a:p>
-        </p:txBody>
-      </p:sp>
-      <p:sp xmlns:a="http://schemas.openxmlformats.org/drawingml/2006/main">
+              <a:t> − L + βφK·m/(m+m₀)</a:t>
+            </a:r>
+          </a:p>
+        </p:txBody>
+      </p:sp>
+      <p:sp>
         <p:nvSpPr>
           <p:cNvPr id="65" name="fig1-cell-③"/>
           <p:cNvSpPr/>
@@ -4739,11 +4363,11 @@
           </a:fontRef>
         </p:style>
         <p:txBody>
-          <a:bodyPr rtlCol="0" anchor="ctr" wrap="square" lIns="151200" rIns="151200" tIns="90720" bIns="90720">
+          <a:bodyPr wrap="square" lIns="151200" tIns="90720" rIns="151200" bIns="90720" rtlCol="0" anchor="ctr">
             <a:noAutofit/>
           </a:bodyPr>
           <a:lstStyle/>
-          <a:p xmlns:a="http://schemas.openxmlformats.org/drawingml/2006/main">
+          <a:p>
             <a:pPr algn="l">
               <a:lnSpc>
                 <a:spcPct val="102000"/>
@@ -4762,19 +4386,10 @@
                 </a:solidFill>
                 <a:latin typeface="Calibri"/>
               </a:rPr>
-              <a:t>③  </a:t>
-            </a:r>
-            <a:r>
-              <a:rPr sz="2300" b="1">
-                <a:solidFill>
-                  <a:srgbClr val="212A33"/>
-                </a:solidFill>
-                <a:latin typeface="Calibri"/>
-              </a:rPr>
-              <a:t>Secrecy + innovation</a:t>
-            </a:r>
-          </a:p>
-          <a:p xmlns:a="http://schemas.openxmlformats.org/drawingml/2006/main">
+              <a:t>③  Secrecy + innovation</a:t>
+            </a:r>
+          </a:p>
+          <a:p>
             <a:pPr algn="l">
               <a:lnSpc>
                 <a:spcPct val="102000"/>
@@ -4805,7 +4420,7 @@
               <a:t> — builds, keeps it</a:t>
             </a:r>
           </a:p>
-          <a:p xmlns:a="http://schemas.openxmlformats.org/drawingml/2006/main">
+          <a:p>
             <a:pPr algn="l">
               <a:lnSpc>
                 <a:spcPct val="102000"/>
@@ -4827,7 +4442,7 @@
               <a:t>π − C</a:t>
             </a:r>
             <a:r>
-              <a:rPr baseline="-25000" sz="2300" b="0">
+              <a:rPr sz="2300" b="0" baseline="-25000">
                 <a:solidFill>
                   <a:srgbClr val="212A33"/>
                 </a:solidFill>
@@ -4838,7 +4453,7 @@
           </a:p>
         </p:txBody>
       </p:sp>
-      <p:sp xmlns:a="http://schemas.openxmlformats.org/drawingml/2006/main">
+      <p:sp>
         <p:nvSpPr>
           <p:cNvPr id="66" name="fig1-cell-④"/>
           <p:cNvSpPr/>
@@ -4877,11 +4492,11 @@
           </a:fontRef>
         </p:style>
         <p:txBody>
-          <a:bodyPr rtlCol="0" anchor="ctr" wrap="square" lIns="151200" rIns="151200" tIns="90720" bIns="90720">
+          <a:bodyPr wrap="square" lIns="151200" tIns="90720" rIns="151200" bIns="90720" rtlCol="0" anchor="ctr">
             <a:noAutofit/>
           </a:bodyPr>
           <a:lstStyle/>
-          <a:p xmlns:a="http://schemas.openxmlformats.org/drawingml/2006/main">
+          <a:p>
             <a:pPr algn="l">
               <a:lnSpc>
                 <a:spcPct val="102000"/>
@@ -4900,19 +4515,10 @@
                 </a:solidFill>
                 <a:latin typeface="Calibri"/>
               </a:rPr>
-              <a:t>④  </a:t>
-            </a:r>
-            <a:r>
-              <a:rPr sz="2300" b="1">
-                <a:solidFill>
-                  <a:srgbClr val="212A33"/>
-                </a:solidFill>
-                <a:latin typeface="Calibri"/>
-              </a:rPr>
-              <a:t>Openness + innovation</a:t>
-            </a:r>
-          </a:p>
-          <a:p xmlns:a="http://schemas.openxmlformats.org/drawingml/2006/main">
+              <a:t>④  Openness + innovation</a:t>
+            </a:r>
+          </a:p>
+          <a:p>
             <a:pPr algn="l">
               <a:lnSpc>
                 <a:spcPct val="102000"/>
@@ -4943,7 +4549,7 @@
               <a:t> — builds, and shares</a:t>
             </a:r>
           </a:p>
-          <a:p xmlns:a="http://schemas.openxmlformats.org/drawingml/2006/main">
+          <a:p>
             <a:pPr algn="l">
               <a:lnSpc>
                 <a:spcPct val="102000"/>
@@ -4998,21 +4604,12 @@
                 </a:solidFill>
                 <a:latin typeface="Calibri"/>
               </a:rPr>
-              <a:t> − L</a:t>
-            </a:r>
-            <a:r>
-              <a:rPr sz="2300" b="1">
-                <a:solidFill>
-                  <a:srgbClr val="212A33"/>
-                </a:solidFill>
-                <a:latin typeface="Calibri"/>
-              </a:rPr>
-              <a:t> + βφK·m/(m+m₀)</a:t>
-            </a:r>
-          </a:p>
-        </p:txBody>
-      </p:sp>
-      <p:sp xmlns:a="http://schemas.openxmlformats.org/drawingml/2006/main">
+              <a:t> − L + βφK·m/(m+m₀)</a:t>
+            </a:r>
+          </a:p>
+        </p:txBody>
+      </p:sp>
+      <p:sp>
         <p:nvSpPr>
           <p:cNvPr id="67" name="fig2-hdr-0"/>
           <p:cNvSpPr/>
@@ -5049,7 +4646,7 @@
           </a:fontRef>
         </p:style>
         <p:txBody>
-          <a:bodyPr rtlCol="0" anchor="ctr" wrap="square" lIns="54000" rIns="54000" tIns="32400" bIns="32400">
+          <a:bodyPr wrap="square" lIns="54000" tIns="32400" rIns="54000" bIns="32400" rtlCol="0" anchor="ctr">
             <a:noAutofit/>
           </a:bodyPr>
           <a:lstStyle/>
@@ -5077,7 +4674,7 @@
           </a:p>
         </p:txBody>
       </p:sp>
-      <p:sp xmlns:a="http://schemas.openxmlformats.org/drawingml/2006/main">
+      <p:sp>
         <p:nvSpPr>
           <p:cNvPr id="68" name="fig2-hdr-1"/>
           <p:cNvSpPr/>
@@ -5114,7 +4711,7 @@
           </a:fontRef>
         </p:style>
         <p:txBody>
-          <a:bodyPr rtlCol="0" anchor="ctr" wrap="square" lIns="54000" rIns="54000" tIns="32400" bIns="32400">
+          <a:bodyPr wrap="square" lIns="54000" tIns="32400" rIns="54000" bIns="32400" rtlCol="0" anchor="ctr">
             <a:noAutofit/>
           </a:bodyPr>
           <a:lstStyle/>
@@ -5142,7 +4739,7 @@
           </a:p>
         </p:txBody>
       </p:sp>
-      <p:sp xmlns:a="http://schemas.openxmlformats.org/drawingml/2006/main">
+      <p:sp>
         <p:nvSpPr>
           <p:cNvPr id="69" name="fig2-hdr-2"/>
           <p:cNvSpPr/>
@@ -5179,7 +4776,7 @@
           </a:fontRef>
         </p:style>
         <p:txBody>
-          <a:bodyPr rtlCol="0" anchor="ctr" wrap="square" lIns="54000" rIns="54000" tIns="32400" bIns="32400">
+          <a:bodyPr wrap="square" lIns="54000" tIns="32400" rIns="54000" bIns="32400" rtlCol="0" anchor="ctr">
             <a:noAutofit/>
           </a:bodyPr>
           <a:lstStyle/>
@@ -5207,7 +4804,7 @@
           </a:p>
         </p:txBody>
       </p:sp>
-      <p:sp xmlns:a="http://schemas.openxmlformats.org/drawingml/2006/main">
+      <p:sp>
         <p:nvSpPr>
           <p:cNvPr id="70" name="fig2-hdr-3"/>
           <p:cNvSpPr/>
@@ -5244,7 +4841,7 @@
           </a:fontRef>
         </p:style>
         <p:txBody>
-          <a:bodyPr rtlCol="0" anchor="ctr" wrap="square" lIns="54000" rIns="54000" tIns="32400" bIns="32400">
+          <a:bodyPr wrap="square" lIns="54000" tIns="32400" rIns="54000" bIns="32400" rtlCol="0" anchor="ctr">
             <a:noAutofit/>
           </a:bodyPr>
           <a:lstStyle/>
@@ -5272,7 +4869,7 @@
           </a:p>
         </p:txBody>
       </p:sp>
-      <p:sp xmlns:a="http://schemas.openxmlformats.org/drawingml/2006/main">
+      <p:sp>
         <p:nvSpPr>
           <p:cNvPr id="71" name="fig2-c0-name"/>
           <p:cNvSpPr/>
@@ -5311,7 +4908,7 @@
           </a:fontRef>
         </p:style>
         <p:txBody>
-          <a:bodyPr rtlCol="0" anchor="ctr" wrap="square" lIns="144000" rIns="144000" tIns="86400" bIns="86400">
+          <a:bodyPr wrap="square" lIns="144000" tIns="86400" rIns="144000" bIns="86400" rtlCol="0" anchor="ctr">
             <a:noAutofit/>
           </a:bodyPr>
           <a:lstStyle/>
@@ -5339,7 +4936,7 @@
           </a:p>
         </p:txBody>
       </p:sp>
-      <p:sp xmlns:a="http://schemas.openxmlformats.org/drawingml/2006/main">
+      <p:sp>
         <p:nvSpPr>
           <p:cNvPr id="72" name="fig2-c0-privbox"/>
           <p:cNvSpPr/>
@@ -5378,7 +4975,7 @@
           </a:fontRef>
         </p:style>
         <p:txBody>
-          <a:bodyPr rtlCol="0" anchor="ctr" wrap="square" lIns="72000" rIns="72000" tIns="43200" bIns="43200">
+          <a:bodyPr wrap="square" lIns="72000" tIns="43200" rIns="72000" bIns="43200" rtlCol="0" anchor="ctr">
             <a:noAutofit/>
           </a:bodyPr>
           <a:lstStyle/>
@@ -5394,10 +4991,11 @@
                 <a:spcPts val="0"/>
               </a:spcAft>
             </a:pPr>
-          </a:p>
-        </p:txBody>
-      </p:sp>
-      <p:sp xmlns:a="http://schemas.openxmlformats.org/drawingml/2006/main">
+            <a:endParaRPr/>
+          </a:p>
+        </p:txBody>
+      </p:sp>
+      <p:sp>
         <p:nvSpPr>
           <p:cNvPr id="73" name="fig2-c0-priv-1"/>
           <p:cNvSpPr/>
@@ -5436,14 +5034,15 @@
           </a:fontRef>
         </p:style>
         <p:txBody>
-          <a:bodyPr rtlCol="0" anchor="ctr" wrap="square"/>
+          <a:bodyPr wrap="square" rtlCol="0" anchor="ctr"/>
           <a:lstStyle/>
           <a:p>
             <a:pPr algn="ctr"/>
-          </a:p>
-        </p:txBody>
-      </p:sp>
-      <p:sp xmlns:a="http://schemas.openxmlformats.org/drawingml/2006/main">
+            <a:endParaRPr/>
+          </a:p>
+        </p:txBody>
+      </p:sp>
+      <p:sp>
         <p:nvSpPr>
           <p:cNvPr id="74" name="fig2-c0-priv-2"/>
           <p:cNvSpPr/>
@@ -5482,14 +5081,15 @@
           </a:fontRef>
         </p:style>
         <p:txBody>
-          <a:bodyPr rtlCol="0" anchor="ctr" wrap="square"/>
+          <a:bodyPr wrap="square" rtlCol="0" anchor="ctr"/>
           <a:lstStyle/>
           <a:p>
             <a:pPr algn="ctr"/>
-          </a:p>
-        </p:txBody>
-      </p:sp>
-      <p:sp xmlns:a="http://schemas.openxmlformats.org/drawingml/2006/main">
+            <a:endParaRPr/>
+          </a:p>
+        </p:txBody>
+      </p:sp>
+      <p:sp>
         <p:nvSpPr>
           <p:cNvPr id="75" name="fig2-c0-priv-3"/>
           <p:cNvSpPr/>
@@ -5528,14 +5128,15 @@
           </a:fontRef>
         </p:style>
         <p:txBody>
-          <a:bodyPr rtlCol="0" anchor="ctr" wrap="square"/>
+          <a:bodyPr wrap="square" rtlCol="0" anchor="ctr"/>
           <a:lstStyle/>
           <a:p>
             <a:pPr algn="ctr"/>
-          </a:p>
-        </p:txBody>
-      </p:sp>
-      <p:sp xmlns:a="http://schemas.openxmlformats.org/drawingml/2006/main">
+            <a:endParaRPr/>
+          </a:p>
+        </p:txBody>
+      </p:sp>
+      <p:sp>
         <p:nvSpPr>
           <p:cNvPr id="76" name="fig2-c0-priv-4"/>
           <p:cNvSpPr/>
@@ -5574,14 +5175,15 @@
           </a:fontRef>
         </p:style>
         <p:txBody>
-          <a:bodyPr rtlCol="0" anchor="ctr" wrap="square"/>
+          <a:bodyPr wrap="square" rtlCol="0" anchor="ctr"/>
           <a:lstStyle/>
           <a:p>
             <a:pPr algn="ctr"/>
-          </a:p>
-        </p:txBody>
-      </p:sp>
-      <p:sp xmlns:a="http://schemas.openxmlformats.org/drawingml/2006/main">
+            <a:endParaRPr/>
+          </a:p>
+        </p:txBody>
+      </p:sp>
+      <p:sp>
         <p:nvSpPr>
           <p:cNvPr id="77" name="fig2-c0-socbox"/>
           <p:cNvSpPr/>
@@ -5620,7 +5222,7 @@
           </a:fontRef>
         </p:style>
         <p:txBody>
-          <a:bodyPr rtlCol="0" anchor="ctr" wrap="square" lIns="72000" rIns="72000" tIns="43200" bIns="43200">
+          <a:bodyPr wrap="square" lIns="72000" tIns="43200" rIns="72000" bIns="43200" rtlCol="0" anchor="ctr">
             <a:noAutofit/>
           </a:bodyPr>
           <a:lstStyle/>
@@ -5636,10 +5238,11 @@
                 <a:spcPts val="0"/>
               </a:spcAft>
             </a:pPr>
-          </a:p>
-        </p:txBody>
-      </p:sp>
-      <p:sp xmlns:a="http://schemas.openxmlformats.org/drawingml/2006/main">
+            <a:endParaRPr/>
+          </a:p>
+        </p:txBody>
+      </p:sp>
+      <p:sp>
         <p:nvSpPr>
           <p:cNvPr id="78" name="fig2-c0-soc-1"/>
           <p:cNvSpPr/>
@@ -5678,14 +5281,15 @@
           </a:fontRef>
         </p:style>
         <p:txBody>
-          <a:bodyPr rtlCol="0" anchor="ctr" wrap="square"/>
+          <a:bodyPr wrap="square" rtlCol="0" anchor="ctr"/>
           <a:lstStyle/>
           <a:p>
             <a:pPr algn="ctr"/>
-          </a:p>
-        </p:txBody>
-      </p:sp>
-      <p:sp xmlns:a="http://schemas.openxmlformats.org/drawingml/2006/main">
+            <a:endParaRPr/>
+          </a:p>
+        </p:txBody>
+      </p:sp>
+      <p:sp>
         <p:nvSpPr>
           <p:cNvPr id="79" name="fig2-c0-soc-2"/>
           <p:cNvSpPr/>
@@ -5724,14 +5328,15 @@
           </a:fontRef>
         </p:style>
         <p:txBody>
-          <a:bodyPr rtlCol="0" anchor="ctr" wrap="square"/>
+          <a:bodyPr wrap="square" rtlCol="0" anchor="ctr"/>
           <a:lstStyle/>
           <a:p>
             <a:pPr algn="ctr"/>
-          </a:p>
-        </p:txBody>
-      </p:sp>
-      <p:sp xmlns:a="http://schemas.openxmlformats.org/drawingml/2006/main">
+            <a:endParaRPr/>
+          </a:p>
+        </p:txBody>
+      </p:sp>
+      <p:sp>
         <p:nvSpPr>
           <p:cNvPr id="80" name="fig2-c0-soc-3"/>
           <p:cNvSpPr/>
@@ -5770,14 +5375,15 @@
           </a:fontRef>
         </p:style>
         <p:txBody>
-          <a:bodyPr rtlCol="0" anchor="ctr" wrap="square"/>
+          <a:bodyPr wrap="square" rtlCol="0" anchor="ctr"/>
           <a:lstStyle/>
           <a:p>
             <a:pPr algn="ctr"/>
-          </a:p>
-        </p:txBody>
-      </p:sp>
-      <p:sp xmlns:a="http://schemas.openxmlformats.org/drawingml/2006/main">
+            <a:endParaRPr/>
+          </a:p>
+        </p:txBody>
+      </p:sp>
+      <p:sp>
         <p:nvSpPr>
           <p:cNvPr id="81" name="fig2-c0-soc-4"/>
           <p:cNvSpPr/>
@@ -5816,14 +5422,15 @@
           </a:fontRef>
         </p:style>
         <p:txBody>
-          <a:bodyPr rtlCol="0" anchor="ctr" wrap="square"/>
+          <a:bodyPr wrap="square" rtlCol="0" anchor="ctr"/>
           <a:lstStyle/>
           <a:p>
             <a:pPr algn="ctr"/>
-          </a:p>
-        </p:txBody>
-      </p:sp>
-      <p:sp xmlns:a="http://schemas.openxmlformats.org/drawingml/2006/main">
+            <a:endParaRPr/>
+          </a:p>
+        </p:txBody>
+      </p:sp>
+      <p:sp>
         <p:nvSpPr>
           <p:cNvPr id="82" name="fig2-c0-conf"/>
           <p:cNvSpPr/>
@@ -5862,7 +5469,7 @@
           </a:fontRef>
         </p:style>
         <p:txBody>
-          <a:bodyPr rtlCol="0" anchor="ctr" wrap="square" lIns="198000" rIns="198000" tIns="118800" bIns="118800">
+          <a:bodyPr wrap="square" lIns="198000" tIns="118800" rIns="198000" bIns="118800" rtlCol="0" anchor="ctr">
             <a:noAutofit/>
           </a:bodyPr>
           <a:lstStyle/>
@@ -5890,7 +5497,7 @@
           </a:p>
         </p:txBody>
       </p:sp>
-      <p:sp xmlns:a="http://schemas.openxmlformats.org/drawingml/2006/main">
+      <p:sp>
         <p:nvSpPr>
           <p:cNvPr id="83" name="fig2-c1-name"/>
           <p:cNvSpPr/>
@@ -5929,7 +5536,7 @@
           </a:fontRef>
         </p:style>
         <p:txBody>
-          <a:bodyPr rtlCol="0" anchor="ctr" wrap="square" lIns="144000" rIns="144000" tIns="86400" bIns="86400">
+          <a:bodyPr wrap="square" lIns="144000" tIns="86400" rIns="144000" bIns="86400" rtlCol="0" anchor="ctr">
             <a:noAutofit/>
           </a:bodyPr>
           <a:lstStyle/>
@@ -5957,7 +5564,7 @@
           </a:p>
         </p:txBody>
       </p:sp>
-      <p:sp xmlns:a="http://schemas.openxmlformats.org/drawingml/2006/main">
+      <p:sp>
         <p:nvSpPr>
           <p:cNvPr id="84" name="fig2-c1-privbox"/>
           <p:cNvSpPr/>
@@ -5996,7 +5603,7 @@
           </a:fontRef>
         </p:style>
         <p:txBody>
-          <a:bodyPr rtlCol="0" anchor="ctr" wrap="square" lIns="72000" rIns="72000" tIns="43200" bIns="43200">
+          <a:bodyPr wrap="square" lIns="72000" tIns="43200" rIns="72000" bIns="43200" rtlCol="0" anchor="ctr">
             <a:noAutofit/>
           </a:bodyPr>
           <a:lstStyle/>
@@ -6012,10 +5619,11 @@
                 <a:spcPts val="0"/>
               </a:spcAft>
             </a:pPr>
-          </a:p>
-        </p:txBody>
-      </p:sp>
-      <p:sp xmlns:a="http://schemas.openxmlformats.org/drawingml/2006/main">
+            <a:endParaRPr/>
+          </a:p>
+        </p:txBody>
+      </p:sp>
+      <p:sp>
         <p:nvSpPr>
           <p:cNvPr id="85" name="fig2-c1-priv-1"/>
           <p:cNvSpPr/>
@@ -6054,14 +5662,15 @@
           </a:fontRef>
         </p:style>
         <p:txBody>
-          <a:bodyPr rtlCol="0" anchor="ctr" wrap="square"/>
+          <a:bodyPr wrap="square" rtlCol="0" anchor="ctr"/>
           <a:lstStyle/>
           <a:p>
             <a:pPr algn="ctr"/>
-          </a:p>
-        </p:txBody>
-      </p:sp>
-      <p:sp xmlns:a="http://schemas.openxmlformats.org/drawingml/2006/main">
+            <a:endParaRPr/>
+          </a:p>
+        </p:txBody>
+      </p:sp>
+      <p:sp>
         <p:nvSpPr>
           <p:cNvPr id="86" name="fig2-c1-priv-2"/>
           <p:cNvSpPr/>
@@ -6100,14 +5709,15 @@
           </a:fontRef>
         </p:style>
         <p:txBody>
-          <a:bodyPr rtlCol="0" anchor="ctr" wrap="square"/>
+          <a:bodyPr wrap="square" rtlCol="0" anchor="ctr"/>
           <a:lstStyle/>
           <a:p>
             <a:pPr algn="ctr"/>
-          </a:p>
-        </p:txBody>
-      </p:sp>
-      <p:sp xmlns:a="http://schemas.openxmlformats.org/drawingml/2006/main">
+            <a:endParaRPr/>
+          </a:p>
+        </p:txBody>
+      </p:sp>
+      <p:sp>
         <p:nvSpPr>
           <p:cNvPr id="87" name="fig2-c1-priv-3"/>
           <p:cNvSpPr/>
@@ -6146,14 +5756,15 @@
           </a:fontRef>
         </p:style>
         <p:txBody>
-          <a:bodyPr rtlCol="0" anchor="ctr" wrap="square"/>
+          <a:bodyPr wrap="square" rtlCol="0" anchor="ctr"/>
           <a:lstStyle/>
           <a:p>
             <a:pPr algn="ctr"/>
-          </a:p>
-        </p:txBody>
-      </p:sp>
-      <p:sp xmlns:a="http://schemas.openxmlformats.org/drawingml/2006/main">
+            <a:endParaRPr/>
+          </a:p>
+        </p:txBody>
+      </p:sp>
+      <p:sp>
         <p:nvSpPr>
           <p:cNvPr id="88" name="fig2-c1-priv-4"/>
           <p:cNvSpPr/>
@@ -6192,14 +5803,15 @@
           </a:fontRef>
         </p:style>
         <p:txBody>
-          <a:bodyPr rtlCol="0" anchor="ctr" wrap="square"/>
+          <a:bodyPr wrap="square" rtlCol="0" anchor="ctr"/>
           <a:lstStyle/>
           <a:p>
             <a:pPr algn="ctr"/>
-          </a:p>
-        </p:txBody>
-      </p:sp>
-      <p:sp xmlns:a="http://schemas.openxmlformats.org/drawingml/2006/main">
+            <a:endParaRPr/>
+          </a:p>
+        </p:txBody>
+      </p:sp>
+      <p:sp>
         <p:nvSpPr>
           <p:cNvPr id="89" name="fig2-c1-socbox"/>
           <p:cNvSpPr/>
@@ -6238,7 +5850,7 @@
           </a:fontRef>
         </p:style>
         <p:txBody>
-          <a:bodyPr rtlCol="0" anchor="ctr" wrap="square" lIns="72000" rIns="72000" tIns="43200" bIns="43200">
+          <a:bodyPr wrap="square" lIns="72000" tIns="43200" rIns="72000" bIns="43200" rtlCol="0" anchor="ctr">
             <a:noAutofit/>
           </a:bodyPr>
           <a:lstStyle/>
@@ -6254,10 +5866,11 @@
                 <a:spcPts val="0"/>
               </a:spcAft>
             </a:pPr>
-          </a:p>
-        </p:txBody>
-      </p:sp>
-      <p:sp xmlns:a="http://schemas.openxmlformats.org/drawingml/2006/main">
+            <a:endParaRPr/>
+          </a:p>
+        </p:txBody>
+      </p:sp>
+      <p:sp>
         <p:nvSpPr>
           <p:cNvPr id="90" name="fig2-c1-soc-1"/>
           <p:cNvSpPr/>
@@ -6296,14 +5909,15 @@
           </a:fontRef>
         </p:style>
         <p:txBody>
-          <a:bodyPr rtlCol="0" anchor="ctr" wrap="square"/>
+          <a:bodyPr wrap="square" rtlCol="0" anchor="ctr"/>
           <a:lstStyle/>
           <a:p>
             <a:pPr algn="ctr"/>
-          </a:p>
-        </p:txBody>
-      </p:sp>
-      <p:sp xmlns:a="http://schemas.openxmlformats.org/drawingml/2006/main">
+            <a:endParaRPr/>
+          </a:p>
+        </p:txBody>
+      </p:sp>
+      <p:sp>
         <p:nvSpPr>
           <p:cNvPr id="91" name="fig2-c1-soc-2"/>
           <p:cNvSpPr/>
@@ -6342,14 +5956,15 @@
           </a:fontRef>
         </p:style>
         <p:txBody>
-          <a:bodyPr rtlCol="0" anchor="ctr" wrap="square"/>
+          <a:bodyPr wrap="square" rtlCol="0" anchor="ctr"/>
           <a:lstStyle/>
           <a:p>
             <a:pPr algn="ctr"/>
-          </a:p>
-        </p:txBody>
-      </p:sp>
-      <p:sp xmlns:a="http://schemas.openxmlformats.org/drawingml/2006/main">
+            <a:endParaRPr/>
+          </a:p>
+        </p:txBody>
+      </p:sp>
+      <p:sp>
         <p:nvSpPr>
           <p:cNvPr id="92" name="fig2-c1-soc-3"/>
           <p:cNvSpPr/>
@@ -6388,14 +6003,15 @@
           </a:fontRef>
         </p:style>
         <p:txBody>
-          <a:bodyPr rtlCol="0" anchor="ctr" wrap="square"/>
+          <a:bodyPr wrap="square" rtlCol="0" anchor="ctr"/>
           <a:lstStyle/>
           <a:p>
             <a:pPr algn="ctr"/>
-          </a:p>
-        </p:txBody>
-      </p:sp>
-      <p:sp xmlns:a="http://schemas.openxmlformats.org/drawingml/2006/main">
+            <a:endParaRPr/>
+          </a:p>
+        </p:txBody>
+      </p:sp>
+      <p:sp>
         <p:nvSpPr>
           <p:cNvPr id="93" name="fig2-c1-soc-4"/>
           <p:cNvSpPr/>
@@ -6434,14 +6050,15 @@
           </a:fontRef>
         </p:style>
         <p:txBody>
-          <a:bodyPr rtlCol="0" anchor="ctr" wrap="square"/>
+          <a:bodyPr wrap="square" rtlCol="0" anchor="ctr"/>
           <a:lstStyle/>
           <a:p>
             <a:pPr algn="ctr"/>
-          </a:p>
-        </p:txBody>
-      </p:sp>
-      <p:sp xmlns:a="http://schemas.openxmlformats.org/drawingml/2006/main">
+            <a:endParaRPr/>
+          </a:p>
+        </p:txBody>
+      </p:sp>
+      <p:sp>
         <p:nvSpPr>
           <p:cNvPr id="94" name="fig2-c1-conf"/>
           <p:cNvSpPr/>
@@ -6480,7 +6097,7 @@
           </a:fontRef>
         </p:style>
         <p:txBody>
-          <a:bodyPr rtlCol="0" anchor="ctr" wrap="square" lIns="198000" rIns="198000" tIns="118800" bIns="118800">
+          <a:bodyPr wrap="square" lIns="198000" tIns="118800" rIns="198000" bIns="118800" rtlCol="0" anchor="ctr">
             <a:noAutofit/>
           </a:bodyPr>
           <a:lstStyle/>
@@ -6508,7 +6125,7 @@
           </a:p>
         </p:txBody>
       </p:sp>
-      <p:sp xmlns:a="http://schemas.openxmlformats.org/drawingml/2006/main">
+      <p:sp>
         <p:nvSpPr>
           <p:cNvPr id="95" name="fig2-c2-name"/>
           <p:cNvSpPr/>
@@ -6547,7 +6164,7 @@
           </a:fontRef>
         </p:style>
         <p:txBody>
-          <a:bodyPr rtlCol="0" anchor="ctr" wrap="square" lIns="144000" rIns="144000" tIns="86400" bIns="86400">
+          <a:bodyPr wrap="square" lIns="144000" tIns="86400" rIns="144000" bIns="86400" rtlCol="0" anchor="ctr">
             <a:noAutofit/>
           </a:bodyPr>
           <a:lstStyle/>
@@ -6575,7 +6192,7 @@
           </a:p>
         </p:txBody>
       </p:sp>
-      <p:sp xmlns:a="http://schemas.openxmlformats.org/drawingml/2006/main">
+      <p:sp>
         <p:nvSpPr>
           <p:cNvPr id="96" name="fig2-c2-privbox"/>
           <p:cNvSpPr/>
@@ -6614,7 +6231,7 @@
           </a:fontRef>
         </p:style>
         <p:txBody>
-          <a:bodyPr rtlCol="0" anchor="ctr" wrap="square" lIns="72000" rIns="72000" tIns="43200" bIns="43200">
+          <a:bodyPr wrap="square" lIns="72000" tIns="43200" rIns="72000" bIns="43200" rtlCol="0" anchor="ctr">
             <a:noAutofit/>
           </a:bodyPr>
           <a:lstStyle/>
@@ -6630,10 +6247,11 @@
                 <a:spcPts val="0"/>
               </a:spcAft>
             </a:pPr>
-          </a:p>
-        </p:txBody>
-      </p:sp>
-      <p:sp xmlns:a="http://schemas.openxmlformats.org/drawingml/2006/main">
+            <a:endParaRPr/>
+          </a:p>
+        </p:txBody>
+      </p:sp>
+      <p:sp>
         <p:nvSpPr>
           <p:cNvPr id="97" name="fig2-c2-priv-1"/>
           <p:cNvSpPr/>
@@ -6672,14 +6290,15 @@
           </a:fontRef>
         </p:style>
         <p:txBody>
-          <a:bodyPr rtlCol="0" anchor="ctr" wrap="square"/>
+          <a:bodyPr wrap="square" rtlCol="0" anchor="ctr"/>
           <a:lstStyle/>
           <a:p>
             <a:pPr algn="ctr"/>
-          </a:p>
-        </p:txBody>
-      </p:sp>
-      <p:sp xmlns:a="http://schemas.openxmlformats.org/drawingml/2006/main">
+            <a:endParaRPr/>
+          </a:p>
+        </p:txBody>
+      </p:sp>
+      <p:sp>
         <p:nvSpPr>
           <p:cNvPr id="98" name="fig2-c2-priv-2"/>
           <p:cNvSpPr/>
@@ -6718,14 +6337,15 @@
           </a:fontRef>
         </p:style>
         <p:txBody>
-          <a:bodyPr rtlCol="0" anchor="ctr" wrap="square"/>
+          <a:bodyPr wrap="square" rtlCol="0" anchor="ctr"/>
           <a:lstStyle/>
           <a:p>
             <a:pPr algn="ctr"/>
-          </a:p>
-        </p:txBody>
-      </p:sp>
-      <p:sp xmlns:a="http://schemas.openxmlformats.org/drawingml/2006/main">
+            <a:endParaRPr/>
+          </a:p>
+        </p:txBody>
+      </p:sp>
+      <p:sp>
         <p:nvSpPr>
           <p:cNvPr id="99" name="fig2-c2-priv-3"/>
           <p:cNvSpPr/>
@@ -6764,14 +6384,15 @@
           </a:fontRef>
         </p:style>
         <p:txBody>
-          <a:bodyPr rtlCol="0" anchor="ctr" wrap="square"/>
+          <a:bodyPr wrap="square" rtlCol="0" anchor="ctr"/>
           <a:lstStyle/>
           <a:p>
             <a:pPr algn="ctr"/>
-          </a:p>
-        </p:txBody>
-      </p:sp>
-      <p:sp xmlns:a="http://schemas.openxmlformats.org/drawingml/2006/main">
+            <a:endParaRPr/>
+          </a:p>
+        </p:txBody>
+      </p:sp>
+      <p:sp>
         <p:nvSpPr>
           <p:cNvPr id="100" name="fig2-c2-priv-4"/>
           <p:cNvSpPr/>
@@ -6810,14 +6431,15 @@
           </a:fontRef>
         </p:style>
         <p:txBody>
-          <a:bodyPr rtlCol="0" anchor="ctr" wrap="square"/>
+          <a:bodyPr wrap="square" rtlCol="0" anchor="ctr"/>
           <a:lstStyle/>
           <a:p>
             <a:pPr algn="ctr"/>
-          </a:p>
-        </p:txBody>
-      </p:sp>
-      <p:sp xmlns:a="http://schemas.openxmlformats.org/drawingml/2006/main">
+            <a:endParaRPr/>
+          </a:p>
+        </p:txBody>
+      </p:sp>
+      <p:sp>
         <p:nvSpPr>
           <p:cNvPr id="101" name="fig2-c2-socbox"/>
           <p:cNvSpPr/>
@@ -6856,7 +6478,7 @@
           </a:fontRef>
         </p:style>
         <p:txBody>
-          <a:bodyPr rtlCol="0" anchor="ctr" wrap="square" lIns="72000" rIns="72000" tIns="43200" bIns="43200">
+          <a:bodyPr wrap="square" lIns="72000" tIns="43200" rIns="72000" bIns="43200" rtlCol="0" anchor="ctr">
             <a:noAutofit/>
           </a:bodyPr>
           <a:lstStyle/>
@@ -6872,10 +6494,11 @@
                 <a:spcPts val="0"/>
               </a:spcAft>
             </a:pPr>
-          </a:p>
-        </p:txBody>
-      </p:sp>
-      <p:sp xmlns:a="http://schemas.openxmlformats.org/drawingml/2006/main">
+            <a:endParaRPr/>
+          </a:p>
+        </p:txBody>
+      </p:sp>
+      <p:sp>
         <p:nvSpPr>
           <p:cNvPr id="102" name="fig2-c2-soc-1"/>
           <p:cNvSpPr/>
@@ -6914,14 +6537,15 @@
           </a:fontRef>
         </p:style>
         <p:txBody>
-          <a:bodyPr rtlCol="0" anchor="ctr" wrap="square"/>
+          <a:bodyPr wrap="square" rtlCol="0" anchor="ctr"/>
           <a:lstStyle/>
           <a:p>
             <a:pPr algn="ctr"/>
-          </a:p>
-        </p:txBody>
-      </p:sp>
-      <p:sp xmlns:a="http://schemas.openxmlformats.org/drawingml/2006/main">
+            <a:endParaRPr/>
+          </a:p>
+        </p:txBody>
+      </p:sp>
+      <p:sp>
         <p:nvSpPr>
           <p:cNvPr id="103" name="fig2-c2-soc-2"/>
           <p:cNvSpPr/>
@@ -6960,14 +6584,15 @@
           </a:fontRef>
         </p:style>
         <p:txBody>
-          <a:bodyPr rtlCol="0" anchor="ctr" wrap="square"/>
+          <a:bodyPr wrap="square" rtlCol="0" anchor="ctr"/>
           <a:lstStyle/>
           <a:p>
             <a:pPr algn="ctr"/>
-          </a:p>
-        </p:txBody>
-      </p:sp>
-      <p:sp xmlns:a="http://schemas.openxmlformats.org/drawingml/2006/main">
+            <a:endParaRPr/>
+          </a:p>
+        </p:txBody>
+      </p:sp>
+      <p:sp>
         <p:nvSpPr>
           <p:cNvPr id="104" name="fig2-c2-soc-3"/>
           <p:cNvSpPr/>
@@ -7006,14 +6631,15 @@
           </a:fontRef>
         </p:style>
         <p:txBody>
-          <a:bodyPr rtlCol="0" anchor="ctr" wrap="square"/>
+          <a:bodyPr wrap="square" rtlCol="0" anchor="ctr"/>
           <a:lstStyle/>
           <a:p>
             <a:pPr algn="ctr"/>
-          </a:p>
-        </p:txBody>
-      </p:sp>
-      <p:sp xmlns:a="http://schemas.openxmlformats.org/drawingml/2006/main">
+            <a:endParaRPr/>
+          </a:p>
+        </p:txBody>
+      </p:sp>
+      <p:sp>
         <p:nvSpPr>
           <p:cNvPr id="105" name="fig2-c2-soc-4"/>
           <p:cNvSpPr/>
@@ -7052,14 +6678,15 @@
           </a:fontRef>
         </p:style>
         <p:txBody>
-          <a:bodyPr rtlCol="0" anchor="ctr" wrap="square"/>
+          <a:bodyPr wrap="square" rtlCol="0" anchor="ctr"/>
           <a:lstStyle/>
           <a:p>
             <a:pPr algn="ctr"/>
-          </a:p>
-        </p:txBody>
-      </p:sp>
-      <p:sp xmlns:a="http://schemas.openxmlformats.org/drawingml/2006/main">
+            <a:endParaRPr/>
+          </a:p>
+        </p:txBody>
+      </p:sp>
+      <p:sp>
         <p:nvSpPr>
           <p:cNvPr id="106" name="fig2-c2-conf"/>
           <p:cNvSpPr/>
@@ -7098,7 +6725,7 @@
           </a:fontRef>
         </p:style>
         <p:txBody>
-          <a:bodyPr rtlCol="0" anchor="ctr" wrap="square" lIns="198000" rIns="198000" tIns="118800" bIns="118800">
+          <a:bodyPr wrap="square" lIns="198000" tIns="118800" rIns="198000" bIns="118800" rtlCol="0" anchor="ctr">
             <a:noAutofit/>
           </a:bodyPr>
           <a:lstStyle/>
@@ -7126,7 +6753,7 @@
           </a:p>
         </p:txBody>
       </p:sp>
-      <p:sp xmlns:a="http://schemas.openxmlformats.org/drawingml/2006/main">
+      <p:sp>
         <p:nvSpPr>
           <p:cNvPr id="107" name="fig2-c3-name"/>
           <p:cNvSpPr/>
@@ -7165,7 +6792,7 @@
           </a:fontRef>
         </p:style>
         <p:txBody>
-          <a:bodyPr rtlCol="0" anchor="ctr" wrap="square" lIns="144000" rIns="144000" tIns="86400" bIns="86400">
+          <a:bodyPr wrap="square" lIns="144000" tIns="86400" rIns="144000" bIns="86400" rtlCol="0" anchor="ctr">
             <a:noAutofit/>
           </a:bodyPr>
           <a:lstStyle/>
@@ -7193,7 +6820,7 @@
           </a:p>
         </p:txBody>
       </p:sp>
-      <p:sp xmlns:a="http://schemas.openxmlformats.org/drawingml/2006/main">
+      <p:sp>
         <p:nvSpPr>
           <p:cNvPr id="108" name="fig2-c3-privbox"/>
           <p:cNvSpPr/>
@@ -7232,7 +6859,7 @@
           </a:fontRef>
         </p:style>
         <p:txBody>
-          <a:bodyPr rtlCol="0" anchor="ctr" wrap="square" lIns="72000" rIns="72000" tIns="43200" bIns="43200">
+          <a:bodyPr wrap="square" lIns="72000" tIns="43200" rIns="72000" bIns="43200" rtlCol="0" anchor="ctr">
             <a:noAutofit/>
           </a:bodyPr>
           <a:lstStyle/>
@@ -7248,10 +6875,11 @@
                 <a:spcPts val="0"/>
               </a:spcAft>
             </a:pPr>
-          </a:p>
-        </p:txBody>
-      </p:sp>
-      <p:sp xmlns:a="http://schemas.openxmlformats.org/drawingml/2006/main">
+            <a:endParaRPr/>
+          </a:p>
+        </p:txBody>
+      </p:sp>
+      <p:sp>
         <p:nvSpPr>
           <p:cNvPr id="109" name="fig2-c3-priv-1"/>
           <p:cNvSpPr/>
@@ -7290,14 +6918,15 @@
           </a:fontRef>
         </p:style>
         <p:txBody>
-          <a:bodyPr rtlCol="0" anchor="ctr" wrap="square"/>
+          <a:bodyPr wrap="square" rtlCol="0" anchor="ctr"/>
           <a:lstStyle/>
           <a:p>
             <a:pPr algn="ctr"/>
-          </a:p>
-        </p:txBody>
-      </p:sp>
-      <p:sp xmlns:a="http://schemas.openxmlformats.org/drawingml/2006/main">
+            <a:endParaRPr/>
+          </a:p>
+        </p:txBody>
+      </p:sp>
+      <p:sp>
         <p:nvSpPr>
           <p:cNvPr id="110" name="fig2-c3-priv-2"/>
           <p:cNvSpPr/>
@@ -7336,14 +6965,15 @@
           </a:fontRef>
         </p:style>
         <p:txBody>
-          <a:bodyPr rtlCol="0" anchor="ctr" wrap="square"/>
+          <a:bodyPr wrap="square" rtlCol="0" anchor="ctr"/>
           <a:lstStyle/>
           <a:p>
             <a:pPr algn="ctr"/>
-          </a:p>
-        </p:txBody>
-      </p:sp>
-      <p:sp xmlns:a="http://schemas.openxmlformats.org/drawingml/2006/main">
+            <a:endParaRPr/>
+          </a:p>
+        </p:txBody>
+      </p:sp>
+      <p:sp>
         <p:nvSpPr>
           <p:cNvPr id="111" name="fig2-c3-priv-3"/>
           <p:cNvSpPr/>
@@ -7382,14 +7012,15 @@
           </a:fontRef>
         </p:style>
         <p:txBody>
-          <a:bodyPr rtlCol="0" anchor="ctr" wrap="square"/>
+          <a:bodyPr wrap="square" rtlCol="0" anchor="ctr"/>
           <a:lstStyle/>
           <a:p>
             <a:pPr algn="ctr"/>
-          </a:p>
-        </p:txBody>
-      </p:sp>
-      <p:sp xmlns:a="http://schemas.openxmlformats.org/drawingml/2006/main">
+            <a:endParaRPr/>
+          </a:p>
+        </p:txBody>
+      </p:sp>
+      <p:sp>
         <p:nvSpPr>
           <p:cNvPr id="112" name="fig2-c3-priv-4"/>
           <p:cNvSpPr/>
@@ -7428,14 +7059,15 @@
           </a:fontRef>
         </p:style>
         <p:txBody>
-          <a:bodyPr rtlCol="0" anchor="ctr" wrap="square"/>
+          <a:bodyPr wrap="square" rtlCol="0" anchor="ctr"/>
           <a:lstStyle/>
           <a:p>
             <a:pPr algn="ctr"/>
-          </a:p>
-        </p:txBody>
-      </p:sp>
-      <p:sp xmlns:a="http://schemas.openxmlformats.org/drawingml/2006/main">
+            <a:endParaRPr/>
+          </a:p>
+        </p:txBody>
+      </p:sp>
+      <p:sp>
         <p:nvSpPr>
           <p:cNvPr id="113" name="fig2-c3-socbox"/>
           <p:cNvSpPr/>
@@ -7474,7 +7106,7 @@
           </a:fontRef>
         </p:style>
         <p:txBody>
-          <a:bodyPr rtlCol="0" anchor="ctr" wrap="square" lIns="72000" rIns="72000" tIns="43200" bIns="43200">
+          <a:bodyPr wrap="square" lIns="72000" tIns="43200" rIns="72000" bIns="43200" rtlCol="0" anchor="ctr">
             <a:noAutofit/>
           </a:bodyPr>
           <a:lstStyle/>
@@ -7490,10 +7122,11 @@
                 <a:spcPts val="0"/>
               </a:spcAft>
             </a:pPr>
-          </a:p>
-        </p:txBody>
-      </p:sp>
-      <p:sp xmlns:a="http://schemas.openxmlformats.org/drawingml/2006/main">
+            <a:endParaRPr/>
+          </a:p>
+        </p:txBody>
+      </p:sp>
+      <p:sp>
         <p:nvSpPr>
           <p:cNvPr id="114" name="fig2-c3-soc-1"/>
           <p:cNvSpPr/>
@@ -7532,14 +7165,15 @@
           </a:fontRef>
         </p:style>
         <p:txBody>
-          <a:bodyPr rtlCol="0" anchor="ctr" wrap="square"/>
+          <a:bodyPr wrap="square" rtlCol="0" anchor="ctr"/>
           <a:lstStyle/>
           <a:p>
             <a:pPr algn="ctr"/>
-          </a:p>
-        </p:txBody>
-      </p:sp>
-      <p:sp xmlns:a="http://schemas.openxmlformats.org/drawingml/2006/main">
+            <a:endParaRPr/>
+          </a:p>
+        </p:txBody>
+      </p:sp>
+      <p:sp>
         <p:nvSpPr>
           <p:cNvPr id="115" name="fig2-c3-soc-2"/>
           <p:cNvSpPr/>
@@ -7578,14 +7212,15 @@
           </a:fontRef>
         </p:style>
         <p:txBody>
-          <a:bodyPr rtlCol="0" anchor="ctr" wrap="square"/>
+          <a:bodyPr wrap="square" rtlCol="0" anchor="ctr"/>
           <a:lstStyle/>
           <a:p>
             <a:pPr algn="ctr"/>
-          </a:p>
-        </p:txBody>
-      </p:sp>
-      <p:sp xmlns:a="http://schemas.openxmlformats.org/drawingml/2006/main">
+            <a:endParaRPr/>
+          </a:p>
+        </p:txBody>
+      </p:sp>
+      <p:sp>
         <p:nvSpPr>
           <p:cNvPr id="116" name="fig2-c3-soc-3"/>
           <p:cNvSpPr/>
@@ -7624,14 +7259,15 @@
           </a:fontRef>
         </p:style>
         <p:txBody>
-          <a:bodyPr rtlCol="0" anchor="ctr" wrap="square"/>
+          <a:bodyPr wrap="square" rtlCol="0" anchor="ctr"/>
           <a:lstStyle/>
           <a:p>
             <a:pPr algn="ctr"/>
-          </a:p>
-        </p:txBody>
-      </p:sp>
-      <p:sp xmlns:a="http://schemas.openxmlformats.org/drawingml/2006/main">
+            <a:endParaRPr/>
+          </a:p>
+        </p:txBody>
+      </p:sp>
+      <p:sp>
         <p:nvSpPr>
           <p:cNvPr id="117" name="fig2-c3-soc-4"/>
           <p:cNvSpPr/>
@@ -7670,14 +7306,15 @@
           </a:fontRef>
         </p:style>
         <p:txBody>
-          <a:bodyPr rtlCol="0" anchor="ctr" wrap="square"/>
+          <a:bodyPr wrap="square" rtlCol="0" anchor="ctr"/>
           <a:lstStyle/>
           <a:p>
             <a:pPr algn="ctr"/>
-          </a:p>
-        </p:txBody>
-      </p:sp>
-      <p:sp xmlns:a="http://schemas.openxmlformats.org/drawingml/2006/main">
+            <a:endParaRPr/>
+          </a:p>
+        </p:txBody>
+      </p:sp>
+      <p:sp>
         <p:nvSpPr>
           <p:cNvPr id="118" name="fig2-c3-conf"/>
           <p:cNvSpPr/>
@@ -7716,7 +7353,7 @@
           </a:fontRef>
         </p:style>
         <p:txBody>
-          <a:bodyPr rtlCol="0" anchor="ctr" wrap="square" lIns="198000" rIns="198000" tIns="118800" bIns="118800">
+          <a:bodyPr wrap="square" lIns="198000" tIns="118800" rIns="198000" bIns="118800" rtlCol="0" anchor="ctr">
             <a:noAutofit/>
           </a:bodyPr>
           <a:lstStyle/>
@@ -7744,7 +7381,7 @@
           </a:p>
         </p:txBody>
       </p:sp>
-      <p:sp xmlns:a="http://schemas.openxmlformats.org/drawingml/2006/main">
+      <p:sp>
         <p:nvSpPr>
           <p:cNvPr id="119" name="fig2-legend"/>
           <p:cNvSpPr txBox="1"/>
@@ -7765,7 +7402,7 @@
             <a:noAutofit/>
           </a:bodyPr>
           <a:lstStyle/>
-          <a:p xmlns:a="http://schemas.openxmlformats.org/drawingml/2006/main">
+          <a:p>
             <a:pPr algn="l">
               <a:lnSpc>
                 <a:spcPct val="100000"/>
@@ -7789,7 +7426,7 @@
           </a:p>
         </p:txBody>
       </p:sp>
-      <p:sp xmlns:a="http://schemas.openxmlformats.org/drawingml/2006/main">
+      <p:sp>
         <p:nvSpPr>
           <p:cNvPr id="120" name="fig2-ms-title"/>
           <p:cNvSpPr txBox="1"/>
@@ -7834,7 +7471,7 @@
           </a:p>
         </p:txBody>
       </p:sp>
-      <p:sp xmlns:a="http://schemas.openxmlformats.org/drawingml/2006/main">
+      <p:sp>
         <p:nvSpPr>
           <p:cNvPr id="121" name="fig2-mshdr-0"/>
           <p:cNvSpPr/>
@@ -7871,7 +7508,7 @@
           </a:fontRef>
         </p:style>
         <p:txBody>
-          <a:bodyPr rtlCol="0" anchor="ctr" wrap="square" lIns="72000" rIns="72000" tIns="43200" bIns="43200">
+          <a:bodyPr wrap="square" lIns="72000" tIns="43200" rIns="72000" bIns="43200" rtlCol="0" anchor="ctr">
             <a:noAutofit/>
           </a:bodyPr>
           <a:lstStyle/>
@@ -7899,7 +7536,7 @@
           </a:p>
         </p:txBody>
       </p:sp>
-      <p:sp xmlns:a="http://schemas.openxmlformats.org/drawingml/2006/main">
+      <p:sp>
         <p:nvSpPr>
           <p:cNvPr id="122" name="fig2-mshdr-1"/>
           <p:cNvSpPr/>
@@ -7936,7 +7573,7 @@
           </a:fontRef>
         </p:style>
         <p:txBody>
-          <a:bodyPr rtlCol="0" anchor="ctr" wrap="square" lIns="72000" rIns="72000" tIns="43200" bIns="43200">
+          <a:bodyPr wrap="square" lIns="72000" tIns="43200" rIns="72000" bIns="43200" rtlCol="0" anchor="ctr">
             <a:noAutofit/>
           </a:bodyPr>
           <a:lstStyle/>
@@ -7964,7 +7601,7 @@
           </a:p>
         </p:txBody>
       </p:sp>
-      <p:sp xmlns:a="http://schemas.openxmlformats.org/drawingml/2006/main">
+      <p:sp>
         <p:nvSpPr>
           <p:cNvPr id="123" name="fig2-mshdr-2"/>
           <p:cNvSpPr/>
@@ -8001,7 +7638,7 @@
           </a:fontRef>
         </p:style>
         <p:txBody>
-          <a:bodyPr rtlCol="0" anchor="ctr" wrap="square" lIns="162000" rIns="162000" tIns="97200" bIns="97200">
+          <a:bodyPr wrap="square" lIns="162000" tIns="97200" rIns="162000" bIns="97200" rtlCol="0" anchor="ctr">
             <a:noAutofit/>
           </a:bodyPr>
           <a:lstStyle/>
@@ -8029,7 +7666,7 @@
           </a:p>
         </p:txBody>
       </p:sp>
-      <p:sp xmlns:a="http://schemas.openxmlformats.org/drawingml/2006/main">
+      <p:sp>
         <p:nvSpPr>
           <p:cNvPr id="124" name="fig2-mshdr-3"/>
           <p:cNvSpPr/>
@@ -8066,7 +7703,7 @@
           </a:fontRef>
         </p:style>
         <p:txBody>
-          <a:bodyPr rtlCol="0" anchor="ctr" wrap="square" lIns="72000" rIns="72000" tIns="43200" bIns="43200">
+          <a:bodyPr wrap="square" lIns="72000" tIns="43200" rIns="72000" bIns="43200" rtlCol="0" anchor="ctr">
             <a:noAutofit/>
           </a:bodyPr>
           <a:lstStyle/>
@@ -8094,7 +7731,7 @@
           </a:p>
         </p:txBody>
       </p:sp>
-      <p:sp xmlns:a="http://schemas.openxmlformats.org/drawingml/2006/main">
+      <p:sp>
         <p:nvSpPr>
           <p:cNvPr id="125" name="fig2-ms0-0"/>
           <p:cNvSpPr/>
@@ -8133,11 +7770,11 @@
           </a:fontRef>
         </p:style>
         <p:txBody>
-          <a:bodyPr rtlCol="0" anchor="ctr" wrap="square" lIns="108000" rIns="108000" tIns="64800" bIns="64800">
+          <a:bodyPr wrap="square" lIns="108000" tIns="64800" rIns="108000" bIns="64800" rtlCol="0" anchor="ctr">
             <a:noAutofit/>
           </a:bodyPr>
           <a:lstStyle/>
-          <a:p xmlns:a="http://schemas.openxmlformats.org/drawingml/2006/main">
+          <a:p>
             <a:pPr algn="ctr">
               <a:lnSpc>
                 <a:spcPct val="100000"/>
@@ -8161,7 +7798,7 @@
           </a:p>
         </p:txBody>
       </p:sp>
-      <p:sp xmlns:a="http://schemas.openxmlformats.org/drawingml/2006/main">
+      <p:sp>
         <p:nvSpPr>
           <p:cNvPr id="126" name="fig2-ms0-1"/>
           <p:cNvSpPr/>
@@ -8200,11 +7837,11 @@
           </a:fontRef>
         </p:style>
         <p:txBody>
-          <a:bodyPr rtlCol="0" anchor="ctr" wrap="square" lIns="108000" rIns="108000" tIns="64800" bIns="64800">
+          <a:bodyPr wrap="square" lIns="108000" tIns="64800" rIns="108000" bIns="64800" rtlCol="0" anchor="ctr">
             <a:noAutofit/>
           </a:bodyPr>
           <a:lstStyle/>
-          <a:p xmlns:a="http://schemas.openxmlformats.org/drawingml/2006/main">
+          <a:p>
             <a:pPr algn="ctr">
               <a:lnSpc>
                 <a:spcPct val="100000"/>
@@ -8228,7 +7865,7 @@
           </a:p>
         </p:txBody>
       </p:sp>
-      <p:sp xmlns:a="http://schemas.openxmlformats.org/drawingml/2006/main">
+      <p:sp>
         <p:nvSpPr>
           <p:cNvPr id="127" name="fig2-ms0-2"/>
           <p:cNvSpPr/>
@@ -8267,11 +7904,11 @@
           </a:fontRef>
         </p:style>
         <p:txBody>
-          <a:bodyPr rtlCol="0" anchor="ctr" wrap="square" lIns="162000" rIns="162000" tIns="97200" bIns="97200">
+          <a:bodyPr wrap="square" lIns="162000" tIns="97200" rIns="162000" bIns="97200" rtlCol="0" anchor="ctr">
             <a:noAutofit/>
           </a:bodyPr>
           <a:lstStyle/>
-          <a:p xmlns:a="http://schemas.openxmlformats.org/drawingml/2006/main">
+          <a:p>
             <a:pPr algn="l">
               <a:lnSpc>
                 <a:spcPct val="100000"/>
@@ -8295,7 +7932,7 @@
           </a:p>
         </p:txBody>
       </p:sp>
-      <p:sp xmlns:a="http://schemas.openxmlformats.org/drawingml/2006/main">
+      <p:sp>
         <p:nvSpPr>
           <p:cNvPr id="128" name="fig2-ms0-3"/>
           <p:cNvSpPr/>
@@ -8334,11 +7971,11 @@
           </a:fontRef>
         </p:style>
         <p:txBody>
-          <a:bodyPr rtlCol="0" anchor="ctr" wrap="square" lIns="108000" rIns="108000" tIns="64800" bIns="64800">
+          <a:bodyPr wrap="square" lIns="108000" tIns="64800" rIns="108000" bIns="64800" rtlCol="0" anchor="ctr">
             <a:noAutofit/>
           </a:bodyPr>
           <a:lstStyle/>
-          <a:p xmlns:a="http://schemas.openxmlformats.org/drawingml/2006/main">
+          <a:p>
             <a:pPr algn="ctr">
               <a:lnSpc>
                 <a:spcPct val="100000"/>
@@ -8362,7 +7999,7 @@
           </a:p>
         </p:txBody>
       </p:sp>
-      <p:sp xmlns:a="http://schemas.openxmlformats.org/drawingml/2006/main">
+      <p:sp>
         <p:nvSpPr>
           <p:cNvPr id="129" name="fig2-ms1-0"/>
           <p:cNvSpPr/>
@@ -8401,11 +8038,11 @@
           </a:fontRef>
         </p:style>
         <p:txBody>
-          <a:bodyPr rtlCol="0" anchor="ctr" wrap="square" lIns="108000" rIns="108000" tIns="64800" bIns="64800">
+          <a:bodyPr wrap="square" lIns="108000" tIns="64800" rIns="108000" bIns="64800" rtlCol="0" anchor="ctr">
             <a:noAutofit/>
           </a:bodyPr>
           <a:lstStyle/>
-          <a:p xmlns:a="http://schemas.openxmlformats.org/drawingml/2006/main">
+          <a:p>
             <a:pPr algn="ctr">
               <a:lnSpc>
                 <a:spcPct val="100000"/>
@@ -8429,7 +8066,7 @@
           </a:p>
         </p:txBody>
       </p:sp>
-      <p:sp xmlns:a="http://schemas.openxmlformats.org/drawingml/2006/main">
+      <p:sp>
         <p:nvSpPr>
           <p:cNvPr id="130" name="fig2-ms1-1"/>
           <p:cNvSpPr/>
@@ -8468,11 +8105,11 @@
           </a:fontRef>
         </p:style>
         <p:txBody>
-          <a:bodyPr rtlCol="0" anchor="ctr" wrap="square" lIns="108000" rIns="108000" tIns="64800" bIns="64800">
+          <a:bodyPr wrap="square" lIns="108000" tIns="64800" rIns="108000" bIns="64800" rtlCol="0" anchor="ctr">
             <a:noAutofit/>
           </a:bodyPr>
           <a:lstStyle/>
-          <a:p xmlns:a="http://schemas.openxmlformats.org/drawingml/2006/main">
+          <a:p>
             <a:pPr algn="ctr">
               <a:lnSpc>
                 <a:spcPct val="100000"/>
@@ -8496,7 +8133,7 @@
           </a:p>
         </p:txBody>
       </p:sp>
-      <p:sp xmlns:a="http://schemas.openxmlformats.org/drawingml/2006/main">
+      <p:sp>
         <p:nvSpPr>
           <p:cNvPr id="131" name="fig2-ms1-2"/>
           <p:cNvSpPr/>
@@ -8535,11 +8172,11 @@
           </a:fontRef>
         </p:style>
         <p:txBody>
-          <a:bodyPr rtlCol="0" anchor="ctr" wrap="square" lIns="162000" rIns="162000" tIns="97200" bIns="97200">
+          <a:bodyPr wrap="square" lIns="162000" tIns="97200" rIns="162000" bIns="97200" rtlCol="0" anchor="ctr">
             <a:noAutofit/>
           </a:bodyPr>
           <a:lstStyle/>
-          <a:p xmlns:a="http://schemas.openxmlformats.org/drawingml/2006/main">
+          <a:p>
             <a:pPr algn="l">
               <a:lnSpc>
                 <a:spcPct val="100000"/>
@@ -8563,7 +8200,7 @@
           </a:p>
         </p:txBody>
       </p:sp>
-      <p:sp xmlns:a="http://schemas.openxmlformats.org/drawingml/2006/main">
+      <p:sp>
         <p:nvSpPr>
           <p:cNvPr id="132" name="fig2-ms1-3"/>
           <p:cNvSpPr/>
@@ -8602,11 +8239,11 @@
           </a:fontRef>
         </p:style>
         <p:txBody>
-          <a:bodyPr rtlCol="0" anchor="ctr" wrap="square" lIns="108000" rIns="108000" tIns="64800" bIns="64800">
+          <a:bodyPr wrap="square" lIns="108000" tIns="64800" rIns="108000" bIns="64800" rtlCol="0" anchor="ctr">
             <a:noAutofit/>
           </a:bodyPr>
           <a:lstStyle/>
-          <a:p xmlns:a="http://schemas.openxmlformats.org/drawingml/2006/main">
+          <a:p>
             <a:pPr algn="ctr">
               <a:lnSpc>
                 <a:spcPct val="100000"/>
@@ -8630,7 +8267,7 @@
           </a:p>
         </p:txBody>
       </p:sp>
-      <p:sp xmlns:a="http://schemas.openxmlformats.org/drawingml/2006/main">
+      <p:sp>
         <p:nvSpPr>
           <p:cNvPr id="133" name="fig2-ms2-0"/>
           <p:cNvSpPr/>
@@ -8669,11 +8306,11 @@
           </a:fontRef>
         </p:style>
         <p:txBody>
-          <a:bodyPr rtlCol="0" anchor="ctr" wrap="square" lIns="108000" rIns="108000" tIns="64800" bIns="64800">
+          <a:bodyPr wrap="square" lIns="108000" tIns="64800" rIns="108000" bIns="64800" rtlCol="0" anchor="ctr">
             <a:noAutofit/>
           </a:bodyPr>
           <a:lstStyle/>
-          <a:p xmlns:a="http://schemas.openxmlformats.org/drawingml/2006/main">
+          <a:p>
             <a:pPr algn="ctr">
               <a:lnSpc>
                 <a:spcPct val="100000"/>
@@ -8697,7 +8334,7 @@
           </a:p>
         </p:txBody>
       </p:sp>
-      <p:sp xmlns:a="http://schemas.openxmlformats.org/drawingml/2006/main">
+      <p:sp>
         <p:nvSpPr>
           <p:cNvPr id="134" name="fig2-ms2-1"/>
           <p:cNvSpPr/>
@@ -8736,11 +8373,11 @@
           </a:fontRef>
         </p:style>
         <p:txBody>
-          <a:bodyPr rtlCol="0" anchor="ctr" wrap="square" lIns="108000" rIns="108000" tIns="64800" bIns="64800">
+          <a:bodyPr wrap="square" lIns="108000" tIns="64800" rIns="108000" bIns="64800" rtlCol="0" anchor="ctr">
             <a:noAutofit/>
           </a:bodyPr>
           <a:lstStyle/>
-          <a:p xmlns:a="http://schemas.openxmlformats.org/drawingml/2006/main">
+          <a:p>
             <a:pPr algn="ctr">
               <a:lnSpc>
                 <a:spcPct val="100000"/>
@@ -8764,7 +8401,7 @@
           </a:p>
         </p:txBody>
       </p:sp>
-      <p:sp xmlns:a="http://schemas.openxmlformats.org/drawingml/2006/main">
+      <p:sp>
         <p:nvSpPr>
           <p:cNvPr id="135" name="fig2-ms2-2"/>
           <p:cNvSpPr/>
@@ -8803,11 +8440,11 @@
           </a:fontRef>
         </p:style>
         <p:txBody>
-          <a:bodyPr rtlCol="0" anchor="ctr" wrap="square" lIns="162000" rIns="162000" tIns="97200" bIns="97200">
+          <a:bodyPr wrap="square" lIns="162000" tIns="97200" rIns="162000" bIns="97200" rtlCol="0" anchor="ctr">
             <a:noAutofit/>
           </a:bodyPr>
           <a:lstStyle/>
-          <a:p xmlns:a="http://schemas.openxmlformats.org/drawingml/2006/main">
+          <a:p>
             <a:pPr algn="l">
               <a:lnSpc>
                 <a:spcPct val="100000"/>
@@ -8831,7 +8468,7 @@
           </a:p>
         </p:txBody>
       </p:sp>
-      <p:sp xmlns:a="http://schemas.openxmlformats.org/drawingml/2006/main">
+      <p:sp>
         <p:nvSpPr>
           <p:cNvPr id="136" name="fig2-ms2-3"/>
           <p:cNvSpPr/>
@@ -8870,11 +8507,11 @@
           </a:fontRef>
         </p:style>
         <p:txBody>
-          <a:bodyPr rtlCol="0" anchor="ctr" wrap="square" lIns="108000" rIns="108000" tIns="64800" bIns="64800">
+          <a:bodyPr wrap="square" lIns="108000" tIns="64800" rIns="108000" bIns="64800" rtlCol="0" anchor="ctr">
             <a:noAutofit/>
           </a:bodyPr>
           <a:lstStyle/>
-          <a:p xmlns:a="http://schemas.openxmlformats.org/drawingml/2006/main">
+          <a:p>
             <a:pPr algn="ctr">
               <a:lnSpc>
                 <a:spcPct val="100000"/>
@@ -8898,7 +8535,7 @@
           </a:p>
         </p:txBody>
       </p:sp>
-      <p:pic xmlns:a="http://schemas.openxmlformats.org/drawingml/2006/main" xmlns:r="http://schemas.openxmlformats.org/officeDocument/2006/relationships">
+      <p:pic>
         <p:nvPicPr>
           <p:cNvPr id="137" name="qr-hf" descr="qr_hf.png"/>
           <p:cNvPicPr>
@@ -8922,7 +8559,7 @@
           </a:prstGeom>
         </p:spPr>
       </p:pic>
-      <p:pic xmlns:a="http://schemas.openxmlformats.org/drawingml/2006/main" xmlns:r="http://schemas.openxmlformats.org/officeDocument/2006/relationships">
+      <p:pic>
         <p:nvPicPr>
           <p:cNvPr id="138" name="qr-github" descr="qr_github.png"/>
           <p:cNvPicPr>
@@ -8952,18 +8589,36 @@
           <p:cNvGraphicFramePr/>
           <p:nvPr/>
         </p:nvGraphicFramePr>
-        <p:xfrm xmlns:a="http://schemas.openxmlformats.org/drawingml/2006/main">
+        <p:xfrm>
           <a:off x="1333500" y="26873200"/>
-          <a:ext cx="11049000" cy="793750"/>
+          <a:ext cx="11049000" cy="960120"/>
         </p:xfrm>
-        <a:graphic xmlns:a="http://schemas.openxmlformats.org/drawingml/2006/main">
+        <a:graphic>
           <a:graphicData uri="http://schemas.openxmlformats.org/drawingml/2006/table">
             <a:tbl>
               <a:tblPr firstRow="1" bandRow="1"/>
               <a:tblGrid>
-                <a:gridCol w="3600000"/>
-                <a:gridCol w="3724500"/>
-                <a:gridCol w="3724500"/>
+                <a:gridCol w="3600000">
+                  <a:extLst>
+                    <a:ext uri="{9D8B030D-6E8A-4147-A177-3AD203B41FA5}">
+                      <a16:colId xmlns:a16="http://schemas.microsoft.com/office/drawing/2014/main" val="20000"/>
+                    </a:ext>
+                  </a:extLst>
+                </a:gridCol>
+                <a:gridCol w="3724500">
+                  <a:extLst>
+                    <a:ext uri="{9D8B030D-6E8A-4147-A177-3AD203B41FA5}">
+                      <a16:colId xmlns:a16="http://schemas.microsoft.com/office/drawing/2014/main" val="20001"/>
+                    </a:ext>
+                  </a:extLst>
+                </a:gridCol>
+                <a:gridCol w="3724500">
+                  <a:extLst>
+                    <a:ext uri="{9D8B030D-6E8A-4147-A177-3AD203B41FA5}">
+                      <a16:colId xmlns:a16="http://schemas.microsoft.com/office/drawing/2014/main" val="20002"/>
+                    </a:ext>
+                  </a:extLst>
+                </a:gridCol>
               </a:tblGrid>
               <a:tr h="158750">
                 <a:tc>
@@ -8983,7 +8638,7 @@
                       </a:r>
                     </a:p>
                   </a:txBody>
-                  <a:tcPr marT="0" marB="0" marL="45720" marR="45720">
+                  <a:tcPr marL="45720" marR="45720" marT="0" marB="0">
                     <a:lnL w="9525" cap="flat" cmpd="sng" algn="ctr">
                       <a:solidFill>
                         <a:srgbClr val="D4DCE7"/>
@@ -9026,7 +8681,7 @@
                       </a:r>
                     </a:p>
                   </a:txBody>
-                  <a:tcPr marT="0" marB="0" marL="45720" marR="45720">
+                  <a:tcPr marL="45720" marR="45720" marT="0" marB="0">
                     <a:lnL w="9525" cap="flat" cmpd="sng" algn="ctr">
                       <a:solidFill>
                         <a:srgbClr val="D4DCE7"/>
@@ -9069,7 +8724,7 @@
                       </a:r>
                     </a:p>
                   </a:txBody>
-                  <a:tcPr marT="0" marB="0" marL="45720" marR="45720">
+                  <a:tcPr marL="45720" marR="45720" marT="0" marB="0">
                     <a:lnL w="9525" cap="flat" cmpd="sng" algn="ctr">
                       <a:solidFill>
                         <a:srgbClr val="D4DCE7"/>
@@ -9095,6 +8750,11 @@
                     </a:solidFill>
                   </a:tcPr>
                 </a:tc>
+                <a:extLst>
+                  <a:ext uri="{0D108BD9-81ED-4DB2-BD59-A6C34878D82A}">
+                    <a16:rowId xmlns:a16="http://schemas.microsoft.com/office/drawing/2014/main" val="10000"/>
+                  </a:ext>
+                </a:extLst>
               </a:tr>
               <a:tr h="158750">
                 <a:tc>
@@ -9114,7 +8774,7 @@
                       </a:r>
                     </a:p>
                   </a:txBody>
-                  <a:tcPr marT="0" marB="0" marL="45720" marR="45720">
+                  <a:tcPr marL="45720" marR="45720" marT="0" marB="0">
                     <a:lnL w="9525" cap="flat" cmpd="sng" algn="ctr">
                       <a:solidFill>
                         <a:srgbClr val="D4DCE7"/>
@@ -9157,7 +8817,7 @@
                       </a:r>
                     </a:p>
                   </a:txBody>
-                  <a:tcPr marT="0" marB="0" marL="45720" marR="45720">
+                  <a:tcPr marL="45720" marR="45720" marT="0" marB="0">
                     <a:lnL w="9525" cap="flat" cmpd="sng" algn="ctr">
                       <a:solidFill>
                         <a:srgbClr val="D4DCE7"/>
@@ -9200,7 +8860,7 @@
                       </a:r>
                     </a:p>
                   </a:txBody>
-                  <a:tcPr marT="0" marB="0" marL="45720" marR="45720">
+                  <a:tcPr marL="45720" marR="45720" marT="0" marB="0">
                     <a:lnL w="9525" cap="flat" cmpd="sng" algn="ctr">
                       <a:solidFill>
                         <a:srgbClr val="D4DCE7"/>
@@ -9226,6 +8886,11 @@
                     </a:solidFill>
                   </a:tcPr>
                 </a:tc>
+                <a:extLst>
+                  <a:ext uri="{0D108BD9-81ED-4DB2-BD59-A6C34878D82A}">
+                    <a16:rowId xmlns:a16="http://schemas.microsoft.com/office/drawing/2014/main" val="10001"/>
+                  </a:ext>
+                </a:extLst>
               </a:tr>
               <a:tr h="158750">
                 <a:tc>
@@ -9245,7 +8910,7 @@
                       </a:r>
                     </a:p>
                   </a:txBody>
-                  <a:tcPr marT="0" marB="0" marL="45720" marR="45720">
+                  <a:tcPr marL="45720" marR="45720" marT="0" marB="0">
                     <a:lnL w="9525" cap="flat" cmpd="sng" algn="ctr">
                       <a:solidFill>
                         <a:srgbClr val="D4DCE7"/>
@@ -9288,7 +8953,7 @@
                       </a:r>
                     </a:p>
                   </a:txBody>
-                  <a:tcPr marT="0" marB="0" marL="45720" marR="45720">
+                  <a:tcPr marL="45720" marR="45720" marT="0" marB="0">
                     <a:lnL w="9525" cap="flat" cmpd="sng" algn="ctr">
                       <a:solidFill>
                         <a:srgbClr val="D4DCE7"/>
@@ -9331,7 +8996,7 @@
                       </a:r>
                     </a:p>
                   </a:txBody>
-                  <a:tcPr marT="0" marB="0" marL="45720" marR="45720">
+                  <a:tcPr marL="45720" marR="45720" marT="0" marB="0">
                     <a:lnL w="9525" cap="flat" cmpd="sng" algn="ctr">
                       <a:solidFill>
                         <a:srgbClr val="D4DCE7"/>
@@ -9357,6 +9022,11 @@
                     </a:solidFill>
                   </a:tcPr>
                 </a:tc>
+                <a:extLst>
+                  <a:ext uri="{0D108BD9-81ED-4DB2-BD59-A6C34878D82A}">
+                    <a16:rowId xmlns:a16="http://schemas.microsoft.com/office/drawing/2014/main" val="10002"/>
+                  </a:ext>
+                </a:extLst>
               </a:tr>
               <a:tr h="158750">
                 <a:tc>
@@ -9376,7 +9046,7 @@
                       </a:r>
                     </a:p>
                   </a:txBody>
-                  <a:tcPr marT="0" marB="0" marL="45720" marR="45720">
+                  <a:tcPr marL="45720" marR="45720" marT="0" marB="0">
                     <a:lnL w="9525" cap="flat" cmpd="sng" algn="ctr">
                       <a:solidFill>
                         <a:srgbClr val="D4DCE7"/>
@@ -9419,7 +9089,7 @@
                       </a:r>
                     </a:p>
                   </a:txBody>
-                  <a:tcPr marT="0" marB="0" marL="45720" marR="45720">
+                  <a:tcPr marL="45720" marR="45720" marT="0" marB="0">
                     <a:lnL w="9525" cap="flat" cmpd="sng" algn="ctr">
                       <a:solidFill>
                         <a:srgbClr val="D4DCE7"/>
@@ -9462,7 +9132,7 @@
                       </a:r>
                     </a:p>
                   </a:txBody>
-                  <a:tcPr marT="0" marB="0" marL="45720" marR="45720">
+                  <a:tcPr marL="45720" marR="45720" marT="0" marB="0">
                     <a:lnL w="9525" cap="flat" cmpd="sng" algn="ctr">
                       <a:solidFill>
                         <a:srgbClr val="D4DCE7"/>
@@ -9488,6 +9158,11 @@
                     </a:solidFill>
                   </a:tcPr>
                 </a:tc>
+                <a:extLst>
+                  <a:ext uri="{0D108BD9-81ED-4DB2-BD59-A6C34878D82A}">
+                    <a16:rowId xmlns:a16="http://schemas.microsoft.com/office/drawing/2014/main" val="10003"/>
+                  </a:ext>
+                </a:extLst>
               </a:tr>
               <a:tr h="158750">
                 <a:tc>
@@ -9507,7 +9182,7 @@
                       </a:r>
                     </a:p>
                   </a:txBody>
-                  <a:tcPr marT="0" marB="0" marL="45720" marR="45720">
+                  <a:tcPr marL="45720" marR="45720" marT="0" marB="0">
                     <a:lnL w="9525" cap="flat" cmpd="sng" algn="ctr">
                       <a:solidFill>
                         <a:srgbClr val="D4DCE7"/>
@@ -9550,7 +9225,7 @@
                       </a:r>
                     </a:p>
                   </a:txBody>
-                  <a:tcPr marT="0" marB="0" marL="45720" marR="45720">
+                  <a:tcPr marL="45720" marR="45720" marT="0" marB="0">
                     <a:lnL w="9525" cap="flat" cmpd="sng" algn="ctr">
                       <a:solidFill>
                         <a:srgbClr val="D4DCE7"/>
@@ -9593,7 +9268,7 @@
                       </a:r>
                     </a:p>
                   </a:txBody>
-                  <a:tcPr marT="0" marB="0" marL="45720" marR="45720">
+                  <a:tcPr marL="45720" marR="45720" marT="0" marB="0">
                     <a:lnL w="9525" cap="flat" cmpd="sng" algn="ctr">
                       <a:solidFill>
                         <a:srgbClr val="D4DCE7"/>
@@ -9619,11 +9294,46 @@
                     </a:solidFill>
                   </a:tcPr>
                 </a:tc>
+                <a:extLst>
+                  <a:ext uri="{0D108BD9-81ED-4DB2-BD59-A6C34878D82A}">
+                    <a16:rowId xmlns:a16="http://schemas.microsoft.com/office/drawing/2014/main" val="10004"/>
+                  </a:ext>
+                </a:extLst>
               </a:tr>
             </a:tbl>
           </a:graphicData>
         </a:graphic>
       </p:graphicFrame>
+      <p:pic>
+        <p:nvPicPr>
+          <p:cNvPr id="25" name="图片 24">
+            <a:extLst>
+              <a:ext uri="{FF2B5EF4-FFF2-40B4-BE49-F238E27FC236}">
+                <a16:creationId xmlns:a16="http://schemas.microsoft.com/office/drawing/2014/main" id="{9A71A0D8-F146-5293-D605-DF5BD815B8D2}"/>
+              </a:ext>
+            </a:extLst>
+          </p:cNvPr>
+          <p:cNvPicPr>
+            <a:picLocks noChangeAspect="1"/>
+          </p:cNvPicPr>
+          <p:nvPr/>
+        </p:nvPicPr>
+        <p:blipFill>
+          <a:blip r:embed="rId6"/>
+          <a:stretch>
+            <a:fillRect/>
+          </a:stretch>
+        </p:blipFill>
+        <p:spPr>
+          <a:xfrm>
+            <a:off x="38233742" y="19574130"/>
+            <a:ext cx="2846228" cy="2405063"/>
+          </a:xfrm>
+          <a:prstGeom prst="rect">
+            <a:avLst/>
+          </a:prstGeom>
+        </p:spPr>
+      </p:pic>
     </p:spTree>
     <p:extLst>
       <p:ext uri="{BB962C8B-B14F-4D97-AF65-F5344CB8AC3E}">
@@ -9631,6 +9341,9 @@
       </p:ext>
     </p:extLst>
   </p:cSld>
+  <p:clrMapOvr>
+    <a:masterClrMapping/>
+  </p:clrMapOvr>
 </p:sld>
 </file>
 
@@ -9876,5 +9589,254 @@
       </a:bgFillStyleLst>
     </a:fmtScheme>
   </a:themeElements>
+  <a:objectDefaults/>
+  <a:extraClrSchemeLst/>
+</a:theme>
+</file>
+
+<file path=ppt/theme/theme2.xml><?xml version="1.0" encoding="utf-8"?>
+<a:theme xmlns:a="http://schemas.openxmlformats.org/drawingml/2006/main" name="ChatGPT">
+  <a:themeElements>
+    <a:clrScheme name="ChatGPT">
+      <a:dk1>
+        <a:srgbClr val="000000"/>
+      </a:dk1>
+      <a:lt1>
+        <a:srgbClr val="FFFFFF"/>
+      </a:lt1>
+      <a:dk2>
+        <a:srgbClr val="0E2841"/>
+      </a:dk2>
+      <a:lt2>
+        <a:srgbClr val="E8E8E8"/>
+      </a:lt2>
+      <a:accent1>
+        <a:srgbClr val="156082"/>
+      </a:accent1>
+      <a:accent2>
+        <a:srgbClr val="E97132"/>
+      </a:accent2>
+      <a:accent3>
+        <a:srgbClr val="196B24"/>
+      </a:accent3>
+      <a:accent4>
+        <a:srgbClr val="0F9ED5"/>
+      </a:accent4>
+      <a:accent5>
+        <a:srgbClr val="A02B93"/>
+      </a:accent5>
+      <a:accent6>
+        <a:srgbClr val="4EA72E"/>
+      </a:accent6>
+      <a:hlink>
+        <a:srgbClr val="467886"/>
+      </a:hlink>
+      <a:folHlink>
+        <a:srgbClr val="96607D"/>
+      </a:folHlink>
+    </a:clrScheme>
+    <a:fontScheme name="Office">
+      <a:majorFont>
+        <a:latin typeface="Calibri Light"/>
+        <a:ea typeface="Calibri Light"/>
+        <a:cs typeface="Calibri Light"/>
+      </a:majorFont>
+      <a:minorFont>
+        <a:latin typeface="Calibri"/>
+        <a:ea typeface="Calibri"/>
+        <a:cs typeface="Calibri"/>
+      </a:minorFont>
+    </a:fontScheme>
+    <a:fmtScheme name="ChatGPT">
+      <a:fillStyleLst>
+        <a:solidFill>
+          <a:schemeClr val="phClr"/>
+        </a:solidFill>
+        <a:gradFill>
+          <a:gsLst>
+            <a:gs pos="0">
+              <a:schemeClr val="phClr">
+                <a:tint val="67000"/>
+                <a:lumMod val="110000"/>
+                <a:satMod val="105000"/>
+              </a:schemeClr>
+            </a:gs>
+            <a:gs pos="50000">
+              <a:schemeClr val="phClr">
+                <a:tint val="73000"/>
+                <a:lumMod val="105000"/>
+                <a:satMod val="103000"/>
+              </a:schemeClr>
+            </a:gs>
+            <a:gs pos="100000">
+              <a:schemeClr val="phClr">
+                <a:tint val="81000"/>
+                <a:lumMod val="105000"/>
+                <a:satMod val="109000"/>
+              </a:schemeClr>
+            </a:gs>
+          </a:gsLst>
+          <a:lin ang="5400000" scaled="0"/>
+        </a:gradFill>
+        <a:gradFill>
+          <a:gsLst>
+            <a:gs pos="0">
+              <a:schemeClr val="phClr">
+                <a:tint val="94000"/>
+                <a:lumMod val="102000"/>
+                <a:satMod val="103000"/>
+              </a:schemeClr>
+            </a:gs>
+            <a:gs pos="50000">
+              <a:schemeClr val="phClr">
+                <a:shade val="100000"/>
+                <a:lumMod val="100000"/>
+                <a:satMod val="110000"/>
+              </a:schemeClr>
+            </a:gs>
+            <a:gs pos="100000">
+              <a:schemeClr val="phClr">
+                <a:shade val="78000"/>
+                <a:lumMod val="99000"/>
+                <a:satMod val="120000"/>
+              </a:schemeClr>
+            </a:gs>
+          </a:gsLst>
+          <a:lin ang="5400000" scaled="0"/>
+        </a:gradFill>
+      </a:fillStyleLst>
+      <a:lnStyleLst>
+        <a:ln w="12700">
+          <a:solidFill>
+            <a:schemeClr val="phClr"/>
+          </a:solidFill>
+          <a:prstDash val="solid"/>
+        </a:ln>
+        <a:ln w="19050">
+          <a:solidFill>
+            <a:schemeClr val="phClr"/>
+          </a:solidFill>
+          <a:prstDash val="solid"/>
+        </a:ln>
+        <a:ln w="25400">
+          <a:solidFill>
+            <a:schemeClr val="phClr"/>
+          </a:solidFill>
+          <a:prstDash val="solid"/>
+        </a:ln>
+      </a:lnStyleLst>
+      <a:effectStyleLst>
+        <a:effectStyle>
+          <a:effectLst/>
+        </a:effectStyle>
+        <a:effectStyle>
+          <a:effectLst/>
+        </a:effectStyle>
+        <a:effectStyle>
+          <a:effectLst>
+            <a:outerShdw blurRad="57150" dist="19050" dir="5400000">
+              <a:srgbClr val="000000">
+                <a:alpha val="16000"/>
+              </a:srgbClr>
+            </a:outerShdw>
+          </a:effectLst>
+        </a:effectStyle>
+        <a:effectStyle>
+          <a:effectLst>
+            <a:outerShdw blurRad="19050" dist="9525" dir="5400000">
+              <a:srgbClr val="000000">
+                <a:alpha val="6000"/>
+              </a:srgbClr>
+            </a:outerShdw>
+          </a:effectLst>
+        </a:effectStyle>
+        <a:effectStyle>
+          <a:effectLst>
+            <a:outerShdw blurRad="28575" dist="9525" dir="5400000">
+              <a:srgbClr val="000000">
+                <a:alpha val="8000"/>
+              </a:srgbClr>
+            </a:outerShdw>
+          </a:effectLst>
+        </a:effectStyle>
+        <a:effectStyle>
+          <a:effectLst>
+            <a:outerShdw blurRad="57150" dist="19050" dir="5400000">
+              <a:srgbClr val="000000">
+                <a:alpha val="10000"/>
+              </a:srgbClr>
+            </a:outerShdw>
+          </a:effectLst>
+        </a:effectStyle>
+        <a:effectStyle>
+          <a:effectLst>
+            <a:outerShdw blurRad="114300" dist="38100" dir="5400000">
+              <a:srgbClr val="000000">
+                <a:alpha val="12000"/>
+              </a:srgbClr>
+            </a:outerShdw>
+          </a:effectLst>
+        </a:effectStyle>
+        <a:effectStyle>
+          <a:effectLst>
+            <a:outerShdw blurRad="171450" dist="57150" dir="5400000">
+              <a:srgbClr val="000000">
+                <a:alpha val="16000"/>
+              </a:srgbClr>
+            </a:outerShdw>
+          </a:effectLst>
+        </a:effectStyle>
+        <a:effectStyle>
+          <a:effectLst>
+            <a:outerShdw blurRad="266700" dist="95250" dir="5400000">
+              <a:srgbClr val="000000">
+                <a:alpha val="24000"/>
+              </a:srgbClr>
+            </a:outerShdw>
+          </a:effectLst>
+        </a:effectStyle>
+      </a:effectStyleLst>
+      <a:bgFillStyleLst>
+        <a:solidFill>
+          <a:schemeClr val="phClr"/>
+        </a:solidFill>
+        <a:solidFill>
+          <a:schemeClr val="phClr">
+            <a:tint val="95000"/>
+            <a:satMod val="170000"/>
+          </a:schemeClr>
+        </a:solidFill>
+        <a:gradFill>
+          <a:gsLst>
+            <a:gs pos="0">
+              <a:schemeClr val="phClr">
+                <a:tint val="93000"/>
+                <a:shade val="98000"/>
+                <a:lumMod val="102000"/>
+                <a:satMod val="150000"/>
+              </a:schemeClr>
+            </a:gs>
+            <a:gs pos="50000">
+              <a:schemeClr val="phClr">
+                <a:tint val="98000"/>
+                <a:shade val="90000"/>
+                <a:lumMod val="103000"/>
+                <a:satMod val="130000"/>
+              </a:schemeClr>
+            </a:gs>
+            <a:gs pos="100000">
+              <a:schemeClr val="phClr">
+                <a:shade val="63000"/>
+                <a:satMod val="120000"/>
+              </a:schemeClr>
+            </a:gs>
+          </a:gsLst>
+          <a:lin ang="5400000" scaled="0"/>
+        </a:gradFill>
+      </a:bgFillStyleLst>
+    </a:fmtScheme>
+  </a:themeElements>
+  <a:objectDefaults/>
+  <a:extraClrSchemeLst/>
 </a:theme>
 </file>